--- a/docs/business/SharkQuant_Pitch_ZH.pptx
+++ b/docs/business/SharkQuant_Pitch_ZH.pptx
@@ -350,6 +350,392 @@
 </p:sld>
 </file>
 
+<file path=ppt/slides/slide10.xml><?xml version="1.0" encoding="utf-8"?>
+<p:sld xmlns:a="http://schemas.openxmlformats.org/drawingml/2006/main" xmlns:r="http://schemas.openxmlformats.org/officeDocument/2006/relationships" xmlns:p="http://schemas.openxmlformats.org/presentationml/2006/main">
+  <p:cSld>
+    <p:bg>
+      <p:bgPr>
+        <a:solidFill>
+          <a:srgbClr val="0B0E13"/>
+        </a:solidFill>
+        <a:effectLst/>
+      </p:bgPr>
+    </p:bg>
+    <p:spTree>
+      <p:nvGrpSpPr>
+        <p:cNvPr id="1" name=""/>
+        <p:cNvGrpSpPr/>
+        <p:nvPr/>
+      </p:nvGrpSpPr>
+      <p:grpSpPr>
+        <a:xfrm>
+          <a:off x="0" y="0"/>
+          <a:ext cx="0" cy="0"/>
+          <a:chOff x="0" y="0"/>
+          <a:chExt cx="0" cy="0"/>
+        </a:xfrm>
+      </p:grpSpPr>
+      <p:sp>
+        <p:nvSpPr>
+          <p:cNvPr id="3" name="TextBox 3">
+            <a:extLst>
+              <a:ext uri="{FF2B5EF4-FFF2-40B4-BE49-F238E27FC236}">
+                <a16:creationId xmlns:a16="http://schemas.microsoft.com/office/drawing/2014/main" id="{80D281CE-DC96-4165-B249-814F3013459D}"/>
+              </a:ext>
+            </a:extLst>
+          </p:cNvPr>
+          <p:cNvSpPr txBox="1"/>
+          <p:nvPr/>
+        </p:nvSpPr>
+        <p:spPr>
+          <a:xfrm>
+            <a:off x="685800" y="457200"/>
+            <a:ext cx="10820400" cy="603504"/>
+          </a:xfrm>
+        </p:spPr>
+        <p:txBody>
+          <a:bodyPr wrap="square" rtlCol="0" lIns="0" tIns="0" rIns="0" bIns="0" anchor="t"/>
+          <a:lstStyle/>
+          <a:p>
+            <a:pPr algn="l">
+              <a:lnSpc>
+                <a:spcPct val="110000"/>
+              </a:lnSpc>
+            </a:pPr>
+            <a:r>
+              <a:rPr sz="3600" b="1">
+                <a:solidFill>
+                  <a:srgbClr val="E8EAED"/>
+                </a:solidFill>
+                <a:latin typeface="Microsoft YaHei"/>
+                <a:ea typeface="Microsoft YaHei"/>
+              </a:rPr>
+              <a:t>商业模式：四路收入已内置</a:t>
+            </a:r>
+          </a:p>
+        </p:txBody>
+      </p:sp>
+      <p:sp>
+        <p:nvSpPr>
+          <p:cNvPr id="4" name="TextBox 4">
+            <a:extLst>
+              <a:ext uri="{FF2B5EF4-FFF2-40B4-BE49-F238E27FC236}">
+                <a16:creationId xmlns:a16="http://schemas.microsoft.com/office/drawing/2014/main" id="{E6B8EE1E-BB9B-4AE1-BE8E-7F90D57DD474}"/>
+              </a:ext>
+            </a:extLst>
+          </p:cNvPr>
+          <p:cNvSpPr txBox="1"/>
+          <p:nvPr/>
+        </p:nvSpPr>
+        <p:spPr>
+          <a:xfrm>
+            <a:off x="685800" y="2000250"/>
+            <a:ext cx="4953000" cy="1341120"/>
+          </a:xfrm>
+        </p:spPr>
+        <p:txBody>
+          <a:bodyPr wrap="square" rtlCol="0" lIns="0" tIns="0" rIns="0" bIns="0" anchor="t"/>
+          <a:lstStyle/>
+          <a:p>
+            <a:pPr algn="l">
+              <a:lnSpc>
+                <a:spcPct val="110000"/>
+              </a:lnSpc>
+            </a:pPr>
+            <a:r>
+              <a:rPr sz="8000" b="1">
+                <a:solidFill>
+                  <a:srgbClr val="63E2B7"/>
+                </a:solidFill>
+                <a:latin typeface="Arial"/>
+                <a:ea typeface="Arial"/>
+              </a:rPr>
+              <a:t>$19.9</a:t>
+            </a:r>
+            <a:r>
+              <a:rPr sz="2400" b="1">
+                <a:solidFill>
+                  <a:srgbClr val="9AA1AB"/>
+                </a:solidFill>
+                <a:latin typeface="Microsoft YaHei"/>
+                <a:ea typeface="Microsoft YaHei"/>
+              </a:rPr>
+              <a:t> / 月起</a:t>
+            </a:r>
+          </a:p>
+        </p:txBody>
+      </p:sp>
+      <p:sp>
+        <p:nvSpPr>
+          <p:cNvPr id="5" name="TextBox 5">
+            <a:extLst>
+              <a:ext uri="{FF2B5EF4-FFF2-40B4-BE49-F238E27FC236}">
+                <a16:creationId xmlns:a16="http://schemas.microsoft.com/office/drawing/2014/main" id="{4A4F4BEC-151E-446B-B216-F9A111A74EBE}"/>
+              </a:ext>
+            </a:extLst>
+          </p:cNvPr>
+          <p:cNvSpPr txBox="1"/>
+          <p:nvPr/>
+        </p:nvSpPr>
+        <p:spPr>
+          <a:xfrm>
+            <a:off x="685800" y="3543300"/>
+            <a:ext cx="4953000" cy="266700"/>
+          </a:xfrm>
+        </p:spPr>
+        <p:txBody>
+          <a:bodyPr wrap="square" rtlCol="0" lIns="0" tIns="0" rIns="0" bIns="0" anchor="t"/>
+          <a:lstStyle/>
+          <a:p>
+            <a:pPr algn="l">
+              <a:lnSpc>
+                <a:spcPct val="110000"/>
+              </a:lnSpc>
+            </a:pPr>
+            <a:r>
+              <a:rPr sz="1500">
+                <a:solidFill>
+                  <a:srgbClr val="9AA1AB"/>
+                </a:solidFill>
+                <a:latin typeface="Microsoft YaHei"/>
+                <a:ea typeface="Microsoft YaHei"/>
+              </a:rPr>
+              <a:t>订阅 + 额度 + 市场分成 + 邀请返佣</a:t>
+            </a:r>
+          </a:p>
+        </p:txBody>
+      </p:sp>
+      <p:sp>
+        <p:nvSpPr>
+          <p:cNvPr id="6" name="TextBox 6">
+            <a:extLst>
+              <a:ext uri="{FF2B5EF4-FFF2-40B4-BE49-F238E27FC236}">
+                <a16:creationId xmlns:a16="http://schemas.microsoft.com/office/drawing/2014/main" id="{565B4902-2708-4BF0-891A-09023B046CF2}"/>
+              </a:ext>
+            </a:extLst>
+          </p:cNvPr>
+          <p:cNvSpPr txBox="1"/>
+          <p:nvPr/>
+        </p:nvSpPr>
+        <p:spPr>
+          <a:xfrm>
+            <a:off x="685800" y="3886200"/>
+            <a:ext cx="4953000" cy="495300"/>
+          </a:xfrm>
+        </p:spPr>
+        <p:txBody>
+          <a:bodyPr wrap="square" rtlCol="0" lIns="0" tIns="0" rIns="0" bIns="0" anchor="t"/>
+          <a:lstStyle/>
+          <a:p>
+            <a:pPr algn="l">
+              <a:lnSpc>
+                <a:spcPct val="130000"/>
+              </a:lnSpc>
+            </a:pPr>
+            <a:r>
+              <a:rPr sz="1300">
+                <a:solidFill>
+                  <a:srgbClr val="6B7280"/>
+                </a:solidFill>
+                <a:latin typeface="Microsoft YaHei"/>
+                <a:ea typeface="Microsoft YaHei"/>
+              </a:rPr>
+              <a:t>面向全球散户与半专业交易者；免费档 5 个运行策略，付费档 10 个</a:t>
+            </a:r>
+          </a:p>
+        </p:txBody>
+      </p:sp>
+      <p:sp>
+        <p:nvSpPr>
+          <p:cNvPr id="7" name="TextBox 7">
+            <a:extLst>
+              <a:ext uri="{FF2B5EF4-FFF2-40B4-BE49-F238E27FC236}">
+                <a16:creationId xmlns:a16="http://schemas.microsoft.com/office/drawing/2014/main" id="{0E7EF363-B991-47C3-B543-1BB094E2B756}"/>
+              </a:ext>
+            </a:extLst>
+          </p:cNvPr>
+          <p:cNvSpPr txBox="1"/>
+          <p:nvPr/>
+        </p:nvSpPr>
+        <p:spPr>
+          <a:xfrm>
+            <a:off x="6096000" y="1905000"/>
+            <a:ext cx="5410200" cy="3143250"/>
+          </a:xfrm>
+        </p:spPr>
+        <p:txBody>
+          <a:bodyPr wrap="square" rtlCol="0" lIns="0" tIns="0" rIns="0" bIns="0" anchor="t"/>
+          <a:lstStyle/>
+          <a:p>
+            <a:pPr algn="l">
+              <a:lnSpc>
+                <a:spcPct val="140000"/>
+              </a:lnSpc>
+              <a:spcAft>
+                <a:spcPts val="1800"/>
+              </a:spcAft>
+            </a:pPr>
+            <a:r>
+              <a:rPr sz="1550" b="1">
+                <a:solidFill>
+                  <a:srgbClr val="E8EAED"/>
+                </a:solidFill>
+                <a:latin typeface="Microsoft YaHei"/>
+                <a:ea typeface="Microsoft YaHei"/>
+              </a:rPr>
+              <a:t>会员订阅</a:t>
+            </a:r>
+            <a:r>
+              <a:rPr sz="1300">
+                <a:solidFill>
+                  <a:srgbClr val="9AA1AB"/>
+                </a:solidFill>
+                <a:latin typeface="Microsoft YaHei"/>
+                <a:ea typeface="Microsoft YaHei"/>
+              </a:rPr>
+              <a:t>——$19.9/月 · $199/年（主推档）· $499 终身</a:t>
+            </a:r>
+          </a:p>
+          <a:p>
+            <a:pPr algn="l">
+              <a:lnSpc>
+                <a:spcPct val="140000"/>
+              </a:lnSpc>
+              <a:spcAft>
+                <a:spcPts val="1800"/>
+              </a:spcAft>
+            </a:pPr>
+            <a:r>
+              <a:rPr sz="1550" b="1">
+                <a:solidFill>
+                  <a:srgbClr val="E8EAED"/>
+                </a:solidFill>
+                <a:latin typeface="Microsoft YaHei"/>
+                <a:ea typeface="Microsoft YaHei"/>
+              </a:rPr>
+              <a:t>用量额度</a:t>
+            </a:r>
+            <a:r>
+              <a:rPr sz="1300">
+                <a:solidFill>
+                  <a:srgbClr val="9AA1AB"/>
+                </a:solidFill>
+                <a:latin typeface="Microsoft YaHei"/>
+                <a:ea typeface="Microsoft YaHei"/>
+              </a:rPr>
+              <a:t>——AI 与回测按次扣减（回测 30、AI 分析 10、对话 5…）</a:t>
+            </a:r>
+          </a:p>
+          <a:p>
+            <a:pPr algn="l">
+              <a:lnSpc>
+                <a:spcPct val="140000"/>
+              </a:lnSpc>
+              <a:spcAft>
+                <a:spcPts val="1800"/>
+              </a:spcAft>
+            </a:pPr>
+            <a:r>
+              <a:rPr sz="1550" b="1">
+                <a:solidFill>
+                  <a:srgbClr val="E8EAED"/>
+                </a:solidFill>
+                <a:latin typeface="Microsoft YaHei"/>
+                <a:ea typeface="Microsoft YaHei"/>
+              </a:rPr>
+              <a:t>指标市场</a:t>
+            </a:r>
+            <a:r>
+              <a:rPr sz="1300">
+                <a:solidFill>
+                  <a:srgbClr val="9AA1AB"/>
+                </a:solidFill>
+                <a:latin typeface="Microsoft YaHei"/>
+                <a:ea typeface="Microsoft YaHei"/>
+              </a:rPr>
+              <a:t>——平台分成（费率可配置），创作者生态就位</a:t>
+            </a:r>
+          </a:p>
+          <a:p>
+            <a:pPr algn="l">
+              <a:lnSpc>
+                <a:spcPct val="140000"/>
+              </a:lnSpc>
+              <a:spcAft>
+                <a:spcPts val="0"/>
+              </a:spcAft>
+            </a:pPr>
+            <a:r>
+              <a:rPr sz="1550" b="1">
+                <a:solidFill>
+                  <a:srgbClr val="E8EAED"/>
+                </a:solidFill>
+                <a:latin typeface="Microsoft YaHei"/>
+                <a:ea typeface="Microsoft YaHei"/>
+              </a:rPr>
+              <a:t>邀请返佣</a:t>
+            </a:r>
+            <a:r>
+              <a:rPr sz="1300">
+                <a:solidFill>
+                  <a:srgbClr val="9AA1AB"/>
+                </a:solidFill>
+                <a:latin typeface="Microsoft YaHei"/>
+                <a:ea typeface="Microsoft YaHei"/>
+              </a:rPr>
+              <a:t>——注册赠 100 额度 · 三级返佣 10/5/3%（已内置）</a:t>
+            </a:r>
+          </a:p>
+        </p:txBody>
+      </p:sp>
+      <p:sp>
+        <p:nvSpPr>
+          <p:cNvPr id="8" name="TextBox 8">
+            <a:extLst>
+              <a:ext uri="{FF2B5EF4-FFF2-40B4-BE49-F238E27FC236}">
+                <a16:creationId xmlns:a16="http://schemas.microsoft.com/office/drawing/2014/main" id="{BA2B4F76-0382-4869-8FDA-67ABFBFD73B6}"/>
+              </a:ext>
+            </a:extLst>
+          </p:cNvPr>
+          <p:cNvSpPr txBox="1"/>
+          <p:nvPr/>
+        </p:nvSpPr>
+        <p:spPr>
+          <a:xfrm>
+            <a:off x="685800" y="5638800"/>
+            <a:ext cx="10820400" cy="266700"/>
+          </a:xfrm>
+        </p:spPr>
+        <p:txBody>
+          <a:bodyPr wrap="square" rtlCol="0" lIns="0" tIns="0" rIns="0" bIns="0" anchor="t"/>
+          <a:lstStyle/>
+          <a:p>
+            <a:pPr algn="l">
+              <a:lnSpc>
+                <a:spcPct val="110000"/>
+              </a:lnSpc>
+            </a:pPr>
+            <a:r>
+              <a:rPr sz="1400">
+                <a:solidFill>
+                  <a:srgbClr val="8FB8FF"/>
+                </a:solidFill>
+                <a:latin typeface="Microsoft YaHei"/>
+                <a:ea typeface="Microsoft YaHei"/>
+              </a:rPr>
+              <a:t>支付通道（Stripe + 稳定币）已内置，开通即可全量计费；指标市场与返佣随之上线</a:t>
+            </a:r>
+          </a:p>
+        </p:txBody>
+      </p:sp>
+    </p:spTree>
+  </p:cSld>
+  <p:clrMapOvr>
+    <a:masterClrMapping/>
+  </p:clrMapOvr>
+</p:sld>
+</file>
+
 <file path=ppt/slides/slide11.xml><?xml version="1.0" encoding="utf-8"?>
 <p:sld xmlns:a="http://schemas.openxmlformats.org/drawingml/2006/main" xmlns:r="http://schemas.openxmlformats.org/officeDocument/2006/relationships" xmlns:p="http://schemas.openxmlformats.org/presentationml/2006/main">
   <p:cSld>
@@ -380,7 +766,7 @@
           <p:cNvPr id="3" name="TextBox 3">
             <a:extLst>
               <a:ext uri="{FF2B5EF4-FFF2-40B4-BE49-F238E27FC236}">
-                <a16:creationId xmlns:a16="http://schemas.microsoft.com/office/drawing/2014/main" id="{2E68D41B-F74A-4520-A1F9-E61845570E7A}"/>
+                <a16:creationId xmlns:a16="http://schemas.microsoft.com/office/drawing/2014/main" id="{9E423D24-E131-41C3-86CF-88B06BBE3F54}"/>
               </a:ext>
             </a:extLst>
           </p:cNvPr>
@@ -410,7 +796,7 @@
                 <a:latin typeface="Microsoft YaHei"/>
                 <a:ea typeface="Microsoft YaHei"/>
               </a:rPr>
-              <a:t>竞争定位：整合度 × AI 原生度</a:t>
+              <a:t>工程壁垒：交易级的安全与规模</a:t>
             </a:r>
           </a:p>
         </p:txBody>
@@ -420,7 +806,7 @@
           <p:cNvPr id="4" name="TextBox 4">
             <a:extLst>
               <a:ext uri="{FF2B5EF4-FFF2-40B4-BE49-F238E27FC236}">
-                <a16:creationId xmlns:a16="http://schemas.microsoft.com/office/drawing/2014/main" id="{031F0D94-6724-48A9-BCC4-3ADABD5CD365}"/>
+                <a16:creationId xmlns:a16="http://schemas.microsoft.com/office/drawing/2014/main" id="{9EB6A665-DFA6-4FBA-BF56-8119BAAC4D88}"/>
               </a:ext>
             </a:extLst>
           </p:cNvPr>
@@ -450,7 +836,7 @@
                 <a:latin typeface="Microsoft YaHei"/>
                 <a:ea typeface="Microsoft YaHei"/>
               </a:rPr>
-              <a:t>横轴：全链路整合度（分析 → 执行）｜纵轴：AI 原生度</a:t>
+              <a:t>全链路产品的复杂度就是护城河——每一个数字都可在生产环境验证</a:t>
             </a:r>
           </a:p>
         </p:txBody>
@@ -460,7 +846,7 @@
           <p:cNvPr id="5" name="Shape 5">
             <a:extLst>
               <a:ext uri="{FF2B5EF4-FFF2-40B4-BE49-F238E27FC236}">
-                <a16:creationId xmlns:a16="http://schemas.microsoft.com/office/drawing/2014/main" id="{4BFFC4B3-89E2-4C0D-9A1D-0E478CCC5C5E}"/>
+                <a16:creationId xmlns:a16="http://schemas.microsoft.com/office/drawing/2014/main" id="{0D5E15F8-89FF-4167-AEB9-A1F8BC3B60F9}"/>
               </a:ext>
             </a:extLst>
           </p:cNvPr>
@@ -469,318 +855,8 @@
         </p:nvSpPr>
         <p:spPr>
           <a:xfrm>
-            <a:off x="1333500" y="3810000"/>
-            <a:ext cx="9525000" cy="19050"/>
-          </a:xfrm>
-          <a:prstGeom prst="rect">
-            <a:avLst/>
-          </a:prstGeom>
-          <a:solidFill>
-            <a:srgbClr val="232A33"/>
-          </a:solidFill>
-        </p:spPr>
-        <p:txBody>
-          <a:bodyPr wrap="square" rtlCol="0"/>
-          <a:lstStyle/>
-          <a:p>
-            <a:r>
-              <a:rPr/>
-              <a:t/>
-            </a:r>
-          </a:p>
-        </p:txBody>
-      </p:sp>
-      <p:sp>
-        <p:nvSpPr>
-          <p:cNvPr id="6" name="Shape 6">
-            <a:extLst>
-              <a:ext uri="{FF2B5EF4-FFF2-40B4-BE49-F238E27FC236}">
-                <a16:creationId xmlns:a16="http://schemas.microsoft.com/office/drawing/2014/main" id="{B328A199-3FA0-43FE-ADFD-1E2217678ABD}"/>
-              </a:ext>
-            </a:extLst>
-          </p:cNvPr>
-          <p:cNvSpPr/>
-          <p:nvPr/>
-        </p:nvSpPr>
-        <p:spPr>
-          <a:xfrm>
-            <a:off x="6096000" y="1619250"/>
-            <a:ext cx="19050" cy="4191000"/>
-          </a:xfrm>
-          <a:prstGeom prst="rect">
-            <a:avLst/>
-          </a:prstGeom>
-          <a:solidFill>
-            <a:srgbClr val="232A33"/>
-          </a:solidFill>
-        </p:spPr>
-        <p:txBody>
-          <a:bodyPr wrap="square" rtlCol="0"/>
-          <a:lstStyle/>
-          <a:p>
-            <a:r>
-              <a:rPr/>
-              <a:t/>
-            </a:r>
-          </a:p>
-        </p:txBody>
-      </p:sp>
-      <p:sp>
-        <p:nvSpPr>
-          <p:cNvPr id="7" name="TextBox 7">
-            <a:extLst>
-              <a:ext uri="{FF2B5EF4-FFF2-40B4-BE49-F238E27FC236}">
-                <a16:creationId xmlns:a16="http://schemas.microsoft.com/office/drawing/2014/main" id="{B0CF9E07-23C4-4094-8FF2-27EE01D7730E}"/>
-              </a:ext>
-            </a:extLst>
-          </p:cNvPr>
-          <p:cNvSpPr txBox="1"/>
-          <p:nvPr/>
-        </p:nvSpPr>
-        <p:spPr>
-          <a:xfrm>
-            <a:off x="8096250" y="3924300"/>
-            <a:ext cx="2857500" cy="228600"/>
-          </a:xfrm>
-        </p:spPr>
-        <p:txBody>
-          <a:bodyPr wrap="square" rtlCol="0" lIns="0" tIns="0" rIns="0" bIns="0" anchor="t"/>
-          <a:lstStyle/>
-          <a:p>
-            <a:pPr algn="l">
-              <a:lnSpc>
-                <a:spcPct val="110000"/>
-              </a:lnSpc>
-            </a:pPr>
-            <a:r>
-              <a:rPr sz="1200">
-                <a:solidFill>
-                  <a:srgbClr val="6B7280"/>
-                </a:solidFill>
-                <a:latin typeface="Microsoft YaHei"/>
-                <a:ea typeface="Microsoft YaHei"/>
-              </a:rPr>
-              <a:t>全链路整合（分析 → 执行） →</a:t>
-            </a:r>
-          </a:p>
-        </p:txBody>
-      </p:sp>
-      <p:sp>
-        <p:nvSpPr>
-          <p:cNvPr id="8" name="TextBox 8">
-            <a:extLst>
-              <a:ext uri="{FF2B5EF4-FFF2-40B4-BE49-F238E27FC236}">
-                <a16:creationId xmlns:a16="http://schemas.microsoft.com/office/drawing/2014/main" id="{7371159C-C0D0-4D42-99B1-1801C3023651}"/>
-              </a:ext>
-            </a:extLst>
-          </p:cNvPr>
-          <p:cNvSpPr txBox="1"/>
-          <p:nvPr/>
-        </p:nvSpPr>
-        <p:spPr>
-          <a:xfrm>
-            <a:off x="1123950" y="1600200"/>
-            <a:ext cx="1905000" cy="228600"/>
-          </a:xfrm>
-        </p:spPr>
-        <p:txBody>
-          <a:bodyPr wrap="square" rtlCol="0" lIns="0" tIns="0" rIns="0" bIns="0" anchor="t"/>
-          <a:lstStyle/>
-          <a:p>
-            <a:pPr algn="l">
-              <a:lnSpc>
-                <a:spcPct val="110000"/>
-              </a:lnSpc>
-            </a:pPr>
-            <a:r>
-              <a:rPr sz="1200">
-                <a:solidFill>
-                  <a:srgbClr val="6B7280"/>
-                </a:solidFill>
-                <a:latin typeface="Microsoft YaHei"/>
-                <a:ea typeface="Microsoft YaHei"/>
-              </a:rPr>
-              <a:t>AI 原生度 ↑</a:t>
-            </a:r>
-          </a:p>
-        </p:txBody>
-      </p:sp>
-      <p:sp>
-        <p:nvSpPr>
-          <p:cNvPr id="9" name="TextBox 9">
-            <a:extLst>
-              <a:ext uri="{FF2B5EF4-FFF2-40B4-BE49-F238E27FC236}">
-                <a16:creationId xmlns:a16="http://schemas.microsoft.com/office/drawing/2014/main" id="{F92FD14F-6118-4AD6-99A4-8705BFC96474}"/>
-              </a:ext>
-            </a:extLst>
-          </p:cNvPr>
-          <p:cNvSpPr txBox="1"/>
-          <p:nvPr/>
-        </p:nvSpPr>
-        <p:spPr>
-          <a:xfrm>
-            <a:off x="1619250" y="1866900"/>
-            <a:ext cx="2286000" cy="228600"/>
-          </a:xfrm>
-        </p:spPr>
-        <p:txBody>
-          <a:bodyPr wrap="square" rtlCol="0" lIns="0" tIns="0" rIns="0" bIns="0" anchor="t"/>
-          <a:lstStyle/>
-          <a:p>
-            <a:pPr algn="l">
-              <a:lnSpc>
-                <a:spcPct val="110000"/>
-              </a:lnSpc>
-            </a:pPr>
-            <a:r>
-              <a:rPr sz="1200">
-                <a:solidFill>
-                  <a:srgbClr val="4B5563"/>
-                </a:solidFill>
-                <a:latin typeface="Microsoft YaHei"/>
-                <a:ea typeface="Microsoft YaHei"/>
-              </a:rPr>
-              <a:t>分析工具 × AI 增强</a:t>
-            </a:r>
-          </a:p>
-        </p:txBody>
-      </p:sp>
-      <p:sp>
-        <p:nvSpPr>
-          <p:cNvPr id="10" name="TextBox 10">
-            <a:extLst>
-              <a:ext uri="{FF2B5EF4-FFF2-40B4-BE49-F238E27FC236}">
-                <a16:creationId xmlns:a16="http://schemas.microsoft.com/office/drawing/2014/main" id="{1E1E7317-D801-41E4-8D33-DBFF70D73F1B}"/>
-              </a:ext>
-            </a:extLst>
-          </p:cNvPr>
-          <p:cNvSpPr txBox="1"/>
-          <p:nvPr/>
-        </p:nvSpPr>
-        <p:spPr>
-          <a:xfrm>
-            <a:off x="6324600" y="1866900"/>
-            <a:ext cx="2286000" cy="228600"/>
-          </a:xfrm>
-        </p:spPr>
-        <p:txBody>
-          <a:bodyPr wrap="square" rtlCol="0" lIns="0" tIns="0" rIns="0" bIns="0" anchor="t"/>
-          <a:lstStyle/>
-          <a:p>
-            <a:pPr algn="l">
-              <a:lnSpc>
-                <a:spcPct val="110000"/>
-              </a:lnSpc>
-            </a:pPr>
-            <a:r>
-              <a:rPr sz="1200">
-                <a:solidFill>
-                  <a:srgbClr val="4B5563"/>
-                </a:solidFill>
-                <a:latin typeface="Microsoft YaHei"/>
-                <a:ea typeface="Microsoft YaHei"/>
-              </a:rPr>
-              <a:t>全链路 × AI 原生</a:t>
-            </a:r>
-          </a:p>
-        </p:txBody>
-      </p:sp>
-      <p:sp>
-        <p:nvSpPr>
-          <p:cNvPr id="11" name="TextBox 11">
-            <a:extLst>
-              <a:ext uri="{FF2B5EF4-FFF2-40B4-BE49-F238E27FC236}">
-                <a16:creationId xmlns:a16="http://schemas.microsoft.com/office/drawing/2014/main" id="{67EC50CF-EC20-4347-9424-951E9DB47968}"/>
-              </a:ext>
-            </a:extLst>
-          </p:cNvPr>
-          <p:cNvSpPr txBox="1"/>
-          <p:nvPr/>
-        </p:nvSpPr>
-        <p:spPr>
-          <a:xfrm>
-            <a:off x="1619250" y="5467350"/>
-            <a:ext cx="2286000" cy="228600"/>
-          </a:xfrm>
-        </p:spPr>
-        <p:txBody>
-          <a:bodyPr wrap="square" rtlCol="0" lIns="0" tIns="0" rIns="0" bIns="0" anchor="t"/>
-          <a:lstStyle/>
-          <a:p>
-            <a:pPr algn="l">
-              <a:lnSpc>
-                <a:spcPct val="110000"/>
-              </a:lnSpc>
-            </a:pPr>
-            <a:r>
-              <a:rPr sz="1200">
-                <a:solidFill>
-                  <a:srgbClr val="4B5563"/>
-                </a:solidFill>
-                <a:latin typeface="Microsoft YaHei"/>
-                <a:ea typeface="Microsoft YaHei"/>
-              </a:rPr>
-              <a:t>单点工具 × 传统</a:t>
-            </a:r>
-          </a:p>
-        </p:txBody>
-      </p:sp>
-      <p:sp>
-        <p:nvSpPr>
-          <p:cNvPr id="12" name="TextBox 12">
-            <a:extLst>
-              <a:ext uri="{FF2B5EF4-FFF2-40B4-BE49-F238E27FC236}">
-                <a16:creationId xmlns:a16="http://schemas.microsoft.com/office/drawing/2014/main" id="{D078BCF4-B076-42CA-AB2C-5B07AD3B4D27}"/>
-              </a:ext>
-            </a:extLst>
-          </p:cNvPr>
-          <p:cNvSpPr txBox="1"/>
-          <p:nvPr/>
-        </p:nvSpPr>
-        <p:spPr>
-          <a:xfrm>
-            <a:off x="6324600" y="5467350"/>
-            <a:ext cx="2286000" cy="228600"/>
-          </a:xfrm>
-        </p:spPr>
-        <p:txBody>
-          <a:bodyPr wrap="square" rtlCol="0" lIns="0" tIns="0" rIns="0" bIns="0" anchor="t"/>
-          <a:lstStyle/>
-          <a:p>
-            <a:pPr algn="l">
-              <a:lnSpc>
-                <a:spcPct val="110000"/>
-              </a:lnSpc>
-            </a:pPr>
-            <a:r>
-              <a:rPr sz="1200">
-                <a:solidFill>
-                  <a:srgbClr val="4B5563"/>
-                </a:solidFill>
-                <a:latin typeface="Microsoft YaHei"/>
-                <a:ea typeface="Microsoft YaHei"/>
-              </a:rPr>
-              <a:t>自动执行 × AI 弱</a:t>
-            </a:r>
-          </a:p>
-        </p:txBody>
-      </p:sp>
-      <p:sp>
-        <p:nvSpPr>
-          <p:cNvPr id="13" name="Shape 13">
-            <a:extLst>
-              <a:ext uri="{FF2B5EF4-FFF2-40B4-BE49-F238E27FC236}">
-                <a16:creationId xmlns:a16="http://schemas.microsoft.com/office/drawing/2014/main" id="{216FD771-0754-4301-A5DF-43038D11295B}"/>
-              </a:ext>
-            </a:extLst>
-          </p:cNvPr>
-          <p:cNvSpPr/>
-          <p:nvPr/>
-        </p:nvSpPr>
-        <p:spPr>
-          <a:xfrm>
-            <a:off x="2381250" y="2343150"/>
-            <a:ext cx="2190750" cy="742950"/>
+            <a:off x="685800" y="1619250"/>
+            <a:ext cx="3352800" cy="3429000"/>
           </a:xfrm>
           <a:prstGeom prst="roundRect">
             <a:avLst/>
@@ -807,10 +883,10 @@
       </p:sp>
       <p:sp>
         <p:nvSpPr>
-          <p:cNvPr id="14" name="Shape 14">
-            <a:extLst>
-              <a:ext uri="{FF2B5EF4-FFF2-40B4-BE49-F238E27FC236}">
-                <a16:creationId xmlns:a16="http://schemas.microsoft.com/office/drawing/2014/main" id="{17375B0E-0998-40BF-A16A-FC578E879953}"/>
+          <p:cNvPr id="6" name="Shape 6">
+            <a:extLst>
+              <a:ext uri="{FF2B5EF4-FFF2-40B4-BE49-F238E27FC236}">
+                <a16:creationId xmlns:a16="http://schemas.microsoft.com/office/drawing/2014/main" id="{1CD87E35-ED65-431D-A097-4689292A8A30}"/>
               </a:ext>
             </a:extLst>
           </p:cNvPr>
@@ -819,8 +895,8 @@
         </p:nvSpPr>
         <p:spPr>
           <a:xfrm>
-            <a:off x="2381250" y="4476750"/>
-            <a:ext cx="2190750" cy="742950"/>
+            <a:off x="4419600" y="1619250"/>
+            <a:ext cx="3352800" cy="3429000"/>
           </a:xfrm>
           <a:prstGeom prst="roundRect">
             <a:avLst/>
@@ -847,10 +923,10 @@
       </p:sp>
       <p:sp>
         <p:nvSpPr>
-          <p:cNvPr id="15" name="Shape 15">
-            <a:extLst>
-              <a:ext uri="{FF2B5EF4-FFF2-40B4-BE49-F238E27FC236}">
-                <a16:creationId xmlns:a16="http://schemas.microsoft.com/office/drawing/2014/main" id="{6BF2A567-19E2-478A-9C60-30D3F7DF9040}"/>
+          <p:cNvPr id="7" name="Shape 7">
+            <a:extLst>
+              <a:ext uri="{FF2B5EF4-FFF2-40B4-BE49-F238E27FC236}">
+                <a16:creationId xmlns:a16="http://schemas.microsoft.com/office/drawing/2014/main" id="{D9D09037-8852-4812-B82E-09A0C8017FBD}"/>
               </a:ext>
             </a:extLst>
           </p:cNvPr>
@@ -859,8 +935,8 @@
         </p:nvSpPr>
         <p:spPr>
           <a:xfrm>
-            <a:off x="7734300" y="2343150"/>
-            <a:ext cx="2190750" cy="742950"/>
+            <a:off x="8153400" y="1619250"/>
+            <a:ext cx="3352800" cy="3429000"/>
           </a:xfrm>
           <a:prstGeom prst="roundRect">
             <a:avLst/>
@@ -887,400 +963,290 @@
       </p:sp>
       <p:sp>
         <p:nvSpPr>
-          <p:cNvPr id="16" name="Shape 16">
-            <a:extLst>
-              <a:ext uri="{FF2B5EF4-FFF2-40B4-BE49-F238E27FC236}">
-                <a16:creationId xmlns:a16="http://schemas.microsoft.com/office/drawing/2014/main" id="{06B6EF63-7562-4325-B22D-DDADE16B4D47}"/>
-              </a:ext>
-            </a:extLst>
-          </p:cNvPr>
-          <p:cNvSpPr/>
-          <p:nvPr/>
-        </p:nvSpPr>
-        <p:spPr>
-          <a:xfrm>
-            <a:off x="7734300" y="4476750"/>
-            <a:ext cx="2190750" cy="742950"/>
-          </a:xfrm>
-          <a:prstGeom prst="roundRect">
-            <a:avLst/>
-          </a:prstGeom>
-          <a:solidFill>
-            <a:srgbClr val="14181F"/>
-          </a:solidFill>
-          <a:ln w="19050">
-            <a:solidFill>
-              <a:srgbClr val="63E2B7"/>
-            </a:solidFill>
-          </a:ln>
-        </p:spPr>
-        <p:txBody>
-          <a:bodyPr wrap="square" rtlCol="0"/>
-          <a:lstStyle/>
-          <a:p>
-            <a:r>
-              <a:rPr/>
-              <a:t/>
-            </a:r>
-          </a:p>
-        </p:txBody>
-      </p:sp>
-      <p:sp>
-        <p:nvSpPr>
-          <p:cNvPr id="17" name="TextBox 17">
-            <a:extLst>
-              <a:ext uri="{FF2B5EF4-FFF2-40B4-BE49-F238E27FC236}">
-                <a16:creationId xmlns:a16="http://schemas.microsoft.com/office/drawing/2014/main" id="{4CB846C1-98DB-4492-AF86-4129E861E4AA}"/>
-              </a:ext>
-            </a:extLst>
-          </p:cNvPr>
-          <p:cNvSpPr txBox="1"/>
-          <p:nvPr/>
-        </p:nvSpPr>
-        <p:spPr>
-          <a:xfrm>
-            <a:off x="2552700" y="2438400"/>
-            <a:ext cx="1905000" cy="266700"/>
-          </a:xfrm>
-        </p:spPr>
-        <p:txBody>
-          <a:bodyPr wrap="square" rtlCol="0" lIns="0" tIns="0" rIns="0" bIns="0" anchor="t"/>
-          <a:lstStyle/>
-          <a:p>
-            <a:pPr algn="l">
-              <a:lnSpc>
-                <a:spcPct val="110000"/>
-              </a:lnSpc>
-            </a:pPr>
+          <p:cNvPr id="8" name="TextBox 8">
+            <a:extLst>
+              <a:ext uri="{FF2B5EF4-FFF2-40B4-BE49-F238E27FC236}">
+                <a16:creationId xmlns:a16="http://schemas.microsoft.com/office/drawing/2014/main" id="{AE4AB0B2-A750-43E7-A290-21195DEE6D7A}"/>
+              </a:ext>
+            </a:extLst>
+          </p:cNvPr>
+          <p:cNvSpPr txBox="1"/>
+          <p:nvPr/>
+        </p:nvSpPr>
+        <p:spPr>
+          <a:xfrm>
+            <a:off x="952500" y="1924050"/>
+            <a:ext cx="2819400" cy="419100"/>
+          </a:xfrm>
+        </p:spPr>
+        <p:txBody>
+          <a:bodyPr wrap="square" rtlCol="0" lIns="0" tIns="0" rIns="0" bIns="0" anchor="t"/>
+          <a:lstStyle/>
+          <a:p>
+            <a:pPr algn="l">
+              <a:lnSpc>
+                <a:spcPct val="110000"/>
+              </a:lnSpc>
+            </a:pPr>
+            <a:r>
+              <a:rPr sz="2000" b="1">
+                <a:solidFill>
+                  <a:srgbClr val="E8EAED"/>
+                </a:solidFill>
+                <a:latin typeface="Microsoft YaHei"/>
+                <a:ea typeface="Microsoft YaHei"/>
+              </a:rPr>
+              <a:t>分布式交易运行时</a:t>
+            </a:r>
+          </a:p>
+        </p:txBody>
+      </p:sp>
+      <p:sp>
+        <p:nvSpPr>
+          <p:cNvPr id="9" name="TextBox 9">
+            <a:extLst>
+              <a:ext uri="{FF2B5EF4-FFF2-40B4-BE49-F238E27FC236}">
+                <a16:creationId xmlns:a16="http://schemas.microsoft.com/office/drawing/2014/main" id="{DF92E64B-59DA-4E98-B407-BF1C8196459B}"/>
+              </a:ext>
+            </a:extLst>
+          </p:cNvPr>
+          <p:cNvSpPr txBox="1"/>
+          <p:nvPr/>
+        </p:nvSpPr>
+        <p:spPr>
+          <a:xfrm>
+            <a:off x="952500" y="2438400"/>
+            <a:ext cx="2819400" cy="2381250"/>
+          </a:xfrm>
+        </p:spPr>
+        <p:txBody>
+          <a:bodyPr wrap="square" rtlCol="0" lIns="0" tIns="0" rIns="0" bIns="0" anchor="t"/>
+          <a:lstStyle/>
+          <a:p>
+            <a:pPr algn="l">
+              <a:lnSpc>
+                <a:spcPct val="150000"/>
+              </a:lnSpc>
+            </a:pPr>
+            <a:r>
+              <a:rPr sz="1300">
+                <a:solidFill>
+                  <a:srgbClr val="9AA1AB"/>
+                </a:solidFill>
+                <a:latin typeface="Microsoft YaHei"/>
+                <a:ea typeface="Microsoft YaHei"/>
+              </a:rPr>
+              <a:t>18 个容器服务：PostgreSQL 唯一真相源 · Kafka 版本化事件 · 策略运行时与 API 进程物理隔离；从单机演练升级到事件驱动架构。</a:t>
+            </a:r>
+          </a:p>
+        </p:txBody>
+      </p:sp>
+      <p:sp>
+        <p:nvSpPr>
+          <p:cNvPr id="10" name="TextBox 10">
+            <a:extLst>
+              <a:ext uri="{FF2B5EF4-FFF2-40B4-BE49-F238E27FC236}">
+                <a16:creationId xmlns:a16="http://schemas.microsoft.com/office/drawing/2014/main" id="{C37876AB-42F3-48E7-A0D4-AF493BF84299}"/>
+              </a:ext>
+            </a:extLst>
+          </p:cNvPr>
+          <p:cNvSpPr txBox="1"/>
+          <p:nvPr/>
+        </p:nvSpPr>
+        <p:spPr>
+          <a:xfrm>
+            <a:off x="4686300" y="1924050"/>
+            <a:ext cx="2819400" cy="419100"/>
+          </a:xfrm>
+        </p:spPr>
+        <p:txBody>
+          <a:bodyPr wrap="square" rtlCol="0" lIns="0" tIns="0" rIns="0" bIns="0" anchor="t"/>
+          <a:lstStyle/>
+          <a:p>
+            <a:pPr algn="l">
+              <a:lnSpc>
+                <a:spcPct val="110000"/>
+              </a:lnSpc>
+            </a:pPr>
+            <a:r>
+              <a:rPr sz="2000" b="1">
+                <a:solidFill>
+                  <a:srgbClr val="E8EAED"/>
+                </a:solidFill>
+                <a:latin typeface="Microsoft YaHei"/>
+                <a:ea typeface="Microsoft YaHei"/>
+              </a:rPr>
+              <a:t>资金安全设计</a:t>
+            </a:r>
+          </a:p>
+        </p:txBody>
+      </p:sp>
+      <p:sp>
+        <p:nvSpPr>
+          <p:cNvPr id="11" name="TextBox 11">
+            <a:extLst>
+              <a:ext uri="{FF2B5EF4-FFF2-40B4-BE49-F238E27FC236}">
+                <a16:creationId xmlns:a16="http://schemas.microsoft.com/office/drawing/2014/main" id="{AE004D1D-805F-4C90-80E2-9D57C4AFF699}"/>
+              </a:ext>
+            </a:extLst>
+          </p:cNvPr>
+          <p:cNvSpPr txBox="1"/>
+          <p:nvPr/>
+        </p:nvSpPr>
+        <p:spPr>
+          <a:xfrm>
+            <a:off x="4686300" y="2438400"/>
+            <a:ext cx="2819400" cy="2381250"/>
+          </a:xfrm>
+        </p:spPr>
+        <p:txBody>
+          <a:bodyPr wrap="square" rtlCol="0" lIns="0" tIns="0" rIns="0" bIns="0" anchor="t"/>
+          <a:lstStyle/>
+          <a:p>
+            <a:pPr algn="l">
+              <a:lnSpc>
+                <a:spcPct val="150000"/>
+              </a:lnSpc>
+            </a:pPr>
+            <a:r>
+              <a:rPr sz="1300">
+                <a:solidFill>
+                  <a:srgbClr val="9AA1AB"/>
+                </a:solidFill>
+                <a:latin typeface="Microsoft YaHei"/>
+                <a:ea typeface="Microsoft YaHei"/>
+              </a:rPr>
+              <a:t>租约 + 心跳 + fencing + 幂等键，防止重复下单；Agent 实盘 4 条件门控；全量操作审计——资金安全优先于便利。</a:t>
+            </a:r>
+          </a:p>
+        </p:txBody>
+      </p:sp>
+      <p:sp>
+        <p:nvSpPr>
+          <p:cNvPr id="12" name="TextBox 12">
+            <a:extLst>
+              <a:ext uri="{FF2B5EF4-FFF2-40B4-BE49-F238E27FC236}">
+                <a16:creationId xmlns:a16="http://schemas.microsoft.com/office/drawing/2014/main" id="{BEB07463-62F8-4E11-90F4-7D7E55E97D83}"/>
+              </a:ext>
+            </a:extLst>
+          </p:cNvPr>
+          <p:cNvSpPr txBox="1"/>
+          <p:nvPr/>
+        </p:nvSpPr>
+        <p:spPr>
+          <a:xfrm>
+            <a:off x="8420100" y="1924050"/>
+            <a:ext cx="2819400" cy="419100"/>
+          </a:xfrm>
+        </p:spPr>
+        <p:txBody>
+          <a:bodyPr wrap="square" rtlCol="0" lIns="0" tIns="0" rIns="0" bIns="0" anchor="t"/>
+          <a:lstStyle/>
+          <a:p>
+            <a:pPr algn="l">
+              <a:lnSpc>
+                <a:spcPct val="110000"/>
+              </a:lnSpc>
+            </a:pPr>
+            <a:r>
+              <a:rPr sz="2000" b="1">
+                <a:solidFill>
+                  <a:srgbClr val="E8EAED"/>
+                </a:solidFill>
+                <a:latin typeface="Microsoft YaHei"/>
+                <a:ea typeface="Microsoft YaHei"/>
+              </a:rPr>
+              <a:t>规模与可信</a:t>
+            </a:r>
+          </a:p>
+        </p:txBody>
+      </p:sp>
+      <p:sp>
+        <p:nvSpPr>
+          <p:cNvPr id="13" name="TextBox 13">
+            <a:extLst>
+              <a:ext uri="{FF2B5EF4-FFF2-40B4-BE49-F238E27FC236}">
+                <a16:creationId xmlns:a16="http://schemas.microsoft.com/office/drawing/2014/main" id="{39112A12-C7EB-4E7F-A15C-34D55C4BCB2B}"/>
+              </a:ext>
+            </a:extLst>
+          </p:cNvPr>
+          <p:cNvSpPr txBox="1"/>
+          <p:nvPr/>
+        </p:nvSpPr>
+        <p:spPr>
+          <a:xfrm>
+            <a:off x="8420100" y="2438400"/>
+            <a:ext cx="2819400" cy="2381250"/>
+          </a:xfrm>
+        </p:spPr>
+        <p:txBody>
+          <a:bodyPr wrap="square" rtlCol="0" lIns="0" tIns="0" rIns="0" bIns="0" anchor="t"/>
+          <a:lstStyle/>
+          <a:p>
+            <a:pPr algn="l">
+              <a:lnSpc>
+                <a:spcPct val="150000"/>
+              </a:lnSpc>
+            </a:pPr>
+            <a:r>
+              <a:rPr sz="1300">
+                <a:solidFill>
+                  <a:srgbClr val="9AA1AB"/>
+                </a:solidFill>
+                <a:latin typeface="Microsoft YaHei"/>
+                <a:ea typeface="Microsoft YaHei"/>
+              </a:rPr>
+              <a:t>安全审计 0 依赖漏洞；多租户 4 级权限；V6 架构目标 2 万用户 / 10 万并发策略；支持私有化自托管部署。</a:t>
+            </a:r>
+          </a:p>
+        </p:txBody>
+      </p:sp>
+      <p:sp>
+        <p:nvSpPr>
+          <p:cNvPr id="14" name="TextBox 14">
+            <a:extLst>
+              <a:ext uri="{FF2B5EF4-FFF2-40B4-BE49-F238E27FC236}">
+                <a16:creationId xmlns:a16="http://schemas.microsoft.com/office/drawing/2014/main" id="{572DAD1F-9534-4276-9CE2-8A0455C82867}"/>
+              </a:ext>
+            </a:extLst>
+          </p:cNvPr>
+          <p:cNvSpPr txBox="1"/>
+          <p:nvPr/>
+        </p:nvSpPr>
+        <p:spPr>
+          <a:xfrm>
+            <a:off x="685800" y="5524500"/>
+            <a:ext cx="10820400" cy="266700"/>
+          </a:xfrm>
+        </p:spPr>
+        <p:txBody>
+          <a:bodyPr wrap="square" rtlCol="0" lIns="0" tIns="0" rIns="0" bIns="0" anchor="t"/>
+          <a:lstStyle/>
+          <a:p>
+            <a:pPr algn="l">
+              <a:lnSpc>
+                <a:spcPct val="110000"/>
+              </a:lnSpc>
+            </a:pPr>
+            <a:r>
+              <a:rPr sz="1500">
+                <a:solidFill>
+                  <a:srgbClr val="9AA1AB"/>
+                </a:solidFill>
+                <a:latin typeface="Microsoft YaHei"/>
+                <a:ea typeface="Microsoft YaHei"/>
+              </a:rPr>
+              <a:t>自托管选项：</a:t>
+            </a:r>
             <a:r>
               <a:rPr sz="1500" b="1">
                 <a:solidFill>
-                  <a:srgbClr val="E8EAED"/>
-                </a:solidFill>
-                <a:latin typeface="Arial"/>
-                <a:ea typeface="Arial"/>
-              </a:rPr>
-              <a:t>TradingView</a:t>
-            </a:r>
-          </a:p>
-        </p:txBody>
-      </p:sp>
-      <p:sp>
-        <p:nvSpPr>
-          <p:cNvPr id="18" name="TextBox 18">
-            <a:extLst>
-              <a:ext uri="{FF2B5EF4-FFF2-40B4-BE49-F238E27FC236}">
-                <a16:creationId xmlns:a16="http://schemas.microsoft.com/office/drawing/2014/main" id="{7D1D0C4D-2048-4592-AA16-26E421C74854}"/>
-              </a:ext>
-            </a:extLst>
-          </p:cNvPr>
-          <p:cNvSpPr txBox="1"/>
-          <p:nvPr/>
-        </p:nvSpPr>
-        <p:spPr>
-          <a:xfrm>
-            <a:off x="2552700" y="2705100"/>
-            <a:ext cx="1905000" cy="455676"/>
-          </a:xfrm>
-        </p:spPr>
-        <p:txBody>
-          <a:bodyPr wrap="square" rtlCol="0" lIns="0" tIns="0" rIns="0" bIns="0" anchor="t"/>
-          <a:lstStyle/>
-          <a:p>
-            <a:pPr algn="l">
-              <a:lnSpc>
-                <a:spcPct val="130000"/>
-              </a:lnSpc>
-            </a:pPr>
-            <a:r>
-              <a:rPr sz="1150">
-                <a:solidFill>
-                  <a:srgbClr val="9AA1AB"/>
-                </a:solidFill>
-                <a:latin typeface="Microsoft YaHei"/>
-                <a:ea typeface="Microsoft YaHei"/>
-              </a:rPr>
-              <a:t>图表分析霸主 · 不执行 · AI 局部</a:t>
-            </a:r>
-          </a:p>
-        </p:txBody>
-      </p:sp>
-      <p:sp>
-        <p:nvSpPr>
-          <p:cNvPr id="19" name="TextBox 19">
-            <a:extLst>
-              <a:ext uri="{FF2B5EF4-FFF2-40B4-BE49-F238E27FC236}">
-                <a16:creationId xmlns:a16="http://schemas.microsoft.com/office/drawing/2014/main" id="{0C37C7DF-5E21-43FB-AB83-7C02E7E05794}"/>
-              </a:ext>
-            </a:extLst>
-          </p:cNvPr>
-          <p:cNvSpPr txBox="1"/>
-          <p:nvPr/>
-        </p:nvSpPr>
-        <p:spPr>
-          <a:xfrm>
-            <a:off x="2552700" y="4572000"/>
-            <a:ext cx="1905000" cy="266700"/>
-          </a:xfrm>
-        </p:spPr>
-        <p:txBody>
-          <a:bodyPr wrap="square" rtlCol="0" lIns="0" tIns="0" rIns="0" bIns="0" anchor="t"/>
-          <a:lstStyle/>
-          <a:p>
-            <a:pPr algn="l">
-              <a:lnSpc>
-                <a:spcPct val="110000"/>
-              </a:lnSpc>
-            </a:pPr>
-            <a:r>
-              <a:rPr sz="1500" b="1">
-                <a:solidFill>
-                  <a:srgbClr val="E8EAED"/>
-                </a:solidFill>
-                <a:latin typeface="Arial"/>
-                <a:ea typeface="Arial"/>
-              </a:rPr>
-              <a:t>QuantConnect</a:t>
-            </a:r>
-          </a:p>
-        </p:txBody>
-      </p:sp>
-      <p:sp>
-        <p:nvSpPr>
-          <p:cNvPr id="20" name="TextBox 20">
-            <a:extLst>
-              <a:ext uri="{FF2B5EF4-FFF2-40B4-BE49-F238E27FC236}">
-                <a16:creationId xmlns:a16="http://schemas.microsoft.com/office/drawing/2014/main" id="{461C76B2-6E2D-42C1-8196-0A975EBC2A12}"/>
-              </a:ext>
-            </a:extLst>
-          </p:cNvPr>
-          <p:cNvSpPr txBox="1"/>
-          <p:nvPr/>
-        </p:nvSpPr>
-        <p:spPr>
-          <a:xfrm>
-            <a:off x="2552700" y="4838700"/>
-            <a:ext cx="1905000" cy="455676"/>
-          </a:xfrm>
-        </p:spPr>
-        <p:txBody>
-          <a:bodyPr wrap="square" rtlCol="0" lIns="0" tIns="0" rIns="0" bIns="0" anchor="t"/>
-          <a:lstStyle/>
-          <a:p>
-            <a:pPr algn="l">
-              <a:lnSpc>
-                <a:spcPct val="130000"/>
-              </a:lnSpc>
-            </a:pPr>
-            <a:r>
-              <a:rPr sz="1150">
-                <a:solidFill>
-                  <a:srgbClr val="9AA1AB"/>
-                </a:solidFill>
-                <a:latin typeface="Microsoft YaHei"/>
-                <a:ea typeface="Microsoft YaHei"/>
-              </a:rPr>
-              <a:t>机构级引擎 · 工程师门槛 · AI 局部</a:t>
-            </a:r>
-          </a:p>
-        </p:txBody>
-      </p:sp>
-      <p:sp>
-        <p:nvSpPr>
-          <p:cNvPr id="21" name="TextBox 21">
-            <a:extLst>
-              <a:ext uri="{FF2B5EF4-FFF2-40B4-BE49-F238E27FC236}">
-                <a16:creationId xmlns:a16="http://schemas.microsoft.com/office/drawing/2014/main" id="{D35566BB-0020-408E-9526-FAD098B3176A}"/>
-              </a:ext>
-            </a:extLst>
-          </p:cNvPr>
-          <p:cNvSpPr txBox="1"/>
-          <p:nvPr/>
-        </p:nvSpPr>
-        <p:spPr>
-          <a:xfrm>
-            <a:off x="7905750" y="2457450"/>
-            <a:ext cx="1962150" cy="247650"/>
-          </a:xfrm>
-        </p:spPr>
-        <p:txBody>
-          <a:bodyPr wrap="square" rtlCol="0" lIns="0" tIns="0" rIns="0" bIns="0" anchor="t"/>
-          <a:lstStyle/>
-          <a:p>
-            <a:pPr algn="l">
-              <a:lnSpc>
-                <a:spcPct val="110000"/>
-              </a:lnSpc>
-            </a:pPr>
-            <a:r>
-              <a:rPr sz="1350" b="1">
-                <a:solidFill>
-                  <a:srgbClr val="E8EAED"/>
-                </a:solidFill>
-                <a:latin typeface="Arial"/>
-                <a:ea typeface="Arial"/>
-              </a:rPr>
-              <a:t>3Commas / Composer</a:t>
-            </a:r>
-          </a:p>
-        </p:txBody>
-      </p:sp>
-      <p:sp>
-        <p:nvSpPr>
-          <p:cNvPr id="22" name="TextBox 22">
-            <a:extLst>
-              <a:ext uri="{FF2B5EF4-FFF2-40B4-BE49-F238E27FC236}">
-                <a16:creationId xmlns:a16="http://schemas.microsoft.com/office/drawing/2014/main" id="{69A90CEC-DC82-451C-B74F-581C9B4F29E6}"/>
-              </a:ext>
-            </a:extLst>
-          </p:cNvPr>
-          <p:cNvSpPr txBox="1"/>
-          <p:nvPr/>
-        </p:nvSpPr>
-        <p:spPr>
-          <a:xfrm>
-            <a:off x="7905750" y="2705100"/>
-            <a:ext cx="1962150" cy="381000"/>
-          </a:xfrm>
-        </p:spPr>
-        <p:txBody>
-          <a:bodyPr wrap="square" rtlCol="0" lIns="0" tIns="0" rIns="0" bIns="0" anchor="t"/>
-          <a:lstStyle/>
-          <a:p>
-            <a:pPr algn="l">
-              <a:lnSpc>
-                <a:spcPct val="130000"/>
-              </a:lnSpc>
-            </a:pPr>
-            <a:r>
-              <a:rPr sz="1150">
-                <a:solidFill>
-                  <a:srgbClr val="9AA1AB"/>
-                </a:solidFill>
-                <a:latin typeface="Microsoft YaHei"/>
-                <a:ea typeface="Microsoft YaHei"/>
-              </a:rPr>
-              <a:t>单市场自动化 · AI 弱</a:t>
-            </a:r>
-          </a:p>
-        </p:txBody>
-      </p:sp>
-      <p:sp>
-        <p:nvSpPr>
-          <p:cNvPr id="23" name="TextBox 23">
-            <a:extLst>
-              <a:ext uri="{FF2B5EF4-FFF2-40B4-BE49-F238E27FC236}">
-                <a16:creationId xmlns:a16="http://schemas.microsoft.com/office/drawing/2014/main" id="{B4AED810-1CB6-4443-B7F4-B41BCABC4D02}"/>
-              </a:ext>
-            </a:extLst>
-          </p:cNvPr>
-          <p:cNvSpPr txBox="1"/>
-          <p:nvPr/>
-        </p:nvSpPr>
-        <p:spPr>
-          <a:xfrm>
-            <a:off x="7905750" y="4572000"/>
-            <a:ext cx="1905000" cy="266700"/>
-          </a:xfrm>
-        </p:spPr>
-        <p:txBody>
-          <a:bodyPr wrap="square" rtlCol="0" lIns="0" tIns="0" rIns="0" bIns="0" anchor="t"/>
-          <a:lstStyle/>
-          <a:p>
-            <a:pPr algn="l">
-              <a:lnSpc>
-                <a:spcPct val="110000"/>
-              </a:lnSpc>
-            </a:pPr>
-            <a:r>
-              <a:rPr sz="1500" b="1">
-                <a:solidFill>
                   <a:srgbClr val="63E2B7"/>
                 </a:solidFill>
-                <a:latin typeface="Arial"/>
-                <a:ea typeface="Arial"/>
-              </a:rPr>
-              <a:t>SharkQuant</a:t>
-            </a:r>
-          </a:p>
-        </p:txBody>
-      </p:sp>
-      <p:sp>
-        <p:nvSpPr>
-          <p:cNvPr id="24" name="TextBox 24">
-            <a:extLst>
-              <a:ext uri="{FF2B5EF4-FFF2-40B4-BE49-F238E27FC236}">
-                <a16:creationId xmlns:a16="http://schemas.microsoft.com/office/drawing/2014/main" id="{0A164A33-DA42-4274-B006-5E4C7E0B8EE7}"/>
-              </a:ext>
-            </a:extLst>
-          </p:cNvPr>
-          <p:cNvSpPr txBox="1"/>
-          <p:nvPr/>
-        </p:nvSpPr>
-        <p:spPr>
-          <a:xfrm>
-            <a:off x="7905750" y="4838700"/>
-            <a:ext cx="1905000" cy="381000"/>
-          </a:xfrm>
-        </p:spPr>
-        <p:txBody>
-          <a:bodyPr wrap="square" rtlCol="0" lIns="0" tIns="0" rIns="0" bIns="0" anchor="t"/>
-          <a:lstStyle/>
-          <a:p>
-            <a:pPr algn="l">
-              <a:lnSpc>
-                <a:spcPct val="130000"/>
-              </a:lnSpc>
-            </a:pPr>
-            <a:r>
-              <a:rPr sz="1150">
-                <a:solidFill>
-                  <a:srgbClr val="9AA1AB"/>
-                </a:solidFill>
-                <a:latin typeface="Microsoft YaHei"/>
-                <a:ea typeface="Microsoft YaHei"/>
-              </a:rPr>
-              <a:t>全链路 · AI 原生 · Agent 开放</a:t>
-            </a:r>
-          </a:p>
-        </p:txBody>
-      </p:sp>
-      <p:sp>
-        <p:nvSpPr>
-          <p:cNvPr id="25" name="TextBox 25">
-            <a:extLst>
-              <a:ext uri="{FF2B5EF4-FFF2-40B4-BE49-F238E27FC236}">
-                <a16:creationId xmlns:a16="http://schemas.microsoft.com/office/drawing/2014/main" id="{4E1E44BF-E7D2-4557-B68D-B18B35BE458A}"/>
-              </a:ext>
-            </a:extLst>
-          </p:cNvPr>
-          <p:cNvSpPr txBox="1"/>
-          <p:nvPr/>
-        </p:nvSpPr>
-        <p:spPr>
-          <a:xfrm>
-            <a:off x="685800" y="6286500"/>
-            <a:ext cx="10820400" cy="247650"/>
-          </a:xfrm>
-        </p:spPr>
-        <p:txBody>
-          <a:bodyPr wrap="square" rtlCol="0" lIns="0" tIns="0" rIns="0" bIns="0" anchor="t"/>
-          <a:lstStyle/>
-          <a:p>
-            <a:pPr algn="l">
-              <a:lnSpc>
-                <a:spcPct val="110000"/>
-              </a:lnSpc>
-            </a:pPr>
-            <a:r>
-              <a:rPr sz="1300">
-                <a:solidFill>
-                  <a:srgbClr val="9AA1AB"/>
-                </a:solidFill>
-                <a:latin typeface="Microsoft YaHei"/>
-                <a:ea typeface="Microsoft YaHei"/>
-              </a:rPr>
-              <a:t>同价位对标：TradingView $12.95–59.95/月 · 3Commas $15–60 · Composer $10–40 · SharkQuant $19.9 起</a:t>
+                <a:latin typeface="Microsoft YaHei"/>
+                <a:ea typeface="Microsoft YaHei"/>
+              </a:rPr>
+              <a:t>面向数据主权敏感的工作室与机构客户，一键安装 + 容器镜像</a:t>
             </a:r>
           </a:p>
         </p:txBody>
@@ -1323,7 +1289,7 @@
           <p:cNvPr id="3" name="TextBox 3">
             <a:extLst>
               <a:ext uri="{FF2B5EF4-FFF2-40B4-BE49-F238E27FC236}">
-                <a16:creationId xmlns:a16="http://schemas.microsoft.com/office/drawing/2014/main" id="{80D281CE-DC96-4165-B249-814F3013459D}"/>
+                <a16:creationId xmlns:a16="http://schemas.microsoft.com/office/drawing/2014/main" id="{F08B89A3-2A80-431D-A89E-27A2E64C3F9A}"/>
               </a:ext>
             </a:extLst>
           </p:cNvPr>
@@ -1353,7 +1319,7 @@
                 <a:latin typeface="Microsoft YaHei"/>
                 <a:ea typeface="Microsoft YaHei"/>
               </a:rPr>
-              <a:t>商业模式：四路收入已内置</a:t>
+              <a:t>3 个月：从架构升级到生产上线</a:t>
             </a:r>
           </a:p>
         </p:txBody>
@@ -1363,67 +1329,867 @@
           <p:cNvPr id="4" name="TextBox 4">
             <a:extLst>
               <a:ext uri="{FF2B5EF4-FFF2-40B4-BE49-F238E27FC236}">
-                <a16:creationId xmlns:a16="http://schemas.microsoft.com/office/drawing/2014/main" id="{E6B8EE1E-BB9B-4AE1-BE8E-7F90D57DD474}"/>
-              </a:ext>
-            </a:extLst>
-          </p:cNvPr>
-          <p:cNvSpPr txBox="1"/>
-          <p:nvPr/>
-        </p:nvSpPr>
-        <p:spPr>
-          <a:xfrm>
-            <a:off x="685800" y="2000250"/>
-            <a:ext cx="4953000" cy="1341120"/>
-          </a:xfrm>
-        </p:spPr>
-        <p:txBody>
-          <a:bodyPr wrap="square" rtlCol="0" lIns="0" tIns="0" rIns="0" bIns="0" anchor="t"/>
-          <a:lstStyle/>
-          <a:p>
-            <a:pPr algn="l">
-              <a:lnSpc>
-                <a:spcPct val="110000"/>
-              </a:lnSpc>
-            </a:pPr>
-            <a:r>
-              <a:rPr sz="8000" b="1">
+                <a16:creationId xmlns:a16="http://schemas.microsoft.com/office/drawing/2014/main" id="{F7A9B638-F471-44E2-9497-265EA63158F7}"/>
+              </a:ext>
+            </a:extLst>
+          </p:cNvPr>
+          <p:cNvSpPr txBox="1"/>
+          <p:nvPr/>
+        </p:nvSpPr>
+        <p:spPr>
+          <a:xfrm>
+            <a:off x="685800" y="1047750"/>
+            <a:ext cx="10820400" cy="266700"/>
+          </a:xfrm>
+        </p:spPr>
+        <p:txBody>
+          <a:bodyPr wrap="square" rtlCol="0" lIns="0" tIns="0" rIns="0" bIns="0" anchor="t"/>
+          <a:lstStyle/>
+          <a:p>
+            <a:pPr algn="l">
+              <a:lnSpc>
+                <a:spcPct val="110000"/>
+              </a:lnSpc>
+            </a:pPr>
+            <a:r>
+              <a:rPr sz="1500">
+                <a:solidFill>
+                  <a:srgbClr val="9AA1AB"/>
+                </a:solidFill>
+                <a:latin typeface="Microsoft YaHei"/>
+                <a:ea typeface="Microsoft YaHei"/>
+              </a:rPr>
+              <a:t>2026 年 7–10 月；全部进展均可在生产环境与代码仓库逐条验证</a:t>
+            </a:r>
+          </a:p>
+        </p:txBody>
+      </p:sp>
+      <p:sp>
+        <p:nvSpPr>
+          <p:cNvPr id="5" name="Shape 5">
+            <a:extLst>
+              <a:ext uri="{FF2B5EF4-FFF2-40B4-BE49-F238E27FC236}">
+                <a16:creationId xmlns:a16="http://schemas.microsoft.com/office/drawing/2014/main" id="{06B5E78D-92D1-4E7F-90A7-BFA0C23262A2}"/>
+              </a:ext>
+            </a:extLst>
+          </p:cNvPr>
+          <p:cNvSpPr/>
+          <p:nvPr/>
+        </p:nvSpPr>
+        <p:spPr>
+          <a:xfrm>
+            <a:off x="1143000" y="3619500"/>
+            <a:ext cx="9906000" cy="19050"/>
+          </a:xfrm>
+          <a:prstGeom prst="rect">
+            <a:avLst/>
+          </a:prstGeom>
+          <a:solidFill>
+            <a:srgbClr val="232A33"/>
+          </a:solidFill>
+        </p:spPr>
+        <p:txBody>
+          <a:bodyPr wrap="square" rtlCol="0"/>
+          <a:lstStyle/>
+          <a:p>
+            <a:r>
+              <a:rPr/>
+              <a:t/>
+            </a:r>
+          </a:p>
+        </p:txBody>
+      </p:sp>
+      <p:sp>
+        <p:nvSpPr>
+          <p:cNvPr id="6" name="Shape 6">
+            <a:extLst>
+              <a:ext uri="{FF2B5EF4-FFF2-40B4-BE49-F238E27FC236}">
+                <a16:creationId xmlns:a16="http://schemas.microsoft.com/office/drawing/2014/main" id="{AB442282-7E81-4DE9-A0B4-DE040ED91FC8}"/>
+              </a:ext>
+            </a:extLst>
+          </p:cNvPr>
+          <p:cNvSpPr/>
+          <p:nvPr/>
+        </p:nvSpPr>
+        <p:spPr>
+          <a:xfrm>
+            <a:off x="2066925" y="3562350"/>
+            <a:ext cx="133350" cy="133350"/>
+          </a:xfrm>
+          <a:prstGeom prst="ellipse">
+            <a:avLst/>
+          </a:prstGeom>
+          <a:solidFill>
+            <a:srgbClr val="63E2B7"/>
+          </a:solidFill>
+        </p:spPr>
+        <p:txBody>
+          <a:bodyPr wrap="square" rtlCol="0"/>
+          <a:lstStyle/>
+          <a:p>
+            <a:r>
+              <a:rPr/>
+              <a:t/>
+            </a:r>
+          </a:p>
+        </p:txBody>
+      </p:sp>
+      <p:sp>
+        <p:nvSpPr>
+          <p:cNvPr id="7" name="Shape 7">
+            <a:extLst>
+              <a:ext uri="{FF2B5EF4-FFF2-40B4-BE49-F238E27FC236}">
+                <a16:creationId xmlns:a16="http://schemas.microsoft.com/office/drawing/2014/main" id="{FE63550A-7F89-48D3-A671-769602AE8C2A}"/>
+              </a:ext>
+            </a:extLst>
+          </p:cNvPr>
+          <p:cNvSpPr/>
+          <p:nvPr/>
+        </p:nvSpPr>
+        <p:spPr>
+          <a:xfrm>
+            <a:off x="4048125" y="3562350"/>
+            <a:ext cx="133350" cy="133350"/>
+          </a:xfrm>
+          <a:prstGeom prst="ellipse">
+            <a:avLst/>
+          </a:prstGeom>
+          <a:solidFill>
+            <a:srgbClr val="63E2B7"/>
+          </a:solidFill>
+        </p:spPr>
+        <p:txBody>
+          <a:bodyPr wrap="square" rtlCol="0"/>
+          <a:lstStyle/>
+          <a:p>
+            <a:r>
+              <a:rPr/>
+              <a:t/>
+            </a:r>
+          </a:p>
+        </p:txBody>
+      </p:sp>
+      <p:sp>
+        <p:nvSpPr>
+          <p:cNvPr id="8" name="Shape 8">
+            <a:extLst>
+              <a:ext uri="{FF2B5EF4-FFF2-40B4-BE49-F238E27FC236}">
+                <a16:creationId xmlns:a16="http://schemas.microsoft.com/office/drawing/2014/main" id="{6431E0B1-1A8C-4B9E-96F0-6CE26E0274C0}"/>
+              </a:ext>
+            </a:extLst>
+          </p:cNvPr>
+          <p:cNvSpPr/>
+          <p:nvPr/>
+        </p:nvSpPr>
+        <p:spPr>
+          <a:xfrm>
+            <a:off x="6029325" y="3562350"/>
+            <a:ext cx="133350" cy="133350"/>
+          </a:xfrm>
+          <a:prstGeom prst="ellipse">
+            <a:avLst/>
+          </a:prstGeom>
+          <a:solidFill>
+            <a:srgbClr val="63E2B7"/>
+          </a:solidFill>
+        </p:spPr>
+        <p:txBody>
+          <a:bodyPr wrap="square" rtlCol="0"/>
+          <a:lstStyle/>
+          <a:p>
+            <a:r>
+              <a:rPr/>
+              <a:t/>
+            </a:r>
+          </a:p>
+        </p:txBody>
+      </p:sp>
+      <p:sp>
+        <p:nvSpPr>
+          <p:cNvPr id="9" name="Shape 9">
+            <a:extLst>
+              <a:ext uri="{FF2B5EF4-FFF2-40B4-BE49-F238E27FC236}">
+                <a16:creationId xmlns:a16="http://schemas.microsoft.com/office/drawing/2014/main" id="{B2667906-0992-4974-83CE-CFD1944D69C1}"/>
+              </a:ext>
+            </a:extLst>
+          </p:cNvPr>
+          <p:cNvSpPr/>
+          <p:nvPr/>
+        </p:nvSpPr>
+        <p:spPr>
+          <a:xfrm>
+            <a:off x="8010525" y="3562350"/>
+            <a:ext cx="133350" cy="133350"/>
+          </a:xfrm>
+          <a:prstGeom prst="ellipse">
+            <a:avLst/>
+          </a:prstGeom>
+          <a:solidFill>
+            <a:srgbClr val="63E2B7"/>
+          </a:solidFill>
+        </p:spPr>
+        <p:txBody>
+          <a:bodyPr wrap="square" rtlCol="0"/>
+          <a:lstStyle/>
+          <a:p>
+            <a:r>
+              <a:rPr/>
+              <a:t/>
+            </a:r>
+          </a:p>
+        </p:txBody>
+      </p:sp>
+      <p:sp>
+        <p:nvSpPr>
+          <p:cNvPr id="10" name="Shape 10">
+            <a:extLst>
+              <a:ext uri="{FF2B5EF4-FFF2-40B4-BE49-F238E27FC236}">
+                <a16:creationId xmlns:a16="http://schemas.microsoft.com/office/drawing/2014/main" id="{491A2883-A4CC-4CC2-881B-DF1DBA62D2A8}"/>
+              </a:ext>
+            </a:extLst>
+          </p:cNvPr>
+          <p:cNvSpPr/>
+          <p:nvPr/>
+        </p:nvSpPr>
+        <p:spPr>
+          <a:xfrm>
+            <a:off x="9991725" y="3562350"/>
+            <a:ext cx="133350" cy="133350"/>
+          </a:xfrm>
+          <a:prstGeom prst="ellipse">
+            <a:avLst/>
+          </a:prstGeom>
+          <a:solidFill>
+            <a:srgbClr val="63E2B7"/>
+          </a:solidFill>
+        </p:spPr>
+        <p:txBody>
+          <a:bodyPr wrap="square" rtlCol="0"/>
+          <a:lstStyle/>
+          <a:p>
+            <a:r>
+              <a:rPr/>
+              <a:t/>
+            </a:r>
+          </a:p>
+        </p:txBody>
+      </p:sp>
+      <p:sp>
+        <p:nvSpPr>
+          <p:cNvPr id="11" name="TextBox 11">
+            <a:extLst>
+              <a:ext uri="{FF2B5EF4-FFF2-40B4-BE49-F238E27FC236}">
+                <a16:creationId xmlns:a16="http://schemas.microsoft.com/office/drawing/2014/main" id="{3DD8193E-8E51-4736-AB80-540F95CDB23B}"/>
+              </a:ext>
+            </a:extLst>
+          </p:cNvPr>
+          <p:cNvSpPr txBox="1"/>
+          <p:nvPr/>
+        </p:nvSpPr>
+        <p:spPr>
+          <a:xfrm>
+            <a:off x="1228725" y="3257550"/>
+            <a:ext cx="1809750" cy="247650"/>
+          </a:xfrm>
+        </p:spPr>
+        <p:txBody>
+          <a:bodyPr wrap="square" rtlCol="0" lIns="0" tIns="0" rIns="0" bIns="0" anchor="t"/>
+          <a:lstStyle/>
+          <a:p>
+            <a:pPr algn="ctr">
+              <a:lnSpc>
+                <a:spcPct val="110000"/>
+              </a:lnSpc>
+            </a:pPr>
+            <a:r>
+              <a:rPr sz="1300" b="1">
                 <a:solidFill>
                   <a:srgbClr val="63E2B7"/>
                 </a:solidFill>
                 <a:latin typeface="Arial"/>
                 <a:ea typeface="Arial"/>
               </a:rPr>
-              <a:t>$19.9</a:t>
-            </a:r>
-            <a:r>
-              <a:rPr sz="2400" b="1">
+              <a:t>2026-07</a:t>
+            </a:r>
+          </a:p>
+        </p:txBody>
+      </p:sp>
+      <p:sp>
+        <p:nvSpPr>
+          <p:cNvPr id="12" name="TextBox 12">
+            <a:extLst>
+              <a:ext uri="{FF2B5EF4-FFF2-40B4-BE49-F238E27FC236}">
+                <a16:creationId xmlns:a16="http://schemas.microsoft.com/office/drawing/2014/main" id="{6F16600F-1BA1-48D9-A12F-BB502683BF82}"/>
+              </a:ext>
+            </a:extLst>
+          </p:cNvPr>
+          <p:cNvSpPr txBox="1"/>
+          <p:nvPr/>
+        </p:nvSpPr>
+        <p:spPr>
+          <a:xfrm>
+            <a:off x="3209925" y="3257550"/>
+            <a:ext cx="1809750" cy="247650"/>
+          </a:xfrm>
+        </p:spPr>
+        <p:txBody>
+          <a:bodyPr wrap="square" rtlCol="0" lIns="0" tIns="0" rIns="0" bIns="0" anchor="t"/>
+          <a:lstStyle/>
+          <a:p>
+            <a:pPr algn="ctr">
+              <a:lnSpc>
+                <a:spcPct val="110000"/>
+              </a:lnSpc>
+            </a:pPr>
+            <a:r>
+              <a:rPr sz="1300" b="1">
+                <a:solidFill>
+                  <a:srgbClr val="63E2B7"/>
+                </a:solidFill>
+                <a:latin typeface="Arial"/>
+                <a:ea typeface="Arial"/>
+              </a:rPr>
+              <a:t>2026-09-20</a:t>
+            </a:r>
+          </a:p>
+        </p:txBody>
+      </p:sp>
+      <p:sp>
+        <p:nvSpPr>
+          <p:cNvPr id="13" name="TextBox 13">
+            <a:extLst>
+              <a:ext uri="{FF2B5EF4-FFF2-40B4-BE49-F238E27FC236}">
+                <a16:creationId xmlns:a16="http://schemas.microsoft.com/office/drawing/2014/main" id="{A42BCABE-1291-443C-8FB4-E10EFF8DD52F}"/>
+              </a:ext>
+            </a:extLst>
+          </p:cNvPr>
+          <p:cNvSpPr txBox="1"/>
+          <p:nvPr/>
+        </p:nvSpPr>
+        <p:spPr>
+          <a:xfrm>
+            <a:off x="5191125" y="3257550"/>
+            <a:ext cx="1809750" cy="247650"/>
+          </a:xfrm>
+        </p:spPr>
+        <p:txBody>
+          <a:bodyPr wrap="square" rtlCol="0" lIns="0" tIns="0" rIns="0" bIns="0" anchor="t"/>
+          <a:lstStyle/>
+          <a:p>
+            <a:pPr algn="ctr">
+              <a:lnSpc>
+                <a:spcPct val="110000"/>
+              </a:lnSpc>
+            </a:pPr>
+            <a:r>
+              <a:rPr sz="1300" b="1">
+                <a:solidFill>
+                  <a:srgbClr val="63E2B7"/>
+                </a:solidFill>
+                <a:latin typeface="Arial"/>
+                <a:ea typeface="Arial"/>
+              </a:rPr>
+              <a:t>2026-10-08</a:t>
+            </a:r>
+          </a:p>
+        </p:txBody>
+      </p:sp>
+      <p:sp>
+        <p:nvSpPr>
+          <p:cNvPr id="14" name="TextBox 14">
+            <a:extLst>
+              <a:ext uri="{FF2B5EF4-FFF2-40B4-BE49-F238E27FC236}">
+                <a16:creationId xmlns:a16="http://schemas.microsoft.com/office/drawing/2014/main" id="{C5DBEAF0-9DB3-48A5-89A7-8FED80206367}"/>
+              </a:ext>
+            </a:extLst>
+          </p:cNvPr>
+          <p:cNvSpPr txBox="1"/>
+          <p:nvPr/>
+        </p:nvSpPr>
+        <p:spPr>
+          <a:xfrm>
+            <a:off x="7172325" y="3257550"/>
+            <a:ext cx="1809750" cy="247650"/>
+          </a:xfrm>
+        </p:spPr>
+        <p:txBody>
+          <a:bodyPr wrap="square" rtlCol="0" lIns="0" tIns="0" rIns="0" bIns="0" anchor="t"/>
+          <a:lstStyle/>
+          <a:p>
+            <a:pPr algn="ctr">
+              <a:lnSpc>
+                <a:spcPct val="110000"/>
+              </a:lnSpc>
+            </a:pPr>
+            <a:r>
+              <a:rPr sz="1300" b="1">
+                <a:solidFill>
+                  <a:srgbClr val="63E2B7"/>
+                </a:solidFill>
+                <a:latin typeface="Arial"/>
+                <a:ea typeface="Arial"/>
+              </a:rPr>
+              <a:t>2026-10-10</a:t>
+            </a:r>
+          </a:p>
+        </p:txBody>
+      </p:sp>
+      <p:sp>
+        <p:nvSpPr>
+          <p:cNvPr id="15" name="TextBox 15">
+            <a:extLst>
+              <a:ext uri="{FF2B5EF4-FFF2-40B4-BE49-F238E27FC236}">
+                <a16:creationId xmlns:a16="http://schemas.microsoft.com/office/drawing/2014/main" id="{1FC41F89-8FCF-4CFE-9BF8-5D7DC1571E0D}"/>
+              </a:ext>
+            </a:extLst>
+          </p:cNvPr>
+          <p:cNvSpPr txBox="1"/>
+          <p:nvPr/>
+        </p:nvSpPr>
+        <p:spPr>
+          <a:xfrm>
+            <a:off x="9153525" y="3257550"/>
+            <a:ext cx="1809750" cy="247650"/>
+          </a:xfrm>
+        </p:spPr>
+        <p:txBody>
+          <a:bodyPr wrap="square" rtlCol="0" lIns="0" tIns="0" rIns="0" bIns="0" anchor="t"/>
+          <a:lstStyle/>
+          <a:p>
+            <a:pPr algn="ctr">
+              <a:lnSpc>
+                <a:spcPct val="110000"/>
+              </a:lnSpc>
+            </a:pPr>
+            <a:r>
+              <a:rPr sz="1300" b="1">
+                <a:solidFill>
+                  <a:srgbClr val="63E2B7"/>
+                </a:solidFill>
+                <a:latin typeface="Arial"/>
+                <a:ea typeface="Arial"/>
+              </a:rPr>
+              <a:t>2026-10-11</a:t>
+            </a:r>
+          </a:p>
+        </p:txBody>
+      </p:sp>
+      <p:sp>
+        <p:nvSpPr>
+          <p:cNvPr id="16" name="TextBox 16">
+            <a:extLst>
+              <a:ext uri="{FF2B5EF4-FFF2-40B4-BE49-F238E27FC236}">
+                <a16:creationId xmlns:a16="http://schemas.microsoft.com/office/drawing/2014/main" id="{4381DA84-FDD9-4DBF-8383-85B618359763}"/>
+              </a:ext>
+            </a:extLst>
+          </p:cNvPr>
+          <p:cNvSpPr txBox="1"/>
+          <p:nvPr/>
+        </p:nvSpPr>
+        <p:spPr>
+          <a:xfrm>
+            <a:off x="1228725" y="3848100"/>
+            <a:ext cx="1809750" cy="533400"/>
+          </a:xfrm>
+        </p:spPr>
+        <p:txBody>
+          <a:bodyPr wrap="square" rtlCol="0" lIns="0" tIns="0" rIns="0" bIns="0" anchor="t"/>
+          <a:lstStyle/>
+          <a:p>
+            <a:pPr algn="ctr">
+              <a:lnSpc>
+                <a:spcPct val="120000"/>
+              </a:lnSpc>
+            </a:pPr>
+            <a:r>
+              <a:rPr sz="1500" b="1">
+                <a:solidFill>
+                  <a:srgbClr val="E8EAED"/>
+                </a:solidFill>
+                <a:latin typeface="Microsoft YaHei"/>
+                <a:ea typeface="Microsoft YaHei"/>
+              </a:rPr>
+              <a:t>v5.5 分布式架构升级</a:t>
+            </a:r>
+          </a:p>
+        </p:txBody>
+      </p:sp>
+      <p:sp>
+        <p:nvSpPr>
+          <p:cNvPr id="17" name="TextBox 17">
+            <a:extLst>
+              <a:ext uri="{FF2B5EF4-FFF2-40B4-BE49-F238E27FC236}">
+                <a16:creationId xmlns:a16="http://schemas.microsoft.com/office/drawing/2014/main" id="{D009D793-45EA-4565-BDDE-7A1577FF6BD6}"/>
+              </a:ext>
+            </a:extLst>
+          </p:cNvPr>
+          <p:cNvSpPr txBox="1"/>
+          <p:nvPr/>
+        </p:nvSpPr>
+        <p:spPr>
+          <a:xfrm>
+            <a:off x="1228725" y="4457700"/>
+            <a:ext cx="1809750" cy="740664"/>
+          </a:xfrm>
+        </p:spPr>
+        <p:txBody>
+          <a:bodyPr wrap="square" rtlCol="0" lIns="0" tIns="0" rIns="0" bIns="0" anchor="t"/>
+          <a:lstStyle/>
+          <a:p>
+            <a:pPr algn="ctr">
+              <a:lnSpc>
+                <a:spcPct val="135000"/>
+              </a:lnSpc>
+            </a:pPr>
+            <a:r>
+              <a:rPr sz="1200">
                 <a:solidFill>
                   <a:srgbClr val="9AA1AB"/>
                 </a:solidFill>
                 <a:latin typeface="Microsoft YaHei"/>
                 <a:ea typeface="Microsoft YaHei"/>
               </a:rPr>
-              <a:t> / 月起</a:t>
-            </a:r>
-          </a:p>
-        </p:txBody>
-      </p:sp>
-      <p:sp>
-        <p:nvSpPr>
-          <p:cNvPr id="5" name="TextBox 5">
-            <a:extLst>
-              <a:ext uri="{FF2B5EF4-FFF2-40B4-BE49-F238E27FC236}">
-                <a16:creationId xmlns:a16="http://schemas.microsoft.com/office/drawing/2014/main" id="{4A4F4BEC-151E-446B-B216-F9A111A74EBE}"/>
-              </a:ext>
-            </a:extLst>
-          </p:cNvPr>
-          <p:cNvSpPr txBox="1"/>
-          <p:nvPr/>
-        </p:nvSpPr>
-        <p:spPr>
-          <a:xfrm>
-            <a:off x="685800" y="3543300"/>
-            <a:ext cx="4953000" cy="266700"/>
+              <a:t>Kafka 事件管线 · 策略运行时独立进程 · 原生交易所客户端</a:t>
+            </a:r>
+          </a:p>
+        </p:txBody>
+      </p:sp>
+      <p:sp>
+        <p:nvSpPr>
+          <p:cNvPr id="18" name="TextBox 18">
+            <a:extLst>
+              <a:ext uri="{FF2B5EF4-FFF2-40B4-BE49-F238E27FC236}">
+                <a16:creationId xmlns:a16="http://schemas.microsoft.com/office/drawing/2014/main" id="{701D5DAA-759B-4682-823E-31ADFCF0278C}"/>
+              </a:ext>
+            </a:extLst>
+          </p:cNvPr>
+          <p:cNvSpPr txBox="1"/>
+          <p:nvPr/>
+        </p:nvSpPr>
+        <p:spPr>
+          <a:xfrm>
+            <a:off x="3209925" y="3848100"/>
+            <a:ext cx="1809750" cy="533400"/>
+          </a:xfrm>
+        </p:spPr>
+        <p:txBody>
+          <a:bodyPr wrap="square" rtlCol="0" lIns="0" tIns="0" rIns="0" bIns="0" anchor="t"/>
+          <a:lstStyle/>
+          <a:p>
+            <a:pPr algn="ctr">
+              <a:lnSpc>
+                <a:spcPct val="120000"/>
+              </a:lnSpc>
+            </a:pPr>
+            <a:r>
+              <a:rPr sz="1500" b="1">
+                <a:solidFill>
+                  <a:srgbClr val="E8EAED"/>
+                </a:solidFill>
+                <a:latin typeface="Microsoft YaHei"/>
+                <a:ea typeface="Microsoft YaHei"/>
+              </a:rPr>
+              <a:t>AI 决策门 + 计费</a:t>
+            </a:r>
+          </a:p>
+        </p:txBody>
+      </p:sp>
+      <p:sp>
+        <p:nvSpPr>
+          <p:cNvPr id="19" name="TextBox 19">
+            <a:extLst>
+              <a:ext uri="{FF2B5EF4-FFF2-40B4-BE49-F238E27FC236}">
+                <a16:creationId xmlns:a16="http://schemas.microsoft.com/office/drawing/2014/main" id="{5E9D4A8A-001E-47F8-90D4-AD30374F7792}"/>
+              </a:ext>
+            </a:extLst>
+          </p:cNvPr>
+          <p:cNvSpPr txBox="1"/>
+          <p:nvPr/>
+        </p:nvSpPr>
+        <p:spPr>
+          <a:xfrm>
+            <a:off x="3209925" y="4457700"/>
+            <a:ext cx="1809750" cy="723900"/>
+          </a:xfrm>
+        </p:spPr>
+        <p:txBody>
+          <a:bodyPr wrap="square" rtlCol="0" lIns="0" tIns="0" rIns="0" bIns="0" anchor="t"/>
+          <a:lstStyle/>
+          <a:p>
+            <a:pPr algn="ctr">
+              <a:lnSpc>
+                <a:spcPct val="135000"/>
+              </a:lnSpc>
+            </a:pPr>
+            <a:r>
+              <a:rPr sz="1200">
+                <a:solidFill>
+                  <a:srgbClr val="9AA1AB"/>
+                </a:solidFill>
+                <a:latin typeface="Microsoft YaHei"/>
+                <a:ea typeface="Microsoft YaHei"/>
+              </a:rPr>
+              <a:t>策略进化（TPE / 网格 / 前向验证）与信号虚拟账户</a:t>
+            </a:r>
+          </a:p>
+        </p:txBody>
+      </p:sp>
+      <p:sp>
+        <p:nvSpPr>
+          <p:cNvPr id="20" name="TextBox 20">
+            <a:extLst>
+              <a:ext uri="{FF2B5EF4-FFF2-40B4-BE49-F238E27FC236}">
+                <a16:creationId xmlns:a16="http://schemas.microsoft.com/office/drawing/2014/main" id="{E8AA037A-8AE7-4DC3-87A2-2E1EB01214FE}"/>
+              </a:ext>
+            </a:extLst>
+          </p:cNvPr>
+          <p:cNvSpPr txBox="1"/>
+          <p:nvPr/>
+        </p:nvSpPr>
+        <p:spPr>
+          <a:xfrm>
+            <a:off x="5191125" y="3848100"/>
+            <a:ext cx="1809750" cy="533400"/>
+          </a:xfrm>
+        </p:spPr>
+        <p:txBody>
+          <a:bodyPr wrap="square" rtlCol="0" lIns="0" tIns="0" rIns="0" bIns="0" anchor="t"/>
+          <a:lstStyle/>
+          <a:p>
+            <a:pPr algn="ctr">
+              <a:lnSpc>
+                <a:spcPct val="120000"/>
+              </a:lnSpc>
+            </a:pPr>
+            <a:r>
+              <a:rPr sz="1500" b="1">
+                <a:solidFill>
+                  <a:srgbClr val="E8EAED"/>
+                </a:solidFill>
+                <a:latin typeface="Microsoft YaHei"/>
+                <a:ea typeface="Microsoft YaHei"/>
+              </a:rPr>
+              <a:t>自建前端落地</a:t>
+            </a:r>
+          </a:p>
+        </p:txBody>
+      </p:sp>
+      <p:sp>
+        <p:nvSpPr>
+          <p:cNvPr id="21" name="TextBox 21">
+            <a:extLst>
+              <a:ext uri="{FF2B5EF4-FFF2-40B4-BE49-F238E27FC236}">
+                <a16:creationId xmlns:a16="http://schemas.microsoft.com/office/drawing/2014/main" id="{9809309A-B767-48AC-8AF8-646107A16385}"/>
+              </a:ext>
+            </a:extLst>
+          </p:cNvPr>
+          <p:cNvSpPr txBox="1"/>
+          <p:nvPr/>
+        </p:nvSpPr>
+        <p:spPr>
+          <a:xfrm>
+            <a:off x="5191125" y="4457700"/>
+            <a:ext cx="1809750" cy="723900"/>
+          </a:xfrm>
+        </p:spPr>
+        <p:txBody>
+          <a:bodyPr wrap="square" rtlCol="0" lIns="0" tIns="0" rIns="0" bIns="0" anchor="t"/>
+          <a:lstStyle/>
+          <a:p>
+            <a:pPr algn="ctr">
+              <a:lnSpc>
+                <a:spcPct val="135000"/>
+              </a:lnSpc>
+            </a:pPr>
+            <a:r>
+              <a:rPr sz="1200">
+                <a:solidFill>
+                  <a:srgbClr val="9AA1AB"/>
+                </a:solidFill>
+                <a:latin typeface="Microsoft YaHei"/>
+                <a:ea typeface="Microsoft YaHei"/>
+              </a:rPr>
+              <a:t>P0–P2 单日上线并完成容器化生产构建</a:t>
+            </a:r>
+          </a:p>
+        </p:txBody>
+      </p:sp>
+      <p:sp>
+        <p:nvSpPr>
+          <p:cNvPr id="22" name="TextBox 22">
+            <a:extLst>
+              <a:ext uri="{FF2B5EF4-FFF2-40B4-BE49-F238E27FC236}">
+                <a16:creationId xmlns:a16="http://schemas.microsoft.com/office/drawing/2014/main" id="{FA9C5FDC-E072-4672-8D8A-87C011793732}"/>
+              </a:ext>
+            </a:extLst>
+          </p:cNvPr>
+          <p:cNvSpPr txBox="1"/>
+          <p:nvPr/>
+        </p:nvSpPr>
+        <p:spPr>
+          <a:xfrm>
+            <a:off x="7172325" y="3848100"/>
+            <a:ext cx="1809750" cy="533400"/>
+          </a:xfrm>
+        </p:spPr>
+        <p:txBody>
+          <a:bodyPr wrap="square" rtlCol="0" lIns="0" tIns="0" rIns="0" bIns="0" anchor="t"/>
+          <a:lstStyle/>
+          <a:p>
+            <a:pPr algn="ctr">
+              <a:lnSpc>
+                <a:spcPct val="120000"/>
+              </a:lnSpc>
+            </a:pPr>
+            <a:r>
+              <a:rPr sz="1500" b="1">
+                <a:solidFill>
+                  <a:srgbClr val="E8EAED"/>
+                </a:solidFill>
+                <a:latin typeface="Microsoft YaHei"/>
+                <a:ea typeface="Microsoft YaHei"/>
+              </a:rPr>
+              <a:t>更名 · 生产上线</a:t>
+            </a:r>
+          </a:p>
+        </p:txBody>
+      </p:sp>
+      <p:sp>
+        <p:nvSpPr>
+          <p:cNvPr id="23" name="TextBox 23">
+            <a:extLst>
+              <a:ext uri="{FF2B5EF4-FFF2-40B4-BE49-F238E27FC236}">
+                <a16:creationId xmlns:a16="http://schemas.microsoft.com/office/drawing/2014/main" id="{709B3277-4793-4DFC-9B27-777DA4B7D692}"/>
+              </a:ext>
+            </a:extLst>
+          </p:cNvPr>
+          <p:cNvSpPr txBox="1"/>
+          <p:nvPr/>
+        </p:nvSpPr>
+        <p:spPr>
+          <a:xfrm>
+            <a:off x="7172325" y="4457700"/>
+            <a:ext cx="1809750" cy="723900"/>
+          </a:xfrm>
+        </p:spPr>
+        <p:txBody>
+          <a:bodyPr wrap="square" rtlCol="0" lIns="0" tIns="0" rIns="0" bIns="0" anchor="t"/>
+          <a:lstStyle/>
+          <a:p>
+            <a:pPr algn="ctr">
+              <a:lnSpc>
+                <a:spcPct val="135000"/>
+              </a:lnSpc>
+            </a:pPr>
+            <a:r>
+              <a:rPr sz="1200">
+                <a:solidFill>
+                  <a:srgbClr val="9AA1AB"/>
+                </a:solidFill>
+                <a:latin typeface="Microsoft YaHei"/>
+                <a:ea typeface="Microsoft YaHei"/>
+              </a:rPr>
+              <a:t>i18n 全量 · 预测市场 · 钱包 · shark.aiorz.cc 上线</a:t>
+            </a:r>
+          </a:p>
+        </p:txBody>
+      </p:sp>
+      <p:sp>
+        <p:nvSpPr>
+          <p:cNvPr id="24" name="TextBox 24">
+            <a:extLst>
+              <a:ext uri="{FF2B5EF4-FFF2-40B4-BE49-F238E27FC236}">
+                <a16:creationId xmlns:a16="http://schemas.microsoft.com/office/drawing/2014/main" id="{D4E4BFA2-F2DD-42A5-AAB6-C62AB4DBEDA6}"/>
+              </a:ext>
+            </a:extLst>
+          </p:cNvPr>
+          <p:cNvSpPr txBox="1"/>
+          <p:nvPr/>
+        </p:nvSpPr>
+        <p:spPr>
+          <a:xfrm>
+            <a:off x="9153525" y="3848100"/>
+            <a:ext cx="1809750" cy="533400"/>
+          </a:xfrm>
+        </p:spPr>
+        <p:txBody>
+          <a:bodyPr wrap="square" rtlCol="0" lIns="0" tIns="0" rIns="0" bIns="0" anchor="t"/>
+          <a:lstStyle/>
+          <a:p>
+            <a:pPr algn="ctr">
+              <a:lnSpc>
+                <a:spcPct val="120000"/>
+              </a:lnSpc>
+            </a:pPr>
+            <a:r>
+              <a:rPr sz="1500" b="1">
+                <a:solidFill>
+                  <a:srgbClr val="E8EAED"/>
+                </a:solidFill>
+                <a:latin typeface="Microsoft YaHei"/>
+                <a:ea typeface="Microsoft YaHei"/>
+              </a:rPr>
+              <a:t>双语 QA + 安全审计</a:t>
+            </a:r>
+          </a:p>
+        </p:txBody>
+      </p:sp>
+      <p:sp>
+        <p:nvSpPr>
+          <p:cNvPr id="25" name="TextBox 25">
+            <a:extLst>
+              <a:ext uri="{FF2B5EF4-FFF2-40B4-BE49-F238E27FC236}">
+                <a16:creationId xmlns:a16="http://schemas.microsoft.com/office/drawing/2014/main" id="{488A1D71-002D-4516-870A-587EC6BD95DC}"/>
+              </a:ext>
+            </a:extLst>
+          </p:cNvPr>
+          <p:cNvSpPr txBox="1"/>
+          <p:nvPr/>
+        </p:nvSpPr>
+        <p:spPr>
+          <a:xfrm>
+            <a:off x="9153525" y="4457700"/>
+            <a:ext cx="1809750" cy="723900"/>
+          </a:xfrm>
+        </p:spPr>
+        <p:txBody>
+          <a:bodyPr wrap="square" rtlCol="0" lIns="0" tIns="0" rIns="0" bIns="0" anchor="t"/>
+          <a:lstStyle/>
+          <a:p>
+            <a:pPr algn="ctr">
+              <a:lnSpc>
+                <a:spcPct val="135000"/>
+              </a:lnSpc>
+            </a:pPr>
+            <a:r>
+              <a:rPr sz="1200">
+                <a:solidFill>
+                  <a:srgbClr val="9AA1AB"/>
+                </a:solidFill>
+                <a:latin typeface="Microsoft YaHei"/>
+                <a:ea typeface="Microsoft YaHei"/>
+              </a:rPr>
+              <a:t>48 路由双语回归 · 依赖 0 已知漏洞</a:t>
+            </a:r>
+          </a:p>
+        </p:txBody>
+      </p:sp>
+      <p:sp>
+        <p:nvSpPr>
+          <p:cNvPr id="26" name="TextBox 26">
+            <a:extLst>
+              <a:ext uri="{FF2B5EF4-FFF2-40B4-BE49-F238E27FC236}">
+                <a16:creationId xmlns:a16="http://schemas.microsoft.com/office/drawing/2014/main" id="{0155DAD5-2C5C-4E55-8CAE-B21E30B254F0}"/>
+              </a:ext>
+            </a:extLst>
+          </p:cNvPr>
+          <p:cNvSpPr txBox="1"/>
+          <p:nvPr/>
+        </p:nvSpPr>
+        <p:spPr>
+          <a:xfrm>
+            <a:off x="685800" y="5676900"/>
+            <a:ext cx="10820400" cy="266700"/>
           </a:xfrm>
         </p:spPr>
         <p:txBody>
@@ -1443,230 +2209,17 @@
                 <a:latin typeface="Microsoft YaHei"/>
                 <a:ea typeface="Microsoft YaHei"/>
               </a:rPr>
-              <a:t>订阅 + 额度 + 市场分成 + 邀请返佣</a:t>
-            </a:r>
-          </a:p>
-        </p:txBody>
-      </p:sp>
-      <p:sp>
-        <p:nvSpPr>
-          <p:cNvPr id="6" name="TextBox 6">
-            <a:extLst>
-              <a:ext uri="{FF2B5EF4-FFF2-40B4-BE49-F238E27FC236}">
-                <a16:creationId xmlns:a16="http://schemas.microsoft.com/office/drawing/2014/main" id="{565B4902-2708-4BF0-891A-09023B046CF2}"/>
-              </a:ext>
-            </a:extLst>
-          </p:cNvPr>
-          <p:cNvSpPr txBox="1"/>
-          <p:nvPr/>
-        </p:nvSpPr>
-        <p:spPr>
-          <a:xfrm>
-            <a:off x="685800" y="3886200"/>
-            <a:ext cx="4953000" cy="495300"/>
-          </a:xfrm>
-        </p:spPr>
-        <p:txBody>
-          <a:bodyPr wrap="square" rtlCol="0" lIns="0" tIns="0" rIns="0" bIns="0" anchor="t"/>
-          <a:lstStyle/>
-          <a:p>
-            <a:pPr algn="l">
-              <a:lnSpc>
-                <a:spcPct val="130000"/>
-              </a:lnSpc>
-            </a:pPr>
-            <a:r>
-              <a:rPr sz="1300">
-                <a:solidFill>
-                  <a:srgbClr val="6B7280"/>
-                </a:solidFill>
-                <a:latin typeface="Microsoft YaHei"/>
-                <a:ea typeface="Microsoft YaHei"/>
-              </a:rPr>
-              <a:t>面向全球散户与半专业交易者；免费档 5 个运行策略，付费档 10 个</a:t>
-            </a:r>
-          </a:p>
-        </p:txBody>
-      </p:sp>
-      <p:sp>
-        <p:nvSpPr>
-          <p:cNvPr id="7" name="TextBox 7">
-            <a:extLst>
-              <a:ext uri="{FF2B5EF4-FFF2-40B4-BE49-F238E27FC236}">
-                <a16:creationId xmlns:a16="http://schemas.microsoft.com/office/drawing/2014/main" id="{0E7EF363-B991-47C3-B543-1BB094E2B756}"/>
-              </a:ext>
-            </a:extLst>
-          </p:cNvPr>
-          <p:cNvSpPr txBox="1"/>
-          <p:nvPr/>
-        </p:nvSpPr>
-        <p:spPr>
-          <a:xfrm>
-            <a:off x="6096000" y="1905000"/>
-            <a:ext cx="5410200" cy="3143250"/>
-          </a:xfrm>
-        </p:spPr>
-        <p:txBody>
-          <a:bodyPr wrap="square" rtlCol="0" lIns="0" tIns="0" rIns="0" bIns="0" anchor="t"/>
-          <a:lstStyle/>
-          <a:p>
-            <a:pPr algn="l">
-              <a:lnSpc>
-                <a:spcPct val="140000"/>
-              </a:lnSpc>
-              <a:spcAft>
-                <a:spcPts val="1800"/>
-              </a:spcAft>
-            </a:pPr>
-            <a:r>
-              <a:rPr sz="1550" b="1">
-                <a:solidFill>
-                  <a:srgbClr val="E8EAED"/>
-                </a:solidFill>
-                <a:latin typeface="Microsoft YaHei"/>
-                <a:ea typeface="Microsoft YaHei"/>
-              </a:rPr>
-              <a:t>会员订阅</a:t>
-            </a:r>
-            <a:r>
-              <a:rPr sz="1300">
-                <a:solidFill>
-                  <a:srgbClr val="9AA1AB"/>
-                </a:solidFill>
-                <a:latin typeface="Microsoft YaHei"/>
-                <a:ea typeface="Microsoft YaHei"/>
-              </a:rPr>
-              <a:t>——$19.9/月 · $199/年（主推档）· $499 终身</a:t>
-            </a:r>
-          </a:p>
-          <a:p>
-            <a:pPr algn="l">
-              <a:lnSpc>
-                <a:spcPct val="140000"/>
-              </a:lnSpc>
-              <a:spcAft>
-                <a:spcPts val="1800"/>
-              </a:spcAft>
-            </a:pPr>
-            <a:r>
-              <a:rPr sz="1550" b="1">
-                <a:solidFill>
-                  <a:srgbClr val="E8EAED"/>
-                </a:solidFill>
-                <a:latin typeface="Microsoft YaHei"/>
-                <a:ea typeface="Microsoft YaHei"/>
-              </a:rPr>
-              <a:t>用量额度</a:t>
-            </a:r>
-            <a:r>
-              <a:rPr sz="1300">
-                <a:solidFill>
-                  <a:srgbClr val="9AA1AB"/>
-                </a:solidFill>
-                <a:latin typeface="Microsoft YaHei"/>
-                <a:ea typeface="Microsoft YaHei"/>
-              </a:rPr>
-              <a:t>——AI 与回测按次扣减（回测 30、AI 分析 10、对话 5…）</a:t>
-            </a:r>
-          </a:p>
-          <a:p>
-            <a:pPr algn="l">
-              <a:lnSpc>
-                <a:spcPct val="140000"/>
-              </a:lnSpc>
-              <a:spcAft>
-                <a:spcPts val="1800"/>
-              </a:spcAft>
-            </a:pPr>
-            <a:r>
-              <a:rPr sz="1550" b="1">
-                <a:solidFill>
-                  <a:srgbClr val="E8EAED"/>
-                </a:solidFill>
-                <a:latin typeface="Microsoft YaHei"/>
-                <a:ea typeface="Microsoft YaHei"/>
-              </a:rPr>
-              <a:t>指标市场</a:t>
-            </a:r>
-            <a:r>
-              <a:rPr sz="1300">
-                <a:solidFill>
-                  <a:srgbClr val="9AA1AB"/>
-                </a:solidFill>
-                <a:latin typeface="Microsoft YaHei"/>
-                <a:ea typeface="Microsoft YaHei"/>
-              </a:rPr>
-              <a:t>——平台分成（费率可配置），创作者生态就位</a:t>
-            </a:r>
-          </a:p>
-          <a:p>
-            <a:pPr algn="l">
-              <a:lnSpc>
-                <a:spcPct val="140000"/>
-              </a:lnSpc>
-              <a:spcAft>
-                <a:spcPts val="0"/>
-              </a:spcAft>
-            </a:pPr>
-            <a:r>
-              <a:rPr sz="1550" b="1">
-                <a:solidFill>
-                  <a:srgbClr val="E8EAED"/>
-                </a:solidFill>
-                <a:latin typeface="Microsoft YaHei"/>
-                <a:ea typeface="Microsoft YaHei"/>
-              </a:rPr>
-              <a:t>邀请返佣</a:t>
-            </a:r>
-            <a:r>
-              <a:rPr sz="1300">
-                <a:solidFill>
-                  <a:srgbClr val="9AA1AB"/>
-                </a:solidFill>
-                <a:latin typeface="Microsoft YaHei"/>
-                <a:ea typeface="Microsoft YaHei"/>
-              </a:rPr>
-              <a:t>——注册赠 100 额度 · 三级返佣 10/5/3%（已内置）</a:t>
-            </a:r>
-          </a:p>
-        </p:txBody>
-      </p:sp>
-      <p:sp>
-        <p:nvSpPr>
-          <p:cNvPr id="8" name="TextBox 8">
-            <a:extLst>
-              <a:ext uri="{FF2B5EF4-FFF2-40B4-BE49-F238E27FC236}">
-                <a16:creationId xmlns:a16="http://schemas.microsoft.com/office/drawing/2014/main" id="{BA2B4F76-0382-4869-8FDA-67ABFBFD73B6}"/>
-              </a:ext>
-            </a:extLst>
-          </p:cNvPr>
-          <p:cNvSpPr txBox="1"/>
-          <p:nvPr/>
-        </p:nvSpPr>
-        <p:spPr>
-          <a:xfrm>
-            <a:off x="685800" y="5638800"/>
-            <a:ext cx="10820400" cy="266700"/>
-          </a:xfrm>
-        </p:spPr>
-        <p:txBody>
-          <a:bodyPr wrap="square" rtlCol="0" lIns="0" tIns="0" rIns="0" bIns="0" anchor="t"/>
-          <a:lstStyle/>
-          <a:p>
-            <a:pPr algn="l">
-              <a:lnSpc>
-                <a:spcPct val="110000"/>
-              </a:lnSpc>
-            </a:pPr>
-            <a:r>
-              <a:rPr sz="1400">
-                <a:solidFill>
-                  <a:srgbClr val="8FB8FF"/>
-                </a:solidFill>
-                <a:latin typeface="Microsoft YaHei"/>
-                <a:ea typeface="Microsoft YaHei"/>
-              </a:rPr>
-              <a:t>支付通道（Stripe + 稳定币）已内置，开通即可全量计费；指标市场与返佣随之上线</a:t>
+              <a:t>下一步：</a:t>
+            </a:r>
+            <a:r>
+              <a:rPr sz="1500" b="1">
+                <a:solidFill>
+                  <a:srgbClr val="63E2B7"/>
+                </a:solidFill>
+                <a:latin typeface="Microsoft YaHei"/>
+                <a:ea typeface="Microsoft YaHei"/>
+              </a:rPr>
+              <a:t>支付通道开通 · 指标市场结算 · V6 横向扩展</a:t>
             </a:r>
           </a:p>
         </p:txBody>
@@ -1709,7 +2262,7 @@
           <p:cNvPr id="3" name="TextBox 3">
             <a:extLst>
               <a:ext uri="{FF2B5EF4-FFF2-40B4-BE49-F238E27FC236}">
-                <a16:creationId xmlns:a16="http://schemas.microsoft.com/office/drawing/2014/main" id="{9E423D24-E131-41C3-86CF-88B06BBE3F54}"/>
+                <a16:creationId xmlns:a16="http://schemas.microsoft.com/office/drawing/2014/main" id="{7FBC399C-88F4-4F87-B58F-52FD00C30257}"/>
               </a:ext>
             </a:extLst>
           </p:cNvPr>
@@ -1739,57 +2292,17 @@
                 <a:latin typeface="Microsoft YaHei"/>
                 <a:ea typeface="Microsoft YaHei"/>
               </a:rPr>
-              <a:t>工程壁垒：交易级的安全与规模</a:t>
-            </a:r>
-          </a:p>
-        </p:txBody>
-      </p:sp>
-      <p:sp>
-        <p:nvSpPr>
-          <p:cNvPr id="4" name="TextBox 4">
-            <a:extLst>
-              <a:ext uri="{FF2B5EF4-FFF2-40B4-BE49-F238E27FC236}">
-                <a16:creationId xmlns:a16="http://schemas.microsoft.com/office/drawing/2014/main" id="{9EB6A665-DFA6-4FBA-BF56-8119BAAC4D88}"/>
-              </a:ext>
-            </a:extLst>
-          </p:cNvPr>
-          <p:cNvSpPr txBox="1"/>
-          <p:nvPr/>
-        </p:nvSpPr>
-        <p:spPr>
-          <a:xfrm>
-            <a:off x="685800" y="1047750"/>
-            <a:ext cx="10820400" cy="266700"/>
-          </a:xfrm>
-        </p:spPr>
-        <p:txBody>
-          <a:bodyPr wrap="square" rtlCol="0" lIns="0" tIns="0" rIns="0" bIns="0" anchor="t"/>
-          <a:lstStyle/>
-          <a:p>
-            <a:pPr algn="l">
-              <a:lnSpc>
-                <a:spcPct val="110000"/>
-              </a:lnSpc>
-            </a:pPr>
-            <a:r>
-              <a:rPr sz="1500">
-                <a:solidFill>
-                  <a:srgbClr val="9AA1AB"/>
-                </a:solidFill>
-                <a:latin typeface="Microsoft YaHei"/>
-                <a:ea typeface="Microsoft YaHei"/>
-              </a:rPr>
-              <a:t>全链路产品的复杂度就是护城河——每一个数字都可在生产环境验证</a:t>
-            </a:r>
-          </a:p>
-        </p:txBody>
-      </p:sp>
-      <p:sp>
-        <p:nvSpPr>
-          <p:cNvPr id="5" name="Shape 5">
-            <a:extLst>
-              <a:ext uri="{FF2B5EF4-FFF2-40B4-BE49-F238E27FC236}">
-                <a16:creationId xmlns:a16="http://schemas.microsoft.com/office/drawing/2014/main" id="{0D5E15F8-89FF-4167-AEB9-A1F8BC3B60F9}"/>
+              <a:t>团队与融资</a:t>
+            </a:r>
+          </a:p>
+        </p:txBody>
+      </p:sp>
+      <p:sp>
+        <p:nvSpPr>
+          <p:cNvPr id="4" name="Shape 4">
+            <a:extLst>
+              <a:ext uri="{FF2B5EF4-FFF2-40B4-BE49-F238E27FC236}">
+                <a16:creationId xmlns:a16="http://schemas.microsoft.com/office/drawing/2014/main" id="{92325CC4-21EE-4A1E-A4F3-C97C9A00A79B}"/>
               </a:ext>
             </a:extLst>
           </p:cNvPr>
@@ -1798,8 +2311,8 @@
         </p:nvSpPr>
         <p:spPr>
           <a:xfrm>
-            <a:off x="685800" y="1619250"/>
-            <a:ext cx="3352800" cy="3429000"/>
+            <a:off x="685800" y="1428750"/>
+            <a:ext cx="5219700" cy="4095750"/>
           </a:xfrm>
           <a:prstGeom prst="roundRect">
             <a:avLst/>
@@ -1826,10 +2339,10 @@
       </p:sp>
       <p:sp>
         <p:nvSpPr>
-          <p:cNvPr id="6" name="Shape 6">
-            <a:extLst>
-              <a:ext uri="{FF2B5EF4-FFF2-40B4-BE49-F238E27FC236}">
-                <a16:creationId xmlns:a16="http://schemas.microsoft.com/office/drawing/2014/main" id="{1CD87E35-ED65-431D-A097-4689292A8A30}"/>
+          <p:cNvPr id="5" name="Shape 5">
+            <a:extLst>
+              <a:ext uri="{FF2B5EF4-FFF2-40B4-BE49-F238E27FC236}">
+                <a16:creationId xmlns:a16="http://schemas.microsoft.com/office/drawing/2014/main" id="{D6B2BD3A-CA3A-4532-AF66-7105678C1165}"/>
               </a:ext>
             </a:extLst>
           </p:cNvPr>
@@ -1838,8 +2351,8 @@
         </p:nvSpPr>
         <p:spPr>
           <a:xfrm>
-            <a:off x="4419600" y="1619250"/>
-            <a:ext cx="3352800" cy="3429000"/>
+            <a:off x="6286500" y="1428750"/>
+            <a:ext cx="5219700" cy="4095750"/>
           </a:xfrm>
           <a:prstGeom prst="roundRect">
             <a:avLst/>
@@ -1866,10 +2379,403 @@
       </p:sp>
       <p:sp>
         <p:nvSpPr>
-          <p:cNvPr id="7" name="Shape 7">
-            <a:extLst>
-              <a:ext uri="{FF2B5EF4-FFF2-40B4-BE49-F238E27FC236}">
-                <a16:creationId xmlns:a16="http://schemas.microsoft.com/office/drawing/2014/main" id="{D9D09037-8852-4812-B82E-09A0C8017FBD}"/>
+          <p:cNvPr id="6" name="TextBox 6">
+            <a:extLst>
+              <a:ext uri="{FF2B5EF4-FFF2-40B4-BE49-F238E27FC236}">
+                <a16:creationId xmlns:a16="http://schemas.microsoft.com/office/drawing/2014/main" id="{5308EF19-79C1-46B3-99C6-ACF8573DE1DA}"/>
+              </a:ext>
+            </a:extLst>
+          </p:cNvPr>
+          <p:cNvSpPr txBox="1"/>
+          <p:nvPr/>
+        </p:nvSpPr>
+        <p:spPr>
+          <a:xfrm>
+            <a:off x="990600" y="1695450"/>
+            <a:ext cx="4572000" cy="342900"/>
+          </a:xfrm>
+        </p:spPr>
+        <p:txBody>
+          <a:bodyPr wrap="square" rtlCol="0" lIns="0" tIns="0" rIns="0" bIns="0" anchor="t"/>
+          <a:lstStyle/>
+          <a:p>
+            <a:pPr algn="l">
+              <a:lnSpc>
+                <a:spcPct val="110000"/>
+              </a:lnSpc>
+            </a:pPr>
+            <a:r>
+              <a:rPr sz="2000" b="1">
+                <a:solidFill>
+                  <a:srgbClr val="8FB8FF"/>
+                </a:solidFill>
+                <a:latin typeface="Microsoft YaHei"/>
+                <a:ea typeface="Microsoft YaHei"/>
+              </a:rPr>
+              <a:t>团队</a:t>
+            </a:r>
+          </a:p>
+        </p:txBody>
+      </p:sp>
+      <p:sp>
+        <p:nvSpPr>
+          <p:cNvPr id="7" name="TextBox 7">
+            <a:extLst>
+              <a:ext uri="{FF2B5EF4-FFF2-40B4-BE49-F238E27FC236}">
+                <a16:creationId xmlns:a16="http://schemas.microsoft.com/office/drawing/2014/main" id="{0542C297-4502-468F-8489-AABF288291FB}"/>
+              </a:ext>
+            </a:extLst>
+          </p:cNvPr>
+          <p:cNvSpPr txBox="1"/>
+          <p:nvPr/>
+        </p:nvSpPr>
+        <p:spPr>
+          <a:xfrm>
+            <a:off x="990600" y="2228850"/>
+            <a:ext cx="4610100" cy="2476500"/>
+          </a:xfrm>
+        </p:spPr>
+        <p:txBody>
+          <a:bodyPr wrap="square" rtlCol="0" lIns="0" tIns="0" rIns="0" bIns="0" anchor="t"/>
+          <a:lstStyle/>
+          <a:p>
+            <a:pPr algn="l">
+              <a:lnSpc>
+                <a:spcPct val="130000"/>
+              </a:lnSpc>
+              <a:spcAft>
+                <a:spcPts val="2400"/>
+              </a:spcAft>
+            </a:pPr>
+            <a:r>
+              <a:rPr sz="1400" b="1">
+                <a:solidFill>
+                  <a:srgbClr val="E8EAED"/>
+                </a:solidFill>
+                <a:latin typeface="Microsoft YaHei"/>
+                <a:ea typeface="Microsoft YaHei"/>
+              </a:rPr>
+              <a:t>创始人 / CEO：</a:t>
+            </a:r>
+            <a:r>
+              <a:rPr sz="1300" i="1">
+                <a:solidFill>
+                  <a:srgbClr val="8FB8FF"/>
+                </a:solidFill>
+                <a:latin typeface="Microsoft YaHei"/>
+                <a:ea typeface="Microsoft YaHei"/>
+              </a:rPr>
+              <a:t>【待填：姓名 · 一句话背景】</a:t>
+            </a:r>
+          </a:p>
+          <a:p>
+            <a:pPr algn="l">
+              <a:lnSpc>
+                <a:spcPct val="130000"/>
+              </a:lnSpc>
+              <a:spcAft>
+                <a:spcPts val="2400"/>
+              </a:spcAft>
+            </a:pPr>
+            <a:r>
+              <a:rPr sz="1400" b="1">
+                <a:solidFill>
+                  <a:srgbClr val="E8EAED"/>
+                </a:solidFill>
+                <a:latin typeface="Microsoft YaHei"/>
+                <a:ea typeface="Microsoft YaHei"/>
+              </a:rPr>
+              <a:t>CTO / 技术负责人：</a:t>
+            </a:r>
+            <a:r>
+              <a:rPr sz="1300" i="1">
+                <a:solidFill>
+                  <a:srgbClr val="8FB8FF"/>
+                </a:solidFill>
+                <a:latin typeface="Microsoft YaHei"/>
+                <a:ea typeface="Microsoft YaHei"/>
+              </a:rPr>
+              <a:t>【待填】</a:t>
+            </a:r>
+          </a:p>
+          <a:p>
+            <a:pPr algn="l">
+              <a:lnSpc>
+                <a:spcPct val="130000"/>
+              </a:lnSpc>
+              <a:spcAft>
+                <a:spcPts val="2400"/>
+              </a:spcAft>
+            </a:pPr>
+            <a:r>
+              <a:rPr sz="1400" b="1">
+                <a:solidFill>
+                  <a:srgbClr val="E8EAED"/>
+                </a:solidFill>
+                <a:latin typeface="Microsoft YaHei"/>
+                <a:ea typeface="Microsoft YaHei"/>
+              </a:rPr>
+              <a:t>核心成员：</a:t>
+            </a:r>
+            <a:r>
+              <a:rPr sz="1300" i="1">
+                <a:solidFill>
+                  <a:srgbClr val="8FB8FF"/>
+                </a:solidFill>
+                <a:latin typeface="Microsoft YaHei"/>
+                <a:ea typeface="Microsoft YaHei"/>
+              </a:rPr>
+              <a:t>【待填：产品 / 量化研究 / 增长】</a:t>
+            </a:r>
+          </a:p>
+          <a:p>
+            <a:pPr algn="l">
+              <a:lnSpc>
+                <a:spcPct val="130000"/>
+              </a:lnSpc>
+              <a:spcAft>
+                <a:spcPts val="0"/>
+              </a:spcAft>
+            </a:pPr>
+            <a:r>
+              <a:rPr sz="1400" b="1">
+                <a:solidFill>
+                  <a:srgbClr val="E8EAED"/>
+                </a:solidFill>
+                <a:latin typeface="Microsoft YaHei"/>
+                <a:ea typeface="Microsoft YaHei"/>
+              </a:rPr>
+              <a:t>顾问（如有）：</a:t>
+            </a:r>
+            <a:r>
+              <a:rPr sz="1300" i="1">
+                <a:solidFill>
+                  <a:srgbClr val="8FB8FF"/>
+                </a:solidFill>
+                <a:latin typeface="Microsoft YaHei"/>
+                <a:ea typeface="Microsoft YaHei"/>
+              </a:rPr>
+              <a:t>【待填】</a:t>
+            </a:r>
+          </a:p>
+        </p:txBody>
+      </p:sp>
+      <p:sp>
+        <p:nvSpPr>
+          <p:cNvPr id="8" name="TextBox 8">
+            <a:extLst>
+              <a:ext uri="{FF2B5EF4-FFF2-40B4-BE49-F238E27FC236}">
+                <a16:creationId xmlns:a16="http://schemas.microsoft.com/office/drawing/2014/main" id="{9D38E39E-7E16-42B3-92FA-E7DD80100419}"/>
+              </a:ext>
+            </a:extLst>
+          </p:cNvPr>
+          <p:cNvSpPr txBox="1"/>
+          <p:nvPr/>
+        </p:nvSpPr>
+        <p:spPr>
+          <a:xfrm>
+            <a:off x="990600" y="4933950"/>
+            <a:ext cx="4610100" cy="495300"/>
+          </a:xfrm>
+        </p:spPr>
+        <p:txBody>
+          <a:bodyPr wrap="square" rtlCol="0" lIns="0" tIns="0" rIns="0" bIns="0" anchor="t"/>
+          <a:lstStyle/>
+          <a:p>
+            <a:pPr algn="l">
+              <a:lnSpc>
+                <a:spcPct val="130000"/>
+              </a:lnSpc>
+            </a:pPr>
+            <a:r>
+              <a:rPr sz="1250">
+                <a:solidFill>
+                  <a:srgbClr val="6B7280"/>
+                </a:solidFill>
+                <a:latin typeface="Microsoft YaHei"/>
+                <a:ea typeface="Microsoft YaHei"/>
+              </a:rPr>
+              <a:t>关键词：全栈 AI + 金融工程复合背景；3 个月完成引擎升级 + 前端重写 + 国际化 + 安全加固</a:t>
+            </a:r>
+          </a:p>
+        </p:txBody>
+      </p:sp>
+      <p:sp>
+        <p:nvSpPr>
+          <p:cNvPr id="9" name="TextBox 9">
+            <a:extLst>
+              <a:ext uri="{FF2B5EF4-FFF2-40B4-BE49-F238E27FC236}">
+                <a16:creationId xmlns:a16="http://schemas.microsoft.com/office/drawing/2014/main" id="{42175FDD-E55D-481E-A078-AE184E52CED2}"/>
+              </a:ext>
+            </a:extLst>
+          </p:cNvPr>
+          <p:cNvSpPr txBox="1"/>
+          <p:nvPr/>
+        </p:nvSpPr>
+        <p:spPr>
+          <a:xfrm>
+            <a:off x="6591300" y="1695450"/>
+            <a:ext cx="4572000" cy="342900"/>
+          </a:xfrm>
+        </p:spPr>
+        <p:txBody>
+          <a:bodyPr wrap="square" rtlCol="0" lIns="0" tIns="0" rIns="0" bIns="0" anchor="t"/>
+          <a:lstStyle/>
+          <a:p>
+            <a:pPr algn="l">
+              <a:lnSpc>
+                <a:spcPct val="110000"/>
+              </a:lnSpc>
+            </a:pPr>
+            <a:r>
+              <a:rPr sz="2000" b="1">
+                <a:solidFill>
+                  <a:srgbClr val="63E2B7"/>
+                </a:solidFill>
+                <a:latin typeface="Microsoft YaHei"/>
+                <a:ea typeface="Microsoft YaHei"/>
+              </a:rPr>
+              <a:t>融资需求</a:t>
+            </a:r>
+          </a:p>
+        </p:txBody>
+      </p:sp>
+      <p:sp>
+        <p:nvSpPr>
+          <p:cNvPr id="10" name="TextBox 10">
+            <a:extLst>
+              <a:ext uri="{FF2B5EF4-FFF2-40B4-BE49-F238E27FC236}">
+                <a16:creationId xmlns:a16="http://schemas.microsoft.com/office/drawing/2014/main" id="{669B9DA3-0059-4A57-9F29-46A035486A3A}"/>
+              </a:ext>
+            </a:extLst>
+          </p:cNvPr>
+          <p:cNvSpPr txBox="1"/>
+          <p:nvPr/>
+        </p:nvSpPr>
+        <p:spPr>
+          <a:xfrm>
+            <a:off x="6591300" y="2228850"/>
+            <a:ext cx="4610100" cy="285750"/>
+          </a:xfrm>
+        </p:spPr>
+        <p:txBody>
+          <a:bodyPr wrap="square" rtlCol="0" lIns="0" tIns="0" rIns="0" bIns="0" anchor="t"/>
+          <a:lstStyle/>
+          <a:p>
+            <a:pPr algn="l">
+              <a:lnSpc>
+                <a:spcPct val="130000"/>
+              </a:lnSpc>
+            </a:pPr>
+            <a:r>
+              <a:rPr sz="1400" b="1">
+                <a:solidFill>
+                  <a:srgbClr val="E8EAED"/>
+                </a:solidFill>
+                <a:latin typeface="Microsoft YaHei"/>
+                <a:ea typeface="Microsoft YaHei"/>
+              </a:rPr>
+              <a:t>轮次 / 金额 / 估值：</a:t>
+            </a:r>
+            <a:r>
+              <a:rPr sz="1300" i="1">
+                <a:solidFill>
+                  <a:srgbClr val="8FB8FF"/>
+                </a:solidFill>
+                <a:latin typeface="Microsoft YaHei"/>
+                <a:ea typeface="Microsoft YaHei"/>
+              </a:rPr>
+              <a:t>【待填】</a:t>
+            </a:r>
+          </a:p>
+        </p:txBody>
+      </p:sp>
+      <p:sp>
+        <p:nvSpPr>
+          <p:cNvPr id="11" name="TextBox 11">
+            <a:extLst>
+              <a:ext uri="{FF2B5EF4-FFF2-40B4-BE49-F238E27FC236}">
+                <a16:creationId xmlns:a16="http://schemas.microsoft.com/office/drawing/2014/main" id="{A9507C52-CBB8-4009-A52A-540B3302679D}"/>
+              </a:ext>
+            </a:extLst>
+          </p:cNvPr>
+          <p:cNvSpPr txBox="1"/>
+          <p:nvPr/>
+        </p:nvSpPr>
+        <p:spPr>
+          <a:xfrm>
+            <a:off x="6591300" y="2724150"/>
+            <a:ext cx="4610100" cy="285750"/>
+          </a:xfrm>
+        </p:spPr>
+        <p:txBody>
+          <a:bodyPr wrap="square" rtlCol="0" lIns="0" tIns="0" rIns="0" bIns="0" anchor="t"/>
+          <a:lstStyle/>
+          <a:p>
+            <a:pPr algn="l">
+              <a:lnSpc>
+                <a:spcPct val="130000"/>
+              </a:lnSpc>
+            </a:pPr>
+            <a:r>
+              <a:rPr sz="1400" b="1">
+                <a:solidFill>
+                  <a:srgbClr val="E8EAED"/>
+                </a:solidFill>
+                <a:latin typeface="Microsoft YaHei"/>
+                <a:ea typeface="Microsoft YaHei"/>
+              </a:rPr>
+              <a:t>资金用途（建议比例）：</a:t>
+            </a:r>
+          </a:p>
+        </p:txBody>
+      </p:sp>
+      <p:sp>
+        <p:nvSpPr>
+          <p:cNvPr id="12" name="TextBox 12">
+            <a:extLst>
+              <a:ext uri="{FF2B5EF4-FFF2-40B4-BE49-F238E27FC236}">
+                <a16:creationId xmlns:a16="http://schemas.microsoft.com/office/drawing/2014/main" id="{B3CD7F50-E9C8-4274-91C8-9B1BB9DB0CB1}"/>
+              </a:ext>
+            </a:extLst>
+          </p:cNvPr>
+          <p:cNvSpPr txBox="1"/>
+          <p:nvPr/>
+        </p:nvSpPr>
+        <p:spPr>
+          <a:xfrm>
+            <a:off x="6591300" y="3067050"/>
+            <a:ext cx="2857500" cy="209550"/>
+          </a:xfrm>
+        </p:spPr>
+        <p:txBody>
+          <a:bodyPr wrap="square" rtlCol="0" lIns="0" tIns="0" rIns="0" bIns="0" anchor="t"/>
+          <a:lstStyle/>
+          <a:p>
+            <a:pPr algn="l">
+              <a:lnSpc>
+                <a:spcPct val="110000"/>
+              </a:lnSpc>
+            </a:pPr>
+            <a:r>
+              <a:rPr sz="1150">
+                <a:solidFill>
+                  <a:srgbClr val="9AA1AB"/>
+                </a:solidFill>
+                <a:latin typeface="Microsoft YaHei"/>
+                <a:ea typeface="Microsoft YaHei"/>
+              </a:rPr>
+              <a:t>研发（AI 能力 + 架构扩展） 45%</a:t>
+            </a:r>
+          </a:p>
+        </p:txBody>
+      </p:sp>
+      <p:sp>
+        <p:nvSpPr>
+          <p:cNvPr id="13" name="Shape 13">
+            <a:extLst>
+              <a:ext uri="{FF2B5EF4-FFF2-40B4-BE49-F238E27FC236}">
+                <a16:creationId xmlns:a16="http://schemas.microsoft.com/office/drawing/2014/main" id="{2A335F30-77F3-4E2A-B5AF-C7771A6429D4}"/>
               </a:ext>
             </a:extLst>
           </p:cNvPr>
@@ -1878,20 +2784,15 @@
         </p:nvSpPr>
         <p:spPr>
           <a:xfrm>
-            <a:off x="8153400" y="1619250"/>
-            <a:ext cx="3352800" cy="3429000"/>
-          </a:xfrm>
-          <a:prstGeom prst="roundRect">
+            <a:off x="6591300" y="3276600"/>
+            <a:ext cx="2076450" cy="133350"/>
+          </a:xfrm>
+          <a:prstGeom prst="rect">
             <a:avLst/>
           </a:prstGeom>
           <a:solidFill>
-            <a:srgbClr val="14181F"/>
+            <a:srgbClr val="63E2B7"/>
           </a:solidFill>
-          <a:ln w="12700">
-            <a:solidFill>
-              <a:srgbClr val="232A33"/>
-            </a:solidFill>
-          </a:ln>
         </p:spPr>
         <p:txBody>
           <a:bodyPr wrap="square" rtlCol="0"/>
@@ -1906,290 +2807,315 @@
       </p:sp>
       <p:sp>
         <p:nvSpPr>
-          <p:cNvPr id="8" name="TextBox 8">
-            <a:extLst>
-              <a:ext uri="{FF2B5EF4-FFF2-40B4-BE49-F238E27FC236}">
-                <a16:creationId xmlns:a16="http://schemas.microsoft.com/office/drawing/2014/main" id="{AE4AB0B2-A750-43E7-A290-21195DEE6D7A}"/>
-              </a:ext>
-            </a:extLst>
-          </p:cNvPr>
-          <p:cNvSpPr txBox="1"/>
-          <p:nvPr/>
-        </p:nvSpPr>
-        <p:spPr>
-          <a:xfrm>
-            <a:off x="952500" y="1924050"/>
-            <a:ext cx="2819400" cy="419100"/>
-          </a:xfrm>
-        </p:spPr>
-        <p:txBody>
-          <a:bodyPr wrap="square" rtlCol="0" lIns="0" tIns="0" rIns="0" bIns="0" anchor="t"/>
-          <a:lstStyle/>
-          <a:p>
-            <a:pPr algn="l">
-              <a:lnSpc>
-                <a:spcPct val="110000"/>
-              </a:lnSpc>
-            </a:pPr>
-            <a:r>
-              <a:rPr sz="2000" b="1">
+          <p:cNvPr id="14" name="TextBox 14">
+            <a:extLst>
+              <a:ext uri="{FF2B5EF4-FFF2-40B4-BE49-F238E27FC236}">
+                <a16:creationId xmlns:a16="http://schemas.microsoft.com/office/drawing/2014/main" id="{EE0CD83E-5254-4A50-8756-9B6F50F09037}"/>
+              </a:ext>
+            </a:extLst>
+          </p:cNvPr>
+          <p:cNvSpPr txBox="1"/>
+          <p:nvPr/>
+        </p:nvSpPr>
+        <p:spPr>
+          <a:xfrm>
+            <a:off x="6591300" y="3505200"/>
+            <a:ext cx="2857500" cy="209550"/>
+          </a:xfrm>
+        </p:spPr>
+        <p:txBody>
+          <a:bodyPr wrap="square" rtlCol="0" lIns="0" tIns="0" rIns="0" bIns="0" anchor="t"/>
+          <a:lstStyle/>
+          <a:p>
+            <a:pPr algn="l">
+              <a:lnSpc>
+                <a:spcPct val="110000"/>
+              </a:lnSpc>
+            </a:pPr>
+            <a:r>
+              <a:rPr sz="1150">
+                <a:solidFill>
+                  <a:srgbClr val="9AA1AB"/>
+                </a:solidFill>
+                <a:latin typeface="Microsoft YaHei"/>
+                <a:ea typeface="Microsoft YaHei"/>
+              </a:rPr>
+              <a:t>增长（内容 / 社区 / 获客） 30%</a:t>
+            </a:r>
+          </a:p>
+        </p:txBody>
+      </p:sp>
+      <p:sp>
+        <p:nvSpPr>
+          <p:cNvPr id="15" name="Shape 15">
+            <a:extLst>
+              <a:ext uri="{FF2B5EF4-FFF2-40B4-BE49-F238E27FC236}">
+                <a16:creationId xmlns:a16="http://schemas.microsoft.com/office/drawing/2014/main" id="{21516383-8DC5-4DB3-988B-2A5A2C70BC80}"/>
+              </a:ext>
+            </a:extLst>
+          </p:cNvPr>
+          <p:cNvSpPr/>
+          <p:nvPr/>
+        </p:nvSpPr>
+        <p:spPr>
+          <a:xfrm>
+            <a:off x="6591300" y="3714750"/>
+            <a:ext cx="1381125" cy="133350"/>
+          </a:xfrm>
+          <a:prstGeom prst="rect">
+            <a:avLst/>
+          </a:prstGeom>
+          <a:solidFill>
+            <a:srgbClr val="63E2B7"/>
+          </a:solidFill>
+        </p:spPr>
+        <p:txBody>
+          <a:bodyPr wrap="square" rtlCol="0"/>
+          <a:lstStyle/>
+          <a:p>
+            <a:r>
+              <a:rPr/>
+              <a:t/>
+            </a:r>
+          </a:p>
+        </p:txBody>
+      </p:sp>
+      <p:sp>
+        <p:nvSpPr>
+          <p:cNvPr id="16" name="TextBox 16">
+            <a:extLst>
+              <a:ext uri="{FF2B5EF4-FFF2-40B4-BE49-F238E27FC236}">
+                <a16:creationId xmlns:a16="http://schemas.microsoft.com/office/drawing/2014/main" id="{C3E66CBD-18D3-4F8C-81CC-79BB8A4EB42D}"/>
+              </a:ext>
+            </a:extLst>
+          </p:cNvPr>
+          <p:cNvSpPr txBox="1"/>
+          <p:nvPr/>
+        </p:nvSpPr>
+        <p:spPr>
+          <a:xfrm>
+            <a:off x="6591300" y="3943350"/>
+            <a:ext cx="2857500" cy="209550"/>
+          </a:xfrm>
+        </p:spPr>
+        <p:txBody>
+          <a:bodyPr wrap="square" rtlCol="0" lIns="0" tIns="0" rIns="0" bIns="0" anchor="t"/>
+          <a:lstStyle/>
+          <a:p>
+            <a:pPr algn="l">
+              <a:lnSpc>
+                <a:spcPct val="110000"/>
+              </a:lnSpc>
+            </a:pPr>
+            <a:r>
+              <a:rPr sz="1150">
+                <a:solidFill>
+                  <a:srgbClr val="9AA1AB"/>
+                </a:solidFill>
+                <a:latin typeface="Microsoft YaHei"/>
+                <a:ea typeface="Microsoft YaHei"/>
+              </a:rPr>
+              <a:t>安全与合规 15%</a:t>
+            </a:r>
+          </a:p>
+        </p:txBody>
+      </p:sp>
+      <p:sp>
+        <p:nvSpPr>
+          <p:cNvPr id="17" name="Shape 17">
+            <a:extLst>
+              <a:ext uri="{FF2B5EF4-FFF2-40B4-BE49-F238E27FC236}">
+                <a16:creationId xmlns:a16="http://schemas.microsoft.com/office/drawing/2014/main" id="{DF906009-2860-4FDF-82B4-49419D16F8D2}"/>
+              </a:ext>
+            </a:extLst>
+          </p:cNvPr>
+          <p:cNvSpPr/>
+          <p:nvPr/>
+        </p:nvSpPr>
+        <p:spPr>
+          <a:xfrm>
+            <a:off x="6591300" y="4152900"/>
+            <a:ext cx="695325" cy="133350"/>
+          </a:xfrm>
+          <a:prstGeom prst="rect">
+            <a:avLst/>
+          </a:prstGeom>
+          <a:solidFill>
+            <a:srgbClr val="63E2B7"/>
+          </a:solidFill>
+        </p:spPr>
+        <p:txBody>
+          <a:bodyPr wrap="square" rtlCol="0"/>
+          <a:lstStyle/>
+          <a:p>
+            <a:r>
+              <a:rPr/>
+              <a:t/>
+            </a:r>
+          </a:p>
+        </p:txBody>
+      </p:sp>
+      <p:sp>
+        <p:nvSpPr>
+          <p:cNvPr id="18" name="TextBox 18">
+            <a:extLst>
+              <a:ext uri="{FF2B5EF4-FFF2-40B4-BE49-F238E27FC236}">
+                <a16:creationId xmlns:a16="http://schemas.microsoft.com/office/drawing/2014/main" id="{8B9808F4-B898-4F88-9328-7CD7A1F64839}"/>
+              </a:ext>
+            </a:extLst>
+          </p:cNvPr>
+          <p:cNvSpPr txBox="1"/>
+          <p:nvPr/>
+        </p:nvSpPr>
+        <p:spPr>
+          <a:xfrm>
+            <a:off x="6591300" y="4381500"/>
+            <a:ext cx="2857500" cy="209550"/>
+          </a:xfrm>
+        </p:spPr>
+        <p:txBody>
+          <a:bodyPr wrap="square" rtlCol="0" lIns="0" tIns="0" rIns="0" bIns="0" anchor="t"/>
+          <a:lstStyle/>
+          <a:p>
+            <a:pPr algn="l">
+              <a:lnSpc>
+                <a:spcPct val="110000"/>
+              </a:lnSpc>
+            </a:pPr>
+            <a:r>
+              <a:rPr sz="1150">
+                <a:solidFill>
+                  <a:srgbClr val="9AA1AB"/>
+                </a:solidFill>
+                <a:latin typeface="Microsoft YaHei"/>
+                <a:ea typeface="Microsoft YaHei"/>
+              </a:rPr>
+              <a:t>储备 10%</a:t>
+            </a:r>
+          </a:p>
+        </p:txBody>
+      </p:sp>
+      <p:sp>
+        <p:nvSpPr>
+          <p:cNvPr id="19" name="Shape 19">
+            <a:extLst>
+              <a:ext uri="{FF2B5EF4-FFF2-40B4-BE49-F238E27FC236}">
+                <a16:creationId xmlns:a16="http://schemas.microsoft.com/office/drawing/2014/main" id="{C173C453-89A6-4677-9C2D-68D4FA40CE23}"/>
+              </a:ext>
+            </a:extLst>
+          </p:cNvPr>
+          <p:cNvSpPr/>
+          <p:nvPr/>
+        </p:nvSpPr>
+        <p:spPr>
+          <a:xfrm>
+            <a:off x="6591300" y="4591050"/>
+            <a:ext cx="457200" cy="133350"/>
+          </a:xfrm>
+          <a:prstGeom prst="rect">
+            <a:avLst/>
+          </a:prstGeom>
+          <a:solidFill>
+            <a:srgbClr val="63E2B7"/>
+          </a:solidFill>
+        </p:spPr>
+        <p:txBody>
+          <a:bodyPr wrap="square" rtlCol="0"/>
+          <a:lstStyle/>
+          <a:p>
+            <a:r>
+              <a:rPr/>
+              <a:t/>
+            </a:r>
+          </a:p>
+        </p:txBody>
+      </p:sp>
+      <p:sp>
+        <p:nvSpPr>
+          <p:cNvPr id="20" name="TextBox 20">
+            <a:extLst>
+              <a:ext uri="{FF2B5EF4-FFF2-40B4-BE49-F238E27FC236}">
+                <a16:creationId xmlns:a16="http://schemas.microsoft.com/office/drawing/2014/main" id="{44D029F4-6167-4779-AF7D-9F8901E9D729}"/>
+              </a:ext>
+            </a:extLst>
+          </p:cNvPr>
+          <p:cNvSpPr txBox="1"/>
+          <p:nvPr/>
+        </p:nvSpPr>
+        <p:spPr>
+          <a:xfrm>
+            <a:off x="6591300" y="4933950"/>
+            <a:ext cx="4610100" cy="285750"/>
+          </a:xfrm>
+        </p:spPr>
+        <p:txBody>
+          <a:bodyPr wrap="square" rtlCol="0" lIns="0" tIns="0" rIns="0" bIns="0" anchor="t"/>
+          <a:lstStyle/>
+          <a:p>
+            <a:pPr algn="l">
+              <a:lnSpc>
+                <a:spcPct val="130000"/>
+              </a:lnSpc>
+            </a:pPr>
+            <a:r>
+              <a:rPr sz="1400" b="1">
                 <a:solidFill>
                   <a:srgbClr val="E8EAED"/>
                 </a:solidFill>
                 <a:latin typeface="Microsoft YaHei"/>
                 <a:ea typeface="Microsoft YaHei"/>
               </a:rPr>
-              <a:t>分布式交易运行时</a:t>
-            </a:r>
-          </a:p>
-        </p:txBody>
-      </p:sp>
-      <p:sp>
-        <p:nvSpPr>
-          <p:cNvPr id="9" name="TextBox 9">
-            <a:extLst>
-              <a:ext uri="{FF2B5EF4-FFF2-40B4-BE49-F238E27FC236}">
-                <a16:creationId xmlns:a16="http://schemas.microsoft.com/office/drawing/2014/main" id="{DF92E64B-59DA-4E98-B407-BF1C8196459B}"/>
-              </a:ext>
-            </a:extLst>
-          </p:cNvPr>
-          <p:cNvSpPr txBox="1"/>
-          <p:nvPr/>
-        </p:nvSpPr>
-        <p:spPr>
-          <a:xfrm>
-            <a:off x="952500" y="2438400"/>
-            <a:ext cx="2819400" cy="2381250"/>
-          </a:xfrm>
-        </p:spPr>
-        <p:txBody>
-          <a:bodyPr wrap="square" rtlCol="0" lIns="0" tIns="0" rIns="0" bIns="0" anchor="t"/>
-          <a:lstStyle/>
-          <a:p>
-            <a:pPr algn="l">
-              <a:lnSpc>
-                <a:spcPct val="150000"/>
+              <a:t>12 个月里程碑：</a:t>
+            </a:r>
+            <a:r>
+              <a:rPr sz="1300" i="1">
+                <a:solidFill>
+                  <a:srgbClr val="8FB8FF"/>
+                </a:solidFill>
+                <a:latin typeface="Microsoft YaHei"/>
+                <a:ea typeface="Microsoft YaHei"/>
+              </a:rPr>
+              <a:t>【待填：付费用户 / MRR 目标】</a:t>
+            </a:r>
+          </a:p>
+        </p:txBody>
+      </p:sp>
+      <p:sp>
+        <p:nvSpPr>
+          <p:cNvPr id="21" name="TextBox 21">
+            <a:extLst>
+              <a:ext uri="{FF2B5EF4-FFF2-40B4-BE49-F238E27FC236}">
+                <a16:creationId xmlns:a16="http://schemas.microsoft.com/office/drawing/2014/main" id="{2E63E4C2-72D0-497A-9752-903181BC808E}"/>
+              </a:ext>
+            </a:extLst>
+          </p:cNvPr>
+          <p:cNvSpPr txBox="1"/>
+          <p:nvPr/>
+        </p:nvSpPr>
+        <p:spPr>
+          <a:xfrm>
+            <a:off x="685800" y="5772150"/>
+            <a:ext cx="10820400" cy="247650"/>
+          </a:xfrm>
+        </p:spPr>
+        <p:txBody>
+          <a:bodyPr wrap="square" rtlCol="0" lIns="0" tIns="0" rIns="0" bIns="0" anchor="t"/>
+          <a:lstStyle/>
+          <a:p>
+            <a:pPr algn="l">
+              <a:lnSpc>
+                <a:spcPct val="110000"/>
               </a:lnSpc>
             </a:pPr>
             <a:r>
               <a:rPr sz="1300">
                 <a:solidFill>
-                  <a:srgbClr val="9AA1AB"/>
-                </a:solidFill>
-                <a:latin typeface="Microsoft YaHei"/>
-                <a:ea typeface="Microsoft YaHei"/>
-              </a:rPr>
-              <a:t>18 个容器服务：PostgreSQL 唯一真相源 · Kafka 版本化事件 · 策略运行时与 API 进程物理隔离；从单机演练升级到事件驱动架构。</a:t>
-            </a:r>
-          </a:p>
-        </p:txBody>
-      </p:sp>
-      <p:sp>
-        <p:nvSpPr>
-          <p:cNvPr id="10" name="TextBox 10">
-            <a:extLst>
-              <a:ext uri="{FF2B5EF4-FFF2-40B4-BE49-F238E27FC236}">
-                <a16:creationId xmlns:a16="http://schemas.microsoft.com/office/drawing/2014/main" id="{C37876AB-42F3-48E7-A0D4-AF493BF84299}"/>
-              </a:ext>
-            </a:extLst>
-          </p:cNvPr>
-          <p:cNvSpPr txBox="1"/>
-          <p:nvPr/>
-        </p:nvSpPr>
-        <p:spPr>
-          <a:xfrm>
-            <a:off x="4686300" y="1924050"/>
-            <a:ext cx="2819400" cy="419100"/>
-          </a:xfrm>
-        </p:spPr>
-        <p:txBody>
-          <a:bodyPr wrap="square" rtlCol="0" lIns="0" tIns="0" rIns="0" bIns="0" anchor="t"/>
-          <a:lstStyle/>
-          <a:p>
-            <a:pPr algn="l">
-              <a:lnSpc>
-                <a:spcPct val="110000"/>
-              </a:lnSpc>
-            </a:pPr>
-            <a:r>
-              <a:rPr sz="2000" b="1">
-                <a:solidFill>
-                  <a:srgbClr val="E8EAED"/>
-                </a:solidFill>
-                <a:latin typeface="Microsoft YaHei"/>
-                <a:ea typeface="Microsoft YaHei"/>
-              </a:rPr>
-              <a:t>资金安全设计</a:t>
-            </a:r>
-          </a:p>
-        </p:txBody>
-      </p:sp>
-      <p:sp>
-        <p:nvSpPr>
-          <p:cNvPr id="11" name="TextBox 11">
-            <a:extLst>
-              <a:ext uri="{FF2B5EF4-FFF2-40B4-BE49-F238E27FC236}">
-                <a16:creationId xmlns:a16="http://schemas.microsoft.com/office/drawing/2014/main" id="{AE004D1D-805F-4C90-80E2-9D57C4AFF699}"/>
-              </a:ext>
-            </a:extLst>
-          </p:cNvPr>
-          <p:cNvSpPr txBox="1"/>
-          <p:nvPr/>
-        </p:nvSpPr>
-        <p:spPr>
-          <a:xfrm>
-            <a:off x="4686300" y="2438400"/>
-            <a:ext cx="2819400" cy="2381250"/>
-          </a:xfrm>
-        </p:spPr>
-        <p:txBody>
-          <a:bodyPr wrap="square" rtlCol="0" lIns="0" tIns="0" rIns="0" bIns="0" anchor="t"/>
-          <a:lstStyle/>
-          <a:p>
-            <a:pPr algn="l">
-              <a:lnSpc>
-                <a:spcPct val="150000"/>
-              </a:lnSpc>
-            </a:pPr>
-            <a:r>
-              <a:rPr sz="1300">
-                <a:solidFill>
-                  <a:srgbClr val="9AA1AB"/>
-                </a:solidFill>
-                <a:latin typeface="Microsoft YaHei"/>
-                <a:ea typeface="Microsoft YaHei"/>
-              </a:rPr>
-              <a:t>租约 + 心跳 + fencing + 幂等键，防止重复下单；Agent 实盘 4 条件门控；全量操作审计——资金安全优先于便利。</a:t>
-            </a:r>
-          </a:p>
-        </p:txBody>
-      </p:sp>
-      <p:sp>
-        <p:nvSpPr>
-          <p:cNvPr id="12" name="TextBox 12">
-            <a:extLst>
-              <a:ext uri="{FF2B5EF4-FFF2-40B4-BE49-F238E27FC236}">
-                <a16:creationId xmlns:a16="http://schemas.microsoft.com/office/drawing/2014/main" id="{BEB07463-62F8-4E11-90F4-7D7E55E97D83}"/>
-              </a:ext>
-            </a:extLst>
-          </p:cNvPr>
-          <p:cNvSpPr txBox="1"/>
-          <p:nvPr/>
-        </p:nvSpPr>
-        <p:spPr>
-          <a:xfrm>
-            <a:off x="8420100" y="1924050"/>
-            <a:ext cx="2819400" cy="419100"/>
-          </a:xfrm>
-        </p:spPr>
-        <p:txBody>
-          <a:bodyPr wrap="square" rtlCol="0" lIns="0" tIns="0" rIns="0" bIns="0" anchor="t"/>
-          <a:lstStyle/>
-          <a:p>
-            <a:pPr algn="l">
-              <a:lnSpc>
-                <a:spcPct val="110000"/>
-              </a:lnSpc>
-            </a:pPr>
-            <a:r>
-              <a:rPr sz="2000" b="1">
-                <a:solidFill>
-                  <a:srgbClr val="E8EAED"/>
-                </a:solidFill>
-                <a:latin typeface="Microsoft YaHei"/>
-                <a:ea typeface="Microsoft YaHei"/>
-              </a:rPr>
-              <a:t>规模与可信</a:t>
-            </a:r>
-          </a:p>
-        </p:txBody>
-      </p:sp>
-      <p:sp>
-        <p:nvSpPr>
-          <p:cNvPr id="13" name="TextBox 13">
-            <a:extLst>
-              <a:ext uri="{FF2B5EF4-FFF2-40B4-BE49-F238E27FC236}">
-                <a16:creationId xmlns:a16="http://schemas.microsoft.com/office/drawing/2014/main" id="{39112A12-C7EB-4E7F-A15C-34D55C4BCB2B}"/>
-              </a:ext>
-            </a:extLst>
-          </p:cNvPr>
-          <p:cNvSpPr txBox="1"/>
-          <p:nvPr/>
-        </p:nvSpPr>
-        <p:spPr>
-          <a:xfrm>
-            <a:off x="8420100" y="2438400"/>
-            <a:ext cx="2819400" cy="2381250"/>
-          </a:xfrm>
-        </p:spPr>
-        <p:txBody>
-          <a:bodyPr wrap="square" rtlCol="0" lIns="0" tIns="0" rIns="0" bIns="0" anchor="t"/>
-          <a:lstStyle/>
-          <a:p>
-            <a:pPr algn="l">
-              <a:lnSpc>
-                <a:spcPct val="150000"/>
-              </a:lnSpc>
-            </a:pPr>
-            <a:r>
-              <a:rPr sz="1300">
-                <a:solidFill>
-                  <a:srgbClr val="9AA1AB"/>
-                </a:solidFill>
-                <a:latin typeface="Microsoft YaHei"/>
-                <a:ea typeface="Microsoft YaHei"/>
-              </a:rPr>
-              <a:t>安全审计 0 依赖漏洞；多租户 4 级权限；V6 架构目标 2 万用户 / 10 万并发策略；支持私有化自托管部署。</a:t>
-            </a:r>
-          </a:p>
-        </p:txBody>
-      </p:sp>
-      <p:sp>
-        <p:nvSpPr>
-          <p:cNvPr id="14" name="TextBox 14">
-            <a:extLst>
-              <a:ext uri="{FF2B5EF4-FFF2-40B4-BE49-F238E27FC236}">
-                <a16:creationId xmlns:a16="http://schemas.microsoft.com/office/drawing/2014/main" id="{572DAD1F-9534-4276-9CE2-8A0455C82867}"/>
-              </a:ext>
-            </a:extLst>
-          </p:cNvPr>
-          <p:cNvSpPr txBox="1"/>
-          <p:nvPr/>
-        </p:nvSpPr>
-        <p:spPr>
-          <a:xfrm>
-            <a:off x="685800" y="5524500"/>
-            <a:ext cx="10820400" cy="266700"/>
-          </a:xfrm>
-        </p:spPr>
-        <p:txBody>
-          <a:bodyPr wrap="square" rtlCol="0" lIns="0" tIns="0" rIns="0" bIns="0" anchor="t"/>
-          <a:lstStyle/>
-          <a:p>
-            <a:pPr algn="l">
-              <a:lnSpc>
-                <a:spcPct val="110000"/>
-              </a:lnSpc>
-            </a:pPr>
-            <a:r>
-              <a:rPr sz="1500">
-                <a:solidFill>
-                  <a:srgbClr val="9AA1AB"/>
-                </a:solidFill>
-                <a:latin typeface="Microsoft YaHei"/>
-                <a:ea typeface="Microsoft YaHei"/>
-              </a:rPr>
-              <a:t>自托管选项：</a:t>
-            </a:r>
-            <a:r>
-              <a:rPr sz="1500" b="1">
-                <a:solidFill>
-                  <a:srgbClr val="63E2B7"/>
-                </a:solidFill>
-                <a:latin typeface="Microsoft YaHei"/>
-                <a:ea typeface="Microsoft YaHei"/>
-              </a:rPr>
-              <a:t>面向数据主权敏感的工作室与机构客户，一键安装 + 容器镜像</a:t>
+                  <a:srgbClr val="6B7280"/>
+                </a:solidFill>
+                <a:latin typeface="Microsoft YaHei"/>
+                <a:ea typeface="Microsoft YaHei"/>
+              </a:rPr>
+              <a:t>单位经济（转化 / 留存 / ARPU / LTV / CAC）与完整财务模型在尽调资料包中提供</a:t>
             </a:r>
           </a:p>
         </p:txBody>
@@ -2232,7 +3158,7 @@
           <p:cNvPr id="3" name="TextBox 3">
             <a:extLst>
               <a:ext uri="{FF2B5EF4-FFF2-40B4-BE49-F238E27FC236}">
-                <a16:creationId xmlns:a16="http://schemas.microsoft.com/office/drawing/2014/main" id="{F08B89A3-2A80-431D-A89E-27A2E64C3F9A}"/>
+                <a16:creationId xmlns:a16="http://schemas.microsoft.com/office/drawing/2014/main" id="{5491BB9D-4999-49A0-A231-C63668DC4B51}"/>
               </a:ext>
             </a:extLst>
           </p:cNvPr>
@@ -2262,7 +3188,7 @@
                 <a:latin typeface="Microsoft YaHei"/>
                 <a:ea typeface="Microsoft YaHei"/>
               </a:rPr>
-              <a:t>3 个月：从架构升级到生产上线</a:t>
+              <a:t>可治理的 AI 控制面</a:t>
             </a:r>
           </a:p>
         </p:txBody>
@@ -2272,7 +3198,7 @@
           <p:cNvPr id="4" name="TextBox 4">
             <a:extLst>
               <a:ext uri="{FF2B5EF4-FFF2-40B4-BE49-F238E27FC236}">
-                <a16:creationId xmlns:a16="http://schemas.microsoft.com/office/drawing/2014/main" id="{F7A9B638-F471-44E2-9497-265EA63158F7}"/>
+                <a16:creationId xmlns:a16="http://schemas.microsoft.com/office/drawing/2014/main" id="{BF8C7AC7-D810-4E8E-B025-511FBAE61F17}"/>
               </a:ext>
             </a:extLst>
           </p:cNvPr>
@@ -2302,867 +3228,298 @@
                 <a:latin typeface="Microsoft YaHei"/>
                 <a:ea typeface="Microsoft YaHei"/>
               </a:rPr>
-              <a:t>2026 年 7–10 月；全部进展均可在生产环境与代码仓库逐条验证</a:t>
-            </a:r>
-          </a:p>
-        </p:txBody>
-      </p:sp>
-      <p:sp>
-        <p:nvSpPr>
-          <p:cNvPr id="5" name="Shape 5">
-            <a:extLst>
-              <a:ext uri="{FF2B5EF4-FFF2-40B4-BE49-F238E27FC236}">
-                <a16:creationId xmlns:a16="http://schemas.microsoft.com/office/drawing/2014/main" id="{06B5E78D-92D1-4E7F-90A7-BFA0C23262A2}"/>
-              </a:ext>
-            </a:extLst>
-          </p:cNvPr>
-          <p:cNvSpPr/>
-          <p:nvPr/>
-        </p:nvSpPr>
-        <p:spPr>
-          <a:xfrm>
-            <a:off x="1143000" y="3619500"/>
-            <a:ext cx="9906000" cy="19050"/>
+              <a:t>面向管理员：AI 能力可见、可控、可审计（生产环境真实界面）</a:t>
+            </a:r>
+          </a:p>
+        </p:txBody>
+      </p:sp>
+      <p:pic>
+        <p:nvPicPr>
+          <p:cNvPr id="5" name="Picture 5">
+            <a:extLst>
+              <a:ext uri="{FF2B5EF4-FFF2-40B4-BE49-F238E27FC236}">
+                <a16:creationId xmlns:a16="http://schemas.microsoft.com/office/drawing/2014/main" id="{8BD36C9E-80B1-4A0A-8085-D02D73AFB48E}"/>
+              </a:ext>
+            </a:extLst>
+          </p:cNvPr>
+          <p:cNvPicPr/>
+          <p:nvPr/>
+        </p:nvPicPr>
+        <p:blipFill>
+          <a:blip r:embed="rId2"/>
+          <a:stretch>
+            <a:fillRect/>
+          </a:stretch>
+        </p:blipFill>
+        <p:spPr>
+          <a:xfrm>
+            <a:off x="609600" y="1524000"/>
+            <a:ext cx="6096000" cy="3810000"/>
           </a:xfrm>
           <a:prstGeom prst="rect">
             <a:avLst/>
           </a:prstGeom>
-          <a:solidFill>
-            <a:srgbClr val="232A33"/>
-          </a:solidFill>
-        </p:spPr>
-        <p:txBody>
-          <a:bodyPr wrap="square" rtlCol="0"/>
-          <a:lstStyle/>
-          <a:p>
-            <a:r>
-              <a:rPr/>
-              <a:t/>
-            </a:r>
-          </a:p>
-        </p:txBody>
-      </p:sp>
-      <p:sp>
-        <p:nvSpPr>
-          <p:cNvPr id="6" name="Shape 6">
-            <a:extLst>
-              <a:ext uri="{FF2B5EF4-FFF2-40B4-BE49-F238E27FC236}">
-                <a16:creationId xmlns:a16="http://schemas.microsoft.com/office/drawing/2014/main" id="{AB442282-7E81-4DE9-A0B4-DE040ED91FC8}"/>
-              </a:ext>
-            </a:extLst>
-          </p:cNvPr>
-          <p:cNvSpPr/>
-          <p:nvPr/>
-        </p:nvSpPr>
-        <p:spPr>
-          <a:xfrm>
-            <a:off x="2066925" y="3562350"/>
-            <a:ext cx="133350" cy="133350"/>
-          </a:xfrm>
-          <a:prstGeom prst="ellipse">
-            <a:avLst/>
-          </a:prstGeom>
-          <a:solidFill>
-            <a:srgbClr val="63E2B7"/>
-          </a:solidFill>
-        </p:spPr>
-        <p:txBody>
-          <a:bodyPr wrap="square" rtlCol="0"/>
-          <a:lstStyle/>
-          <a:p>
-            <a:r>
-              <a:rPr/>
-              <a:t/>
-            </a:r>
-          </a:p>
-        </p:txBody>
-      </p:sp>
-      <p:sp>
-        <p:nvSpPr>
-          <p:cNvPr id="7" name="Shape 7">
-            <a:extLst>
-              <a:ext uri="{FF2B5EF4-FFF2-40B4-BE49-F238E27FC236}">
-                <a16:creationId xmlns:a16="http://schemas.microsoft.com/office/drawing/2014/main" id="{FE63550A-7F89-48D3-A671-769602AE8C2A}"/>
-              </a:ext>
-            </a:extLst>
-          </p:cNvPr>
-          <p:cNvSpPr/>
-          <p:nvPr/>
-        </p:nvSpPr>
-        <p:spPr>
-          <a:xfrm>
-            <a:off x="4048125" y="3562350"/>
-            <a:ext cx="133350" cy="133350"/>
-          </a:xfrm>
-          <a:prstGeom prst="ellipse">
-            <a:avLst/>
-          </a:prstGeom>
-          <a:solidFill>
-            <a:srgbClr val="63E2B7"/>
-          </a:solidFill>
-        </p:spPr>
-        <p:txBody>
-          <a:bodyPr wrap="square" rtlCol="0"/>
-          <a:lstStyle/>
-          <a:p>
-            <a:r>
-              <a:rPr/>
-              <a:t/>
-            </a:r>
-          </a:p>
-        </p:txBody>
-      </p:sp>
-      <p:sp>
-        <p:nvSpPr>
-          <p:cNvPr id="8" name="Shape 8">
-            <a:extLst>
-              <a:ext uri="{FF2B5EF4-FFF2-40B4-BE49-F238E27FC236}">
-                <a16:creationId xmlns:a16="http://schemas.microsoft.com/office/drawing/2014/main" id="{6431E0B1-1A8C-4B9E-96F0-6CE26E0274C0}"/>
-              </a:ext>
-            </a:extLst>
-          </p:cNvPr>
-          <p:cNvSpPr/>
-          <p:nvPr/>
-        </p:nvSpPr>
-        <p:spPr>
-          <a:xfrm>
-            <a:off x="6029325" y="3562350"/>
-            <a:ext cx="133350" cy="133350"/>
-          </a:xfrm>
-          <a:prstGeom prst="ellipse">
-            <a:avLst/>
-          </a:prstGeom>
-          <a:solidFill>
-            <a:srgbClr val="63E2B7"/>
-          </a:solidFill>
-        </p:spPr>
-        <p:txBody>
-          <a:bodyPr wrap="square" rtlCol="0"/>
-          <a:lstStyle/>
-          <a:p>
-            <a:r>
-              <a:rPr/>
-              <a:t/>
-            </a:r>
-          </a:p>
-        </p:txBody>
-      </p:sp>
-      <p:sp>
-        <p:nvSpPr>
-          <p:cNvPr id="9" name="Shape 9">
-            <a:extLst>
-              <a:ext uri="{FF2B5EF4-FFF2-40B4-BE49-F238E27FC236}">
-                <a16:creationId xmlns:a16="http://schemas.microsoft.com/office/drawing/2014/main" id="{B2667906-0992-4974-83CE-CFD1944D69C1}"/>
-              </a:ext>
-            </a:extLst>
-          </p:cNvPr>
-          <p:cNvSpPr/>
-          <p:nvPr/>
-        </p:nvSpPr>
-        <p:spPr>
-          <a:xfrm>
-            <a:off x="8010525" y="3562350"/>
-            <a:ext cx="133350" cy="133350"/>
-          </a:xfrm>
-          <a:prstGeom prst="ellipse">
-            <a:avLst/>
-          </a:prstGeom>
-          <a:solidFill>
-            <a:srgbClr val="63E2B7"/>
-          </a:solidFill>
-        </p:spPr>
-        <p:txBody>
-          <a:bodyPr wrap="square" rtlCol="0"/>
-          <a:lstStyle/>
-          <a:p>
-            <a:r>
-              <a:rPr/>
-              <a:t/>
-            </a:r>
-          </a:p>
-        </p:txBody>
-      </p:sp>
-      <p:sp>
-        <p:nvSpPr>
-          <p:cNvPr id="10" name="Shape 10">
-            <a:extLst>
-              <a:ext uri="{FF2B5EF4-FFF2-40B4-BE49-F238E27FC236}">
-                <a16:creationId xmlns:a16="http://schemas.microsoft.com/office/drawing/2014/main" id="{491A2883-A4CC-4CC2-881B-DF1DBA62D2A8}"/>
-              </a:ext>
-            </a:extLst>
-          </p:cNvPr>
-          <p:cNvSpPr/>
-          <p:nvPr/>
-        </p:nvSpPr>
-        <p:spPr>
-          <a:xfrm>
-            <a:off x="9991725" y="3562350"/>
-            <a:ext cx="133350" cy="133350"/>
-          </a:xfrm>
-          <a:prstGeom prst="ellipse">
-            <a:avLst/>
-          </a:prstGeom>
-          <a:solidFill>
-            <a:srgbClr val="63E2B7"/>
-          </a:solidFill>
-        </p:spPr>
-        <p:txBody>
-          <a:bodyPr wrap="square" rtlCol="0"/>
-          <a:lstStyle/>
-          <a:p>
-            <a:r>
-              <a:rPr/>
-              <a:t/>
-            </a:r>
-          </a:p>
-        </p:txBody>
-      </p:sp>
-      <p:sp>
-        <p:nvSpPr>
-          <p:cNvPr id="11" name="TextBox 11">
-            <a:extLst>
-              <a:ext uri="{FF2B5EF4-FFF2-40B4-BE49-F238E27FC236}">
-                <a16:creationId xmlns:a16="http://schemas.microsoft.com/office/drawing/2014/main" id="{3DD8193E-8E51-4736-AB80-540F95CDB23B}"/>
-              </a:ext>
-            </a:extLst>
-          </p:cNvPr>
-          <p:cNvSpPr txBox="1"/>
-          <p:nvPr/>
-        </p:nvSpPr>
-        <p:spPr>
-          <a:xfrm>
-            <a:off x="1228725" y="3257550"/>
-            <a:ext cx="1809750" cy="247650"/>
-          </a:xfrm>
-        </p:spPr>
-        <p:txBody>
-          <a:bodyPr wrap="square" rtlCol="0" lIns="0" tIns="0" rIns="0" bIns="0" anchor="t"/>
-          <a:lstStyle/>
-          <a:p>
-            <a:pPr algn="ctr">
-              <a:lnSpc>
-                <a:spcPct val="110000"/>
-              </a:lnSpc>
-            </a:pPr>
-            <a:r>
-              <a:rPr sz="1300" b="1">
+        </p:spPr>
+      </p:pic>
+      <p:sp>
+        <p:nvSpPr>
+          <p:cNvPr id="6" name="TextBox 6">
+            <a:extLst>
+              <a:ext uri="{FF2B5EF4-FFF2-40B4-BE49-F238E27FC236}">
+                <a16:creationId xmlns:a16="http://schemas.microsoft.com/office/drawing/2014/main" id="{EFAC0AAE-7B18-44C5-8CD2-C2A342CD60FC}"/>
+              </a:ext>
+            </a:extLst>
+          </p:cNvPr>
+          <p:cNvSpPr txBox="1"/>
+          <p:nvPr/>
+        </p:nvSpPr>
+        <p:spPr>
+          <a:xfrm>
+            <a:off x="609600" y="5410200"/>
+            <a:ext cx="6286500" cy="228600"/>
+          </a:xfrm>
+        </p:spPr>
+        <p:txBody>
+          <a:bodyPr wrap="square" rtlCol="0" lIns="0" tIns="0" rIns="0" bIns="0" anchor="t"/>
+          <a:lstStyle/>
+          <a:p>
+            <a:pPr algn="l">
+              <a:lnSpc>
+                <a:spcPct val="110000"/>
+              </a:lnSpc>
+            </a:pPr>
+            <a:r>
+              <a:rPr sz="1200">
+                <a:solidFill>
+                  <a:srgbClr val="6B7280"/>
+                </a:solidFill>
+                <a:latin typeface="Microsoft YaHei"/>
+                <a:ea typeface="Microsoft YaHei"/>
+              </a:rPr>
+              <a:t>管理员视图：66 个工具全表（含风险级别 / 只读标记 / 启停状态）</a:t>
+            </a:r>
+          </a:p>
+        </p:txBody>
+      </p:sp>
+      <p:sp>
+        <p:nvSpPr>
+          <p:cNvPr id="7" name="TextBox 7">
+            <a:extLst>
+              <a:ext uri="{FF2B5EF4-FFF2-40B4-BE49-F238E27FC236}">
+                <a16:creationId xmlns:a16="http://schemas.microsoft.com/office/drawing/2014/main" id="{429E9BF4-B96F-46C5-AA8F-7F98438268A6}"/>
+              </a:ext>
+            </a:extLst>
+          </p:cNvPr>
+          <p:cNvSpPr txBox="1"/>
+          <p:nvPr/>
+        </p:nvSpPr>
+        <p:spPr>
+          <a:xfrm>
+            <a:off x="7086600" y="1619250"/>
+            <a:ext cx="4724400" cy="3810000"/>
+          </a:xfrm>
+        </p:spPr>
+        <p:txBody>
+          <a:bodyPr wrap="square" rtlCol="0" lIns="0" tIns="0" rIns="0" bIns="0" anchor="t"/>
+          <a:lstStyle/>
+          <a:p>
+            <a:pPr algn="l">
+              <a:lnSpc>
+                <a:spcPct val="135000"/>
+              </a:lnSpc>
+              <a:spcAft>
+                <a:spcPts val="1600"/>
+              </a:spcAft>
+            </a:pPr>
+            <a:r>
+              <a:rPr sz="1450" b="1">
+                <a:solidFill>
+                  <a:srgbClr val="E8EAED"/>
+                </a:solidFill>
+                <a:latin typeface="Microsoft YaHei"/>
+                <a:ea typeface="Microsoft YaHei"/>
+              </a:rPr>
+              <a:t>31 项技能 · 66 个工具</a:t>
+            </a:r>
+            <a:r>
+              <a:rPr sz="1300">
+                <a:solidFill>
+                  <a:srgbClr val="9AA1AB"/>
+                </a:solidFill>
+                <a:latin typeface="Microsoft YaHei"/>
+                <a:ea typeface="Microsoft YaHei"/>
+              </a:rPr>
+              <a:t> —— 全部可视化；其中 58 个经 MCP 对外开放</a:t>
+            </a:r>
+          </a:p>
+          <a:p>
+            <a:pPr algn="l">
+              <a:lnSpc>
+                <a:spcPct val="135000"/>
+              </a:lnSpc>
+              <a:spcAft>
+                <a:spcPts val="1600"/>
+              </a:spcAft>
+            </a:pPr>
+            <a:r>
+              <a:rPr sz="1450" b="1">
+                <a:solidFill>
+                  <a:srgbClr val="E8EAED"/>
+                </a:solidFill>
+                <a:latin typeface="Microsoft YaHei"/>
+                <a:ea typeface="Microsoft YaHei"/>
+              </a:rPr>
+              <a:t>逐项启停</a:t>
+            </a:r>
+            <a:r>
+              <a:rPr sz="1300">
+                <a:solidFill>
+                  <a:srgbClr val="9AA1AB"/>
+                </a:solidFill>
+                <a:latin typeface="Microsoft YaHei"/>
+                <a:ea typeface="Microsoft YaHei"/>
+              </a:rPr>
+              <a:t> —— 停用即从 AI 上下文移除，全员即时生效</a:t>
+            </a:r>
+          </a:p>
+          <a:p>
+            <a:pPr algn="l">
+              <a:lnSpc>
+                <a:spcPct val="135000"/>
+              </a:lnSpc>
+              <a:spcAft>
+                <a:spcPts val="1600"/>
+              </a:spcAft>
+            </a:pPr>
+            <a:r>
+              <a:rPr sz="1450" b="1">
+                <a:solidFill>
+                  <a:srgbClr val="E8EAED"/>
+                </a:solidFill>
+                <a:latin typeface="Microsoft YaHei"/>
+                <a:ea typeface="Microsoft YaHei"/>
+              </a:rPr>
+              <a:t>风险分级</a:t>
+            </a:r>
+            <a:r>
+              <a:rPr sz="1300">
+                <a:solidFill>
+                  <a:srgbClr val="9AA1AB"/>
+                </a:solidFill>
+                <a:latin typeface="Microsoft YaHei"/>
+                <a:ea typeface="Microsoft YaHei"/>
+              </a:rPr>
+              <a:t> —— read / write_draft / trading + 只读标记</a:t>
+            </a:r>
+          </a:p>
+          <a:p>
+            <a:pPr algn="l">
+              <a:lnSpc>
+                <a:spcPct val="135000"/>
+              </a:lnSpc>
+              <a:spcAft>
+                <a:spcPts val="1600"/>
+              </a:spcAft>
+            </a:pPr>
+            <a:r>
+              <a:rPr sz="1450" b="1">
+                <a:solidFill>
+                  <a:srgbClr val="E8EAED"/>
+                </a:solidFill>
+                <a:latin typeface="Microsoft YaHei"/>
+                <a:ea typeface="Microsoft YaHei"/>
+              </a:rPr>
+              <a:t>提示词可渲染、可审计</a:t>
+            </a:r>
+            <a:r>
+              <a:rPr sz="1300">
+                <a:solidFill>
+                  <a:srgbClr val="9AA1AB"/>
+                </a:solidFill>
+                <a:latin typeface="Microsoft YaHei"/>
+                <a:ea typeface="Microsoft YaHei"/>
+              </a:rPr>
+              <a:t> —— 技能支持安装 / 删除，prompt 一键复制</a:t>
+            </a:r>
+          </a:p>
+          <a:p>
+            <a:pPr algn="l">
+              <a:lnSpc>
+                <a:spcPct val="135000"/>
+              </a:lnSpc>
+              <a:spcAft>
+                <a:spcPts val="0"/>
+              </a:spcAft>
+            </a:pPr>
+            <a:r>
+              <a:rPr sz="1450" b="1">
+                <a:solidFill>
+                  <a:srgbClr val="E8EAED"/>
+                </a:solidFill>
+                <a:latin typeface="Microsoft YaHei"/>
+                <a:ea typeface="Microsoft YaHei"/>
+              </a:rPr>
+              <a:t>preflight 一键体检</a:t>
+            </a:r>
+            <a:r>
+              <a:rPr sz="1300">
+                <a:solidFill>
+                  <a:srgbClr val="9AA1AB"/>
+                </a:solidFill>
+                <a:latin typeface="Microsoft YaHei"/>
+                <a:ea typeface="Microsoft YaHei"/>
+              </a:rPr>
+              <a:t> —— LLM · 数据源 · 搜索 · 券商 · 积分</a:t>
+            </a:r>
+          </a:p>
+        </p:txBody>
+      </p:sp>
+      <p:sp>
+        <p:nvSpPr>
+          <p:cNvPr id="8" name="TextBox 8">
+            <a:extLst>
+              <a:ext uri="{FF2B5EF4-FFF2-40B4-BE49-F238E27FC236}">
+                <a16:creationId xmlns:a16="http://schemas.microsoft.com/office/drawing/2014/main" id="{5AF82D39-4D20-4F7B-BD93-E82F8925BE0F}"/>
+              </a:ext>
+            </a:extLst>
+          </p:cNvPr>
+          <p:cNvSpPr txBox="1"/>
+          <p:nvPr/>
+        </p:nvSpPr>
+        <p:spPr>
+          <a:xfrm>
+            <a:off x="685800" y="5772150"/>
+            <a:ext cx="10820400" cy="266700"/>
+          </a:xfrm>
+        </p:spPr>
+        <p:txBody>
+          <a:bodyPr wrap="square" rtlCol="0" lIns="0" tIns="0" rIns="0" bIns="0" anchor="t"/>
+          <a:lstStyle/>
+          <a:p>
+            <a:pPr algn="l">
+              <a:lnSpc>
+                <a:spcPct val="110000"/>
+              </a:lnSpc>
+            </a:pPr>
+            <a:r>
+              <a:rPr sz="1500">
+                <a:solidFill>
+                  <a:srgbClr val="9AA1AB"/>
+                </a:solidFill>
+                <a:latin typeface="Microsoft YaHei"/>
+                <a:ea typeface="Microsoft YaHei"/>
+              </a:rPr>
+              <a:t>对团队与企业客户：</a:t>
+            </a:r>
+            <a:r>
+              <a:rPr sz="1500" b="1">
                 <a:solidFill>
                   <a:srgbClr val="63E2B7"/>
                 </a:solidFill>
-                <a:latin typeface="Arial"/>
-                <a:ea typeface="Arial"/>
-              </a:rPr>
-              <a:t>2026-07</a:t>
-            </a:r>
-          </a:p>
-        </p:txBody>
-      </p:sp>
-      <p:sp>
-        <p:nvSpPr>
-          <p:cNvPr id="12" name="TextBox 12">
-            <a:extLst>
-              <a:ext uri="{FF2B5EF4-FFF2-40B4-BE49-F238E27FC236}">
-                <a16:creationId xmlns:a16="http://schemas.microsoft.com/office/drawing/2014/main" id="{6F16600F-1BA1-48D9-A12F-BB502683BF82}"/>
-              </a:ext>
-            </a:extLst>
-          </p:cNvPr>
-          <p:cNvSpPr txBox="1"/>
-          <p:nvPr/>
-        </p:nvSpPr>
-        <p:spPr>
-          <a:xfrm>
-            <a:off x="3209925" y="3257550"/>
-            <a:ext cx="1809750" cy="247650"/>
-          </a:xfrm>
-        </p:spPr>
-        <p:txBody>
-          <a:bodyPr wrap="square" rtlCol="0" lIns="0" tIns="0" rIns="0" bIns="0" anchor="t"/>
-          <a:lstStyle/>
-          <a:p>
-            <a:pPr algn="ctr">
-              <a:lnSpc>
-                <a:spcPct val="110000"/>
-              </a:lnSpc>
-            </a:pPr>
-            <a:r>
-              <a:rPr sz="1300" b="1">
-                <a:solidFill>
-                  <a:srgbClr val="63E2B7"/>
-                </a:solidFill>
-                <a:latin typeface="Arial"/>
-                <a:ea typeface="Arial"/>
-              </a:rPr>
-              <a:t>2026-09-20</a:t>
-            </a:r>
-          </a:p>
-        </p:txBody>
-      </p:sp>
-      <p:sp>
-        <p:nvSpPr>
-          <p:cNvPr id="13" name="TextBox 13">
-            <a:extLst>
-              <a:ext uri="{FF2B5EF4-FFF2-40B4-BE49-F238E27FC236}">
-                <a16:creationId xmlns:a16="http://schemas.microsoft.com/office/drawing/2014/main" id="{A42BCABE-1291-443C-8FB4-E10EFF8DD52F}"/>
-              </a:ext>
-            </a:extLst>
-          </p:cNvPr>
-          <p:cNvSpPr txBox="1"/>
-          <p:nvPr/>
-        </p:nvSpPr>
-        <p:spPr>
-          <a:xfrm>
-            <a:off x="5191125" y="3257550"/>
-            <a:ext cx="1809750" cy="247650"/>
-          </a:xfrm>
-        </p:spPr>
-        <p:txBody>
-          <a:bodyPr wrap="square" rtlCol="0" lIns="0" tIns="0" rIns="0" bIns="0" anchor="t"/>
-          <a:lstStyle/>
-          <a:p>
-            <a:pPr algn="ctr">
-              <a:lnSpc>
-                <a:spcPct val="110000"/>
-              </a:lnSpc>
-            </a:pPr>
-            <a:r>
-              <a:rPr sz="1300" b="1">
-                <a:solidFill>
-                  <a:srgbClr val="63E2B7"/>
-                </a:solidFill>
-                <a:latin typeface="Arial"/>
-                <a:ea typeface="Arial"/>
-              </a:rPr>
-              <a:t>2026-10-08</a:t>
-            </a:r>
-          </a:p>
-        </p:txBody>
-      </p:sp>
-      <p:sp>
-        <p:nvSpPr>
-          <p:cNvPr id="14" name="TextBox 14">
-            <a:extLst>
-              <a:ext uri="{FF2B5EF4-FFF2-40B4-BE49-F238E27FC236}">
-                <a16:creationId xmlns:a16="http://schemas.microsoft.com/office/drawing/2014/main" id="{C5DBEAF0-9DB3-48A5-89A7-8FED80206367}"/>
-              </a:ext>
-            </a:extLst>
-          </p:cNvPr>
-          <p:cNvSpPr txBox="1"/>
-          <p:nvPr/>
-        </p:nvSpPr>
-        <p:spPr>
-          <a:xfrm>
-            <a:off x="7172325" y="3257550"/>
-            <a:ext cx="1809750" cy="247650"/>
-          </a:xfrm>
-        </p:spPr>
-        <p:txBody>
-          <a:bodyPr wrap="square" rtlCol="0" lIns="0" tIns="0" rIns="0" bIns="0" anchor="t"/>
-          <a:lstStyle/>
-          <a:p>
-            <a:pPr algn="ctr">
-              <a:lnSpc>
-                <a:spcPct val="110000"/>
-              </a:lnSpc>
-            </a:pPr>
-            <a:r>
-              <a:rPr sz="1300" b="1">
-                <a:solidFill>
-                  <a:srgbClr val="63E2B7"/>
-                </a:solidFill>
-                <a:latin typeface="Arial"/>
-                <a:ea typeface="Arial"/>
-              </a:rPr>
-              <a:t>2026-10-10</a:t>
-            </a:r>
-          </a:p>
-        </p:txBody>
-      </p:sp>
-      <p:sp>
-        <p:nvSpPr>
-          <p:cNvPr id="15" name="TextBox 15">
-            <a:extLst>
-              <a:ext uri="{FF2B5EF4-FFF2-40B4-BE49-F238E27FC236}">
-                <a16:creationId xmlns:a16="http://schemas.microsoft.com/office/drawing/2014/main" id="{1FC41F89-8FCF-4CFE-9BF8-5D7DC1571E0D}"/>
-              </a:ext>
-            </a:extLst>
-          </p:cNvPr>
-          <p:cNvSpPr txBox="1"/>
-          <p:nvPr/>
-        </p:nvSpPr>
-        <p:spPr>
-          <a:xfrm>
-            <a:off x="9153525" y="3257550"/>
-            <a:ext cx="1809750" cy="247650"/>
-          </a:xfrm>
-        </p:spPr>
-        <p:txBody>
-          <a:bodyPr wrap="square" rtlCol="0" lIns="0" tIns="0" rIns="0" bIns="0" anchor="t"/>
-          <a:lstStyle/>
-          <a:p>
-            <a:pPr algn="ctr">
-              <a:lnSpc>
-                <a:spcPct val="110000"/>
-              </a:lnSpc>
-            </a:pPr>
-            <a:r>
-              <a:rPr sz="1300" b="1">
-                <a:solidFill>
-                  <a:srgbClr val="63E2B7"/>
-                </a:solidFill>
-                <a:latin typeface="Arial"/>
-                <a:ea typeface="Arial"/>
-              </a:rPr>
-              <a:t>2026-10-11</a:t>
-            </a:r>
-          </a:p>
-        </p:txBody>
-      </p:sp>
-      <p:sp>
-        <p:nvSpPr>
-          <p:cNvPr id="16" name="TextBox 16">
-            <a:extLst>
-              <a:ext uri="{FF2B5EF4-FFF2-40B4-BE49-F238E27FC236}">
-                <a16:creationId xmlns:a16="http://schemas.microsoft.com/office/drawing/2014/main" id="{4381DA84-FDD9-4DBF-8383-85B618359763}"/>
-              </a:ext>
-            </a:extLst>
-          </p:cNvPr>
-          <p:cNvSpPr txBox="1"/>
-          <p:nvPr/>
-        </p:nvSpPr>
-        <p:spPr>
-          <a:xfrm>
-            <a:off x="1228725" y="3848100"/>
-            <a:ext cx="1809750" cy="533400"/>
-          </a:xfrm>
-        </p:spPr>
-        <p:txBody>
-          <a:bodyPr wrap="square" rtlCol="0" lIns="0" tIns="0" rIns="0" bIns="0" anchor="t"/>
-          <a:lstStyle/>
-          <a:p>
-            <a:pPr algn="ctr">
-              <a:lnSpc>
-                <a:spcPct val="120000"/>
-              </a:lnSpc>
-            </a:pPr>
-            <a:r>
-              <a:rPr sz="1500" b="1">
-                <a:solidFill>
-                  <a:srgbClr val="E8EAED"/>
-                </a:solidFill>
-                <a:latin typeface="Microsoft YaHei"/>
-                <a:ea typeface="Microsoft YaHei"/>
-              </a:rPr>
-              <a:t>v5.5 分布式架构升级</a:t>
-            </a:r>
-          </a:p>
-        </p:txBody>
-      </p:sp>
-      <p:sp>
-        <p:nvSpPr>
-          <p:cNvPr id="17" name="TextBox 17">
-            <a:extLst>
-              <a:ext uri="{FF2B5EF4-FFF2-40B4-BE49-F238E27FC236}">
-                <a16:creationId xmlns:a16="http://schemas.microsoft.com/office/drawing/2014/main" id="{D009D793-45EA-4565-BDDE-7A1577FF6BD6}"/>
-              </a:ext>
-            </a:extLst>
-          </p:cNvPr>
-          <p:cNvSpPr txBox="1"/>
-          <p:nvPr/>
-        </p:nvSpPr>
-        <p:spPr>
-          <a:xfrm>
-            <a:off x="1228725" y="4457700"/>
-            <a:ext cx="1809750" cy="740664"/>
-          </a:xfrm>
-        </p:spPr>
-        <p:txBody>
-          <a:bodyPr wrap="square" rtlCol="0" lIns="0" tIns="0" rIns="0" bIns="0" anchor="t"/>
-          <a:lstStyle/>
-          <a:p>
-            <a:pPr algn="ctr">
-              <a:lnSpc>
-                <a:spcPct val="135000"/>
-              </a:lnSpc>
-            </a:pPr>
-            <a:r>
-              <a:rPr sz="1200">
-                <a:solidFill>
-                  <a:srgbClr val="9AA1AB"/>
-                </a:solidFill>
-                <a:latin typeface="Microsoft YaHei"/>
-                <a:ea typeface="Microsoft YaHei"/>
-              </a:rPr>
-              <a:t>Kafka 事件管线 · 策略运行时独立进程 · 原生交易所客户端</a:t>
-            </a:r>
-          </a:p>
-        </p:txBody>
-      </p:sp>
-      <p:sp>
-        <p:nvSpPr>
-          <p:cNvPr id="18" name="TextBox 18">
-            <a:extLst>
-              <a:ext uri="{FF2B5EF4-FFF2-40B4-BE49-F238E27FC236}">
-                <a16:creationId xmlns:a16="http://schemas.microsoft.com/office/drawing/2014/main" id="{701D5DAA-759B-4682-823E-31ADFCF0278C}"/>
-              </a:ext>
-            </a:extLst>
-          </p:cNvPr>
-          <p:cNvSpPr txBox="1"/>
-          <p:nvPr/>
-        </p:nvSpPr>
-        <p:spPr>
-          <a:xfrm>
-            <a:off x="3209925" y="3848100"/>
-            <a:ext cx="1809750" cy="533400"/>
-          </a:xfrm>
-        </p:spPr>
-        <p:txBody>
-          <a:bodyPr wrap="square" rtlCol="0" lIns="0" tIns="0" rIns="0" bIns="0" anchor="t"/>
-          <a:lstStyle/>
-          <a:p>
-            <a:pPr algn="ctr">
-              <a:lnSpc>
-                <a:spcPct val="120000"/>
-              </a:lnSpc>
-            </a:pPr>
-            <a:r>
-              <a:rPr sz="1500" b="1">
-                <a:solidFill>
-                  <a:srgbClr val="E8EAED"/>
-                </a:solidFill>
-                <a:latin typeface="Microsoft YaHei"/>
-                <a:ea typeface="Microsoft YaHei"/>
-              </a:rPr>
-              <a:t>AI 决策门 + 计费</a:t>
-            </a:r>
-          </a:p>
-        </p:txBody>
-      </p:sp>
-      <p:sp>
-        <p:nvSpPr>
-          <p:cNvPr id="19" name="TextBox 19">
-            <a:extLst>
-              <a:ext uri="{FF2B5EF4-FFF2-40B4-BE49-F238E27FC236}">
-                <a16:creationId xmlns:a16="http://schemas.microsoft.com/office/drawing/2014/main" id="{5E9D4A8A-001E-47F8-90D4-AD30374F7792}"/>
-              </a:ext>
-            </a:extLst>
-          </p:cNvPr>
-          <p:cNvSpPr txBox="1"/>
-          <p:nvPr/>
-        </p:nvSpPr>
-        <p:spPr>
-          <a:xfrm>
-            <a:off x="3209925" y="4457700"/>
-            <a:ext cx="1809750" cy="723900"/>
-          </a:xfrm>
-        </p:spPr>
-        <p:txBody>
-          <a:bodyPr wrap="square" rtlCol="0" lIns="0" tIns="0" rIns="0" bIns="0" anchor="t"/>
-          <a:lstStyle/>
-          <a:p>
-            <a:pPr algn="ctr">
-              <a:lnSpc>
-                <a:spcPct val="135000"/>
-              </a:lnSpc>
-            </a:pPr>
-            <a:r>
-              <a:rPr sz="1200">
-                <a:solidFill>
-                  <a:srgbClr val="9AA1AB"/>
-                </a:solidFill>
-                <a:latin typeface="Microsoft YaHei"/>
-                <a:ea typeface="Microsoft YaHei"/>
-              </a:rPr>
-              <a:t>策略进化（TPE / 网格 / 前向验证）与信号虚拟账户</a:t>
-            </a:r>
-          </a:p>
-        </p:txBody>
-      </p:sp>
-      <p:sp>
-        <p:nvSpPr>
-          <p:cNvPr id="20" name="TextBox 20">
-            <a:extLst>
-              <a:ext uri="{FF2B5EF4-FFF2-40B4-BE49-F238E27FC236}">
-                <a16:creationId xmlns:a16="http://schemas.microsoft.com/office/drawing/2014/main" id="{E8AA037A-8AE7-4DC3-87A2-2E1EB01214FE}"/>
-              </a:ext>
-            </a:extLst>
-          </p:cNvPr>
-          <p:cNvSpPr txBox="1"/>
-          <p:nvPr/>
-        </p:nvSpPr>
-        <p:spPr>
-          <a:xfrm>
-            <a:off x="5191125" y="3848100"/>
-            <a:ext cx="1809750" cy="533400"/>
-          </a:xfrm>
-        </p:spPr>
-        <p:txBody>
-          <a:bodyPr wrap="square" rtlCol="0" lIns="0" tIns="0" rIns="0" bIns="0" anchor="t"/>
-          <a:lstStyle/>
-          <a:p>
-            <a:pPr algn="ctr">
-              <a:lnSpc>
-                <a:spcPct val="120000"/>
-              </a:lnSpc>
-            </a:pPr>
-            <a:r>
-              <a:rPr sz="1500" b="1">
-                <a:solidFill>
-                  <a:srgbClr val="E8EAED"/>
-                </a:solidFill>
-                <a:latin typeface="Microsoft YaHei"/>
-                <a:ea typeface="Microsoft YaHei"/>
-              </a:rPr>
-              <a:t>自建前端落地</a:t>
-            </a:r>
-          </a:p>
-        </p:txBody>
-      </p:sp>
-      <p:sp>
-        <p:nvSpPr>
-          <p:cNvPr id="21" name="TextBox 21">
-            <a:extLst>
-              <a:ext uri="{FF2B5EF4-FFF2-40B4-BE49-F238E27FC236}">
-                <a16:creationId xmlns:a16="http://schemas.microsoft.com/office/drawing/2014/main" id="{9809309A-B767-48AC-8AF8-646107A16385}"/>
-              </a:ext>
-            </a:extLst>
-          </p:cNvPr>
-          <p:cNvSpPr txBox="1"/>
-          <p:nvPr/>
-        </p:nvSpPr>
-        <p:spPr>
-          <a:xfrm>
-            <a:off x="5191125" y="4457700"/>
-            <a:ext cx="1809750" cy="723900"/>
-          </a:xfrm>
-        </p:spPr>
-        <p:txBody>
-          <a:bodyPr wrap="square" rtlCol="0" lIns="0" tIns="0" rIns="0" bIns="0" anchor="t"/>
-          <a:lstStyle/>
-          <a:p>
-            <a:pPr algn="ctr">
-              <a:lnSpc>
-                <a:spcPct val="135000"/>
-              </a:lnSpc>
-            </a:pPr>
-            <a:r>
-              <a:rPr sz="1200">
-                <a:solidFill>
-                  <a:srgbClr val="9AA1AB"/>
-                </a:solidFill>
-                <a:latin typeface="Microsoft YaHei"/>
-                <a:ea typeface="Microsoft YaHei"/>
-              </a:rPr>
-              <a:t>P0–P2 单日上线并完成容器化生产构建</a:t>
-            </a:r>
-          </a:p>
-        </p:txBody>
-      </p:sp>
-      <p:sp>
-        <p:nvSpPr>
-          <p:cNvPr id="22" name="TextBox 22">
-            <a:extLst>
-              <a:ext uri="{FF2B5EF4-FFF2-40B4-BE49-F238E27FC236}">
-                <a16:creationId xmlns:a16="http://schemas.microsoft.com/office/drawing/2014/main" id="{FA9C5FDC-E072-4672-8D8A-87C011793732}"/>
-              </a:ext>
-            </a:extLst>
-          </p:cNvPr>
-          <p:cNvSpPr txBox="1"/>
-          <p:nvPr/>
-        </p:nvSpPr>
-        <p:spPr>
-          <a:xfrm>
-            <a:off x="7172325" y="3848100"/>
-            <a:ext cx="1809750" cy="533400"/>
-          </a:xfrm>
-        </p:spPr>
-        <p:txBody>
-          <a:bodyPr wrap="square" rtlCol="0" lIns="0" tIns="0" rIns="0" bIns="0" anchor="t"/>
-          <a:lstStyle/>
-          <a:p>
-            <a:pPr algn="ctr">
-              <a:lnSpc>
-                <a:spcPct val="120000"/>
-              </a:lnSpc>
-            </a:pPr>
-            <a:r>
-              <a:rPr sz="1500" b="1">
-                <a:solidFill>
-                  <a:srgbClr val="E8EAED"/>
-                </a:solidFill>
-                <a:latin typeface="Microsoft YaHei"/>
-                <a:ea typeface="Microsoft YaHei"/>
-              </a:rPr>
-              <a:t>更名 · 生产上线</a:t>
-            </a:r>
-          </a:p>
-        </p:txBody>
-      </p:sp>
-      <p:sp>
-        <p:nvSpPr>
-          <p:cNvPr id="23" name="TextBox 23">
-            <a:extLst>
-              <a:ext uri="{FF2B5EF4-FFF2-40B4-BE49-F238E27FC236}">
-                <a16:creationId xmlns:a16="http://schemas.microsoft.com/office/drawing/2014/main" id="{709B3277-4793-4DFC-9B27-777DA4B7D692}"/>
-              </a:ext>
-            </a:extLst>
-          </p:cNvPr>
-          <p:cNvSpPr txBox="1"/>
-          <p:nvPr/>
-        </p:nvSpPr>
-        <p:spPr>
-          <a:xfrm>
-            <a:off x="7172325" y="4457700"/>
-            <a:ext cx="1809750" cy="723900"/>
-          </a:xfrm>
-        </p:spPr>
-        <p:txBody>
-          <a:bodyPr wrap="square" rtlCol="0" lIns="0" tIns="0" rIns="0" bIns="0" anchor="t"/>
-          <a:lstStyle/>
-          <a:p>
-            <a:pPr algn="ctr">
-              <a:lnSpc>
-                <a:spcPct val="135000"/>
-              </a:lnSpc>
-            </a:pPr>
-            <a:r>
-              <a:rPr sz="1200">
-                <a:solidFill>
-                  <a:srgbClr val="9AA1AB"/>
-                </a:solidFill>
-                <a:latin typeface="Microsoft YaHei"/>
-                <a:ea typeface="Microsoft YaHei"/>
-              </a:rPr>
-              <a:t>i18n 全量 · 预测市场 · 钱包 · shark.aiorz.cc 上线</a:t>
-            </a:r>
-          </a:p>
-        </p:txBody>
-      </p:sp>
-      <p:sp>
-        <p:nvSpPr>
-          <p:cNvPr id="24" name="TextBox 24">
-            <a:extLst>
-              <a:ext uri="{FF2B5EF4-FFF2-40B4-BE49-F238E27FC236}">
-                <a16:creationId xmlns:a16="http://schemas.microsoft.com/office/drawing/2014/main" id="{D4E4BFA2-F2DD-42A5-AAB6-C62AB4DBEDA6}"/>
-              </a:ext>
-            </a:extLst>
-          </p:cNvPr>
-          <p:cNvSpPr txBox="1"/>
-          <p:nvPr/>
-        </p:nvSpPr>
-        <p:spPr>
-          <a:xfrm>
-            <a:off x="9153525" y="3848100"/>
-            <a:ext cx="1809750" cy="533400"/>
-          </a:xfrm>
-        </p:spPr>
-        <p:txBody>
-          <a:bodyPr wrap="square" rtlCol="0" lIns="0" tIns="0" rIns="0" bIns="0" anchor="t"/>
-          <a:lstStyle/>
-          <a:p>
-            <a:pPr algn="ctr">
-              <a:lnSpc>
-                <a:spcPct val="120000"/>
-              </a:lnSpc>
-            </a:pPr>
-            <a:r>
-              <a:rPr sz="1500" b="1">
-                <a:solidFill>
-                  <a:srgbClr val="E8EAED"/>
-                </a:solidFill>
-                <a:latin typeface="Microsoft YaHei"/>
-                <a:ea typeface="Microsoft YaHei"/>
-              </a:rPr>
-              <a:t>双语 QA + 安全审计</a:t>
-            </a:r>
-          </a:p>
-        </p:txBody>
-      </p:sp>
-      <p:sp>
-        <p:nvSpPr>
-          <p:cNvPr id="25" name="TextBox 25">
-            <a:extLst>
-              <a:ext uri="{FF2B5EF4-FFF2-40B4-BE49-F238E27FC236}">
-                <a16:creationId xmlns:a16="http://schemas.microsoft.com/office/drawing/2014/main" id="{488A1D71-002D-4516-870A-587EC6BD95DC}"/>
-              </a:ext>
-            </a:extLst>
-          </p:cNvPr>
-          <p:cNvSpPr txBox="1"/>
-          <p:nvPr/>
-        </p:nvSpPr>
-        <p:spPr>
-          <a:xfrm>
-            <a:off x="9153525" y="4457700"/>
-            <a:ext cx="1809750" cy="723900"/>
-          </a:xfrm>
-        </p:spPr>
-        <p:txBody>
-          <a:bodyPr wrap="square" rtlCol="0" lIns="0" tIns="0" rIns="0" bIns="0" anchor="t"/>
-          <a:lstStyle/>
-          <a:p>
-            <a:pPr algn="ctr">
-              <a:lnSpc>
-                <a:spcPct val="135000"/>
-              </a:lnSpc>
-            </a:pPr>
-            <a:r>
-              <a:rPr sz="1200">
-                <a:solidFill>
-                  <a:srgbClr val="9AA1AB"/>
-                </a:solidFill>
-                <a:latin typeface="Microsoft YaHei"/>
-                <a:ea typeface="Microsoft YaHei"/>
-              </a:rPr>
-              <a:t>48 路由双语回归 · 依赖 0 已知漏洞</a:t>
-            </a:r>
-          </a:p>
-        </p:txBody>
-      </p:sp>
-      <p:sp>
-        <p:nvSpPr>
-          <p:cNvPr id="26" name="TextBox 26">
-            <a:extLst>
-              <a:ext uri="{FF2B5EF4-FFF2-40B4-BE49-F238E27FC236}">
-                <a16:creationId xmlns:a16="http://schemas.microsoft.com/office/drawing/2014/main" id="{0155DAD5-2C5C-4E55-8CAE-B21E30B254F0}"/>
-              </a:ext>
-            </a:extLst>
-          </p:cNvPr>
-          <p:cNvSpPr txBox="1"/>
-          <p:nvPr/>
-        </p:nvSpPr>
-        <p:spPr>
-          <a:xfrm>
-            <a:off x="685800" y="5676900"/>
-            <a:ext cx="10820400" cy="266700"/>
-          </a:xfrm>
-        </p:spPr>
-        <p:txBody>
-          <a:bodyPr wrap="square" rtlCol="0" lIns="0" tIns="0" rIns="0" bIns="0" anchor="t"/>
-          <a:lstStyle/>
-          <a:p>
-            <a:pPr algn="l">
-              <a:lnSpc>
-                <a:spcPct val="110000"/>
-              </a:lnSpc>
-            </a:pPr>
-            <a:r>
-              <a:rPr sz="1500">
-                <a:solidFill>
-                  <a:srgbClr val="9AA1AB"/>
-                </a:solidFill>
-                <a:latin typeface="Microsoft YaHei"/>
-                <a:ea typeface="Microsoft YaHei"/>
-              </a:rPr>
-              <a:t>下一步：</a:t>
-            </a:r>
-            <a:r>
-              <a:rPr sz="1500" b="1">
-                <a:solidFill>
-                  <a:srgbClr val="63E2B7"/>
-                </a:solidFill>
-                <a:latin typeface="Microsoft YaHei"/>
-                <a:ea typeface="Microsoft YaHei"/>
-              </a:rPr>
-              <a:t>支付通道开通 · 指标市场结算 · V6 横向扩展</a:t>
+                <a:latin typeface="Microsoft YaHei"/>
+                <a:ea typeface="Microsoft YaHei"/>
+              </a:rPr>
+              <a:t>AI 能力是可见、可控、可审计的资产——不是黑盒</a:t>
             </a:r>
           </a:p>
         </p:txBody>
@@ -3176,1306 +3533,6 @@
 </file>
 
 <file path=ppt/slides/slide15.xml><?xml version="1.0" encoding="utf-8"?>
-<p:sld xmlns:a="http://schemas.openxmlformats.org/drawingml/2006/main" xmlns:r="http://schemas.openxmlformats.org/officeDocument/2006/relationships" xmlns:p="http://schemas.openxmlformats.org/presentationml/2006/main">
-  <p:cSld>
-    <p:bg>
-      <p:bgPr>
-        <a:solidFill>
-          <a:srgbClr val="0B0E13"/>
-        </a:solidFill>
-        <a:effectLst/>
-      </p:bgPr>
-    </p:bg>
-    <p:spTree>
-      <p:nvGrpSpPr>
-        <p:cNvPr id="1" name=""/>
-        <p:cNvGrpSpPr/>
-        <p:nvPr/>
-      </p:nvGrpSpPr>
-      <p:grpSpPr>
-        <a:xfrm>
-          <a:off x="0" y="0"/>
-          <a:ext cx="0" cy="0"/>
-          <a:chOff x="0" y="0"/>
-          <a:chExt cx="0" cy="0"/>
-        </a:xfrm>
-      </p:grpSpPr>
-      <p:sp>
-        <p:nvSpPr>
-          <p:cNvPr id="3" name="TextBox 3">
-            <a:extLst>
-              <a:ext uri="{FF2B5EF4-FFF2-40B4-BE49-F238E27FC236}">
-                <a16:creationId xmlns:a16="http://schemas.microsoft.com/office/drawing/2014/main" id="{7FBC399C-88F4-4F87-B58F-52FD00C30257}"/>
-              </a:ext>
-            </a:extLst>
-          </p:cNvPr>
-          <p:cNvSpPr txBox="1"/>
-          <p:nvPr/>
-        </p:nvSpPr>
-        <p:spPr>
-          <a:xfrm>
-            <a:off x="685800" y="457200"/>
-            <a:ext cx="10820400" cy="603504"/>
-          </a:xfrm>
-        </p:spPr>
-        <p:txBody>
-          <a:bodyPr wrap="square" rtlCol="0" lIns="0" tIns="0" rIns="0" bIns="0" anchor="t"/>
-          <a:lstStyle/>
-          <a:p>
-            <a:pPr algn="l">
-              <a:lnSpc>
-                <a:spcPct val="110000"/>
-              </a:lnSpc>
-            </a:pPr>
-            <a:r>
-              <a:rPr sz="3600" b="1">
-                <a:solidFill>
-                  <a:srgbClr val="E8EAED"/>
-                </a:solidFill>
-                <a:latin typeface="Microsoft YaHei"/>
-                <a:ea typeface="Microsoft YaHei"/>
-              </a:rPr>
-              <a:t>团队与融资</a:t>
-            </a:r>
-          </a:p>
-        </p:txBody>
-      </p:sp>
-      <p:sp>
-        <p:nvSpPr>
-          <p:cNvPr id="4" name="Shape 4">
-            <a:extLst>
-              <a:ext uri="{FF2B5EF4-FFF2-40B4-BE49-F238E27FC236}">
-                <a16:creationId xmlns:a16="http://schemas.microsoft.com/office/drawing/2014/main" id="{92325CC4-21EE-4A1E-A4F3-C97C9A00A79B}"/>
-              </a:ext>
-            </a:extLst>
-          </p:cNvPr>
-          <p:cNvSpPr/>
-          <p:nvPr/>
-        </p:nvSpPr>
-        <p:spPr>
-          <a:xfrm>
-            <a:off x="685800" y="1428750"/>
-            <a:ext cx="5219700" cy="4095750"/>
-          </a:xfrm>
-          <a:prstGeom prst="roundRect">
-            <a:avLst/>
-          </a:prstGeom>
-          <a:solidFill>
-            <a:srgbClr val="14181F"/>
-          </a:solidFill>
-          <a:ln w="12700">
-            <a:solidFill>
-              <a:srgbClr val="232A33"/>
-            </a:solidFill>
-          </a:ln>
-        </p:spPr>
-        <p:txBody>
-          <a:bodyPr wrap="square" rtlCol="0"/>
-          <a:lstStyle/>
-          <a:p>
-            <a:r>
-              <a:rPr/>
-              <a:t/>
-            </a:r>
-          </a:p>
-        </p:txBody>
-      </p:sp>
-      <p:sp>
-        <p:nvSpPr>
-          <p:cNvPr id="5" name="Shape 5">
-            <a:extLst>
-              <a:ext uri="{FF2B5EF4-FFF2-40B4-BE49-F238E27FC236}">
-                <a16:creationId xmlns:a16="http://schemas.microsoft.com/office/drawing/2014/main" id="{D6B2BD3A-CA3A-4532-AF66-7105678C1165}"/>
-              </a:ext>
-            </a:extLst>
-          </p:cNvPr>
-          <p:cNvSpPr/>
-          <p:nvPr/>
-        </p:nvSpPr>
-        <p:spPr>
-          <a:xfrm>
-            <a:off x="6286500" y="1428750"/>
-            <a:ext cx="5219700" cy="4095750"/>
-          </a:xfrm>
-          <a:prstGeom prst="roundRect">
-            <a:avLst/>
-          </a:prstGeom>
-          <a:solidFill>
-            <a:srgbClr val="14181F"/>
-          </a:solidFill>
-          <a:ln w="12700">
-            <a:solidFill>
-              <a:srgbClr val="232A33"/>
-            </a:solidFill>
-          </a:ln>
-        </p:spPr>
-        <p:txBody>
-          <a:bodyPr wrap="square" rtlCol="0"/>
-          <a:lstStyle/>
-          <a:p>
-            <a:r>
-              <a:rPr/>
-              <a:t/>
-            </a:r>
-          </a:p>
-        </p:txBody>
-      </p:sp>
-      <p:sp>
-        <p:nvSpPr>
-          <p:cNvPr id="6" name="TextBox 6">
-            <a:extLst>
-              <a:ext uri="{FF2B5EF4-FFF2-40B4-BE49-F238E27FC236}">
-                <a16:creationId xmlns:a16="http://schemas.microsoft.com/office/drawing/2014/main" id="{5308EF19-79C1-46B3-99C6-ACF8573DE1DA}"/>
-              </a:ext>
-            </a:extLst>
-          </p:cNvPr>
-          <p:cNvSpPr txBox="1"/>
-          <p:nvPr/>
-        </p:nvSpPr>
-        <p:spPr>
-          <a:xfrm>
-            <a:off x="990600" y="1695450"/>
-            <a:ext cx="4572000" cy="342900"/>
-          </a:xfrm>
-        </p:spPr>
-        <p:txBody>
-          <a:bodyPr wrap="square" rtlCol="0" lIns="0" tIns="0" rIns="0" bIns="0" anchor="t"/>
-          <a:lstStyle/>
-          <a:p>
-            <a:pPr algn="l">
-              <a:lnSpc>
-                <a:spcPct val="110000"/>
-              </a:lnSpc>
-            </a:pPr>
-            <a:r>
-              <a:rPr sz="2000" b="1">
-                <a:solidFill>
-                  <a:srgbClr val="8FB8FF"/>
-                </a:solidFill>
-                <a:latin typeface="Microsoft YaHei"/>
-                <a:ea typeface="Microsoft YaHei"/>
-              </a:rPr>
-              <a:t>团队</a:t>
-            </a:r>
-          </a:p>
-        </p:txBody>
-      </p:sp>
-      <p:sp>
-        <p:nvSpPr>
-          <p:cNvPr id="7" name="TextBox 7">
-            <a:extLst>
-              <a:ext uri="{FF2B5EF4-FFF2-40B4-BE49-F238E27FC236}">
-                <a16:creationId xmlns:a16="http://schemas.microsoft.com/office/drawing/2014/main" id="{0542C297-4502-468F-8489-AABF288291FB}"/>
-              </a:ext>
-            </a:extLst>
-          </p:cNvPr>
-          <p:cNvSpPr txBox="1"/>
-          <p:nvPr/>
-        </p:nvSpPr>
-        <p:spPr>
-          <a:xfrm>
-            <a:off x="990600" y="2228850"/>
-            <a:ext cx="4610100" cy="2476500"/>
-          </a:xfrm>
-        </p:spPr>
-        <p:txBody>
-          <a:bodyPr wrap="square" rtlCol="0" lIns="0" tIns="0" rIns="0" bIns="0" anchor="t"/>
-          <a:lstStyle/>
-          <a:p>
-            <a:pPr algn="l">
-              <a:lnSpc>
-                <a:spcPct val="130000"/>
-              </a:lnSpc>
-              <a:spcAft>
-                <a:spcPts val="2400"/>
-              </a:spcAft>
-            </a:pPr>
-            <a:r>
-              <a:rPr sz="1400" b="1">
-                <a:solidFill>
-                  <a:srgbClr val="E8EAED"/>
-                </a:solidFill>
-                <a:latin typeface="Microsoft YaHei"/>
-                <a:ea typeface="Microsoft YaHei"/>
-              </a:rPr>
-              <a:t>创始人 / CEO：</a:t>
-            </a:r>
-            <a:r>
-              <a:rPr sz="1300" i="1">
-                <a:solidFill>
-                  <a:srgbClr val="8FB8FF"/>
-                </a:solidFill>
-                <a:latin typeface="Microsoft YaHei"/>
-                <a:ea typeface="Microsoft YaHei"/>
-              </a:rPr>
-              <a:t>【待填：姓名 · 一句话背景】</a:t>
-            </a:r>
-          </a:p>
-          <a:p>
-            <a:pPr algn="l">
-              <a:lnSpc>
-                <a:spcPct val="130000"/>
-              </a:lnSpc>
-              <a:spcAft>
-                <a:spcPts val="2400"/>
-              </a:spcAft>
-            </a:pPr>
-            <a:r>
-              <a:rPr sz="1400" b="1">
-                <a:solidFill>
-                  <a:srgbClr val="E8EAED"/>
-                </a:solidFill>
-                <a:latin typeface="Microsoft YaHei"/>
-                <a:ea typeface="Microsoft YaHei"/>
-              </a:rPr>
-              <a:t>CTO / 技术负责人：</a:t>
-            </a:r>
-            <a:r>
-              <a:rPr sz="1300" i="1">
-                <a:solidFill>
-                  <a:srgbClr val="8FB8FF"/>
-                </a:solidFill>
-                <a:latin typeface="Microsoft YaHei"/>
-                <a:ea typeface="Microsoft YaHei"/>
-              </a:rPr>
-              <a:t>【待填】</a:t>
-            </a:r>
-          </a:p>
-          <a:p>
-            <a:pPr algn="l">
-              <a:lnSpc>
-                <a:spcPct val="130000"/>
-              </a:lnSpc>
-              <a:spcAft>
-                <a:spcPts val="2400"/>
-              </a:spcAft>
-            </a:pPr>
-            <a:r>
-              <a:rPr sz="1400" b="1">
-                <a:solidFill>
-                  <a:srgbClr val="E8EAED"/>
-                </a:solidFill>
-                <a:latin typeface="Microsoft YaHei"/>
-                <a:ea typeface="Microsoft YaHei"/>
-              </a:rPr>
-              <a:t>核心成员：</a:t>
-            </a:r>
-            <a:r>
-              <a:rPr sz="1300" i="1">
-                <a:solidFill>
-                  <a:srgbClr val="8FB8FF"/>
-                </a:solidFill>
-                <a:latin typeface="Microsoft YaHei"/>
-                <a:ea typeface="Microsoft YaHei"/>
-              </a:rPr>
-              <a:t>【待填：产品 / 量化研究 / 增长】</a:t>
-            </a:r>
-          </a:p>
-          <a:p>
-            <a:pPr algn="l">
-              <a:lnSpc>
-                <a:spcPct val="130000"/>
-              </a:lnSpc>
-              <a:spcAft>
-                <a:spcPts val="0"/>
-              </a:spcAft>
-            </a:pPr>
-            <a:r>
-              <a:rPr sz="1400" b="1">
-                <a:solidFill>
-                  <a:srgbClr val="E8EAED"/>
-                </a:solidFill>
-                <a:latin typeface="Microsoft YaHei"/>
-                <a:ea typeface="Microsoft YaHei"/>
-              </a:rPr>
-              <a:t>顾问（如有）：</a:t>
-            </a:r>
-            <a:r>
-              <a:rPr sz="1300" i="1">
-                <a:solidFill>
-                  <a:srgbClr val="8FB8FF"/>
-                </a:solidFill>
-                <a:latin typeface="Microsoft YaHei"/>
-                <a:ea typeface="Microsoft YaHei"/>
-              </a:rPr>
-              <a:t>【待填】</a:t>
-            </a:r>
-          </a:p>
-        </p:txBody>
-      </p:sp>
-      <p:sp>
-        <p:nvSpPr>
-          <p:cNvPr id="8" name="TextBox 8">
-            <a:extLst>
-              <a:ext uri="{FF2B5EF4-FFF2-40B4-BE49-F238E27FC236}">
-                <a16:creationId xmlns:a16="http://schemas.microsoft.com/office/drawing/2014/main" id="{9D38E39E-7E16-42B3-92FA-E7DD80100419}"/>
-              </a:ext>
-            </a:extLst>
-          </p:cNvPr>
-          <p:cNvSpPr txBox="1"/>
-          <p:nvPr/>
-        </p:nvSpPr>
-        <p:spPr>
-          <a:xfrm>
-            <a:off x="990600" y="4933950"/>
-            <a:ext cx="4610100" cy="495300"/>
-          </a:xfrm>
-        </p:spPr>
-        <p:txBody>
-          <a:bodyPr wrap="square" rtlCol="0" lIns="0" tIns="0" rIns="0" bIns="0" anchor="t"/>
-          <a:lstStyle/>
-          <a:p>
-            <a:pPr algn="l">
-              <a:lnSpc>
-                <a:spcPct val="130000"/>
-              </a:lnSpc>
-            </a:pPr>
-            <a:r>
-              <a:rPr sz="1250">
-                <a:solidFill>
-                  <a:srgbClr val="6B7280"/>
-                </a:solidFill>
-                <a:latin typeface="Microsoft YaHei"/>
-                <a:ea typeface="Microsoft YaHei"/>
-              </a:rPr>
-              <a:t>关键词：全栈 AI + 金融工程复合背景；3 个月完成引擎升级 + 前端重写 + 国际化 + 安全加固</a:t>
-            </a:r>
-          </a:p>
-        </p:txBody>
-      </p:sp>
-      <p:sp>
-        <p:nvSpPr>
-          <p:cNvPr id="9" name="TextBox 9">
-            <a:extLst>
-              <a:ext uri="{FF2B5EF4-FFF2-40B4-BE49-F238E27FC236}">
-                <a16:creationId xmlns:a16="http://schemas.microsoft.com/office/drawing/2014/main" id="{42175FDD-E55D-481E-A078-AE184E52CED2}"/>
-              </a:ext>
-            </a:extLst>
-          </p:cNvPr>
-          <p:cNvSpPr txBox="1"/>
-          <p:nvPr/>
-        </p:nvSpPr>
-        <p:spPr>
-          <a:xfrm>
-            <a:off x="6591300" y="1695450"/>
-            <a:ext cx="4572000" cy="342900"/>
-          </a:xfrm>
-        </p:spPr>
-        <p:txBody>
-          <a:bodyPr wrap="square" rtlCol="0" lIns="0" tIns="0" rIns="0" bIns="0" anchor="t"/>
-          <a:lstStyle/>
-          <a:p>
-            <a:pPr algn="l">
-              <a:lnSpc>
-                <a:spcPct val="110000"/>
-              </a:lnSpc>
-            </a:pPr>
-            <a:r>
-              <a:rPr sz="2000" b="1">
-                <a:solidFill>
-                  <a:srgbClr val="63E2B7"/>
-                </a:solidFill>
-                <a:latin typeface="Microsoft YaHei"/>
-                <a:ea typeface="Microsoft YaHei"/>
-              </a:rPr>
-              <a:t>融资需求</a:t>
-            </a:r>
-          </a:p>
-        </p:txBody>
-      </p:sp>
-      <p:sp>
-        <p:nvSpPr>
-          <p:cNvPr id="10" name="TextBox 10">
-            <a:extLst>
-              <a:ext uri="{FF2B5EF4-FFF2-40B4-BE49-F238E27FC236}">
-                <a16:creationId xmlns:a16="http://schemas.microsoft.com/office/drawing/2014/main" id="{669B9DA3-0059-4A57-9F29-46A035486A3A}"/>
-              </a:ext>
-            </a:extLst>
-          </p:cNvPr>
-          <p:cNvSpPr txBox="1"/>
-          <p:nvPr/>
-        </p:nvSpPr>
-        <p:spPr>
-          <a:xfrm>
-            <a:off x="6591300" y="2228850"/>
-            <a:ext cx="4610100" cy="285750"/>
-          </a:xfrm>
-        </p:spPr>
-        <p:txBody>
-          <a:bodyPr wrap="square" rtlCol="0" lIns="0" tIns="0" rIns="0" bIns="0" anchor="t"/>
-          <a:lstStyle/>
-          <a:p>
-            <a:pPr algn="l">
-              <a:lnSpc>
-                <a:spcPct val="130000"/>
-              </a:lnSpc>
-            </a:pPr>
-            <a:r>
-              <a:rPr sz="1400" b="1">
-                <a:solidFill>
-                  <a:srgbClr val="E8EAED"/>
-                </a:solidFill>
-                <a:latin typeface="Microsoft YaHei"/>
-                <a:ea typeface="Microsoft YaHei"/>
-              </a:rPr>
-              <a:t>轮次 / 金额 / 估值：</a:t>
-            </a:r>
-            <a:r>
-              <a:rPr sz="1300" i="1">
-                <a:solidFill>
-                  <a:srgbClr val="8FB8FF"/>
-                </a:solidFill>
-                <a:latin typeface="Microsoft YaHei"/>
-                <a:ea typeface="Microsoft YaHei"/>
-              </a:rPr>
-              <a:t>【待填】</a:t>
-            </a:r>
-          </a:p>
-        </p:txBody>
-      </p:sp>
-      <p:sp>
-        <p:nvSpPr>
-          <p:cNvPr id="11" name="TextBox 11">
-            <a:extLst>
-              <a:ext uri="{FF2B5EF4-FFF2-40B4-BE49-F238E27FC236}">
-                <a16:creationId xmlns:a16="http://schemas.microsoft.com/office/drawing/2014/main" id="{A9507C52-CBB8-4009-A52A-540B3302679D}"/>
-              </a:ext>
-            </a:extLst>
-          </p:cNvPr>
-          <p:cNvSpPr txBox="1"/>
-          <p:nvPr/>
-        </p:nvSpPr>
-        <p:spPr>
-          <a:xfrm>
-            <a:off x="6591300" y="2724150"/>
-            <a:ext cx="4610100" cy="285750"/>
-          </a:xfrm>
-        </p:spPr>
-        <p:txBody>
-          <a:bodyPr wrap="square" rtlCol="0" lIns="0" tIns="0" rIns="0" bIns="0" anchor="t"/>
-          <a:lstStyle/>
-          <a:p>
-            <a:pPr algn="l">
-              <a:lnSpc>
-                <a:spcPct val="130000"/>
-              </a:lnSpc>
-            </a:pPr>
-            <a:r>
-              <a:rPr sz="1400" b="1">
-                <a:solidFill>
-                  <a:srgbClr val="E8EAED"/>
-                </a:solidFill>
-                <a:latin typeface="Microsoft YaHei"/>
-                <a:ea typeface="Microsoft YaHei"/>
-              </a:rPr>
-              <a:t>资金用途（建议比例）：</a:t>
-            </a:r>
-          </a:p>
-        </p:txBody>
-      </p:sp>
-      <p:sp>
-        <p:nvSpPr>
-          <p:cNvPr id="12" name="TextBox 12">
-            <a:extLst>
-              <a:ext uri="{FF2B5EF4-FFF2-40B4-BE49-F238E27FC236}">
-                <a16:creationId xmlns:a16="http://schemas.microsoft.com/office/drawing/2014/main" id="{B3CD7F50-E9C8-4274-91C8-9B1BB9DB0CB1}"/>
-              </a:ext>
-            </a:extLst>
-          </p:cNvPr>
-          <p:cNvSpPr txBox="1"/>
-          <p:nvPr/>
-        </p:nvSpPr>
-        <p:spPr>
-          <a:xfrm>
-            <a:off x="6591300" y="3067050"/>
-            <a:ext cx="2857500" cy="209550"/>
-          </a:xfrm>
-        </p:spPr>
-        <p:txBody>
-          <a:bodyPr wrap="square" rtlCol="0" lIns="0" tIns="0" rIns="0" bIns="0" anchor="t"/>
-          <a:lstStyle/>
-          <a:p>
-            <a:pPr algn="l">
-              <a:lnSpc>
-                <a:spcPct val="110000"/>
-              </a:lnSpc>
-            </a:pPr>
-            <a:r>
-              <a:rPr sz="1150">
-                <a:solidFill>
-                  <a:srgbClr val="9AA1AB"/>
-                </a:solidFill>
-                <a:latin typeface="Microsoft YaHei"/>
-                <a:ea typeface="Microsoft YaHei"/>
-              </a:rPr>
-              <a:t>研发（AI 能力 + 架构扩展） 45%</a:t>
-            </a:r>
-          </a:p>
-        </p:txBody>
-      </p:sp>
-      <p:sp>
-        <p:nvSpPr>
-          <p:cNvPr id="13" name="Shape 13">
-            <a:extLst>
-              <a:ext uri="{FF2B5EF4-FFF2-40B4-BE49-F238E27FC236}">
-                <a16:creationId xmlns:a16="http://schemas.microsoft.com/office/drawing/2014/main" id="{2A335F30-77F3-4E2A-B5AF-C7771A6429D4}"/>
-              </a:ext>
-            </a:extLst>
-          </p:cNvPr>
-          <p:cNvSpPr/>
-          <p:nvPr/>
-        </p:nvSpPr>
-        <p:spPr>
-          <a:xfrm>
-            <a:off x="6591300" y="3276600"/>
-            <a:ext cx="2076450" cy="133350"/>
-          </a:xfrm>
-          <a:prstGeom prst="rect">
-            <a:avLst/>
-          </a:prstGeom>
-          <a:solidFill>
-            <a:srgbClr val="63E2B7"/>
-          </a:solidFill>
-        </p:spPr>
-        <p:txBody>
-          <a:bodyPr wrap="square" rtlCol="0"/>
-          <a:lstStyle/>
-          <a:p>
-            <a:r>
-              <a:rPr/>
-              <a:t/>
-            </a:r>
-          </a:p>
-        </p:txBody>
-      </p:sp>
-      <p:sp>
-        <p:nvSpPr>
-          <p:cNvPr id="14" name="TextBox 14">
-            <a:extLst>
-              <a:ext uri="{FF2B5EF4-FFF2-40B4-BE49-F238E27FC236}">
-                <a16:creationId xmlns:a16="http://schemas.microsoft.com/office/drawing/2014/main" id="{EE0CD83E-5254-4A50-8756-9B6F50F09037}"/>
-              </a:ext>
-            </a:extLst>
-          </p:cNvPr>
-          <p:cNvSpPr txBox="1"/>
-          <p:nvPr/>
-        </p:nvSpPr>
-        <p:spPr>
-          <a:xfrm>
-            <a:off x="6591300" y="3505200"/>
-            <a:ext cx="2857500" cy="209550"/>
-          </a:xfrm>
-        </p:spPr>
-        <p:txBody>
-          <a:bodyPr wrap="square" rtlCol="0" lIns="0" tIns="0" rIns="0" bIns="0" anchor="t"/>
-          <a:lstStyle/>
-          <a:p>
-            <a:pPr algn="l">
-              <a:lnSpc>
-                <a:spcPct val="110000"/>
-              </a:lnSpc>
-            </a:pPr>
-            <a:r>
-              <a:rPr sz="1150">
-                <a:solidFill>
-                  <a:srgbClr val="9AA1AB"/>
-                </a:solidFill>
-                <a:latin typeface="Microsoft YaHei"/>
-                <a:ea typeface="Microsoft YaHei"/>
-              </a:rPr>
-              <a:t>增长（内容 / 社区 / 获客） 30%</a:t>
-            </a:r>
-          </a:p>
-        </p:txBody>
-      </p:sp>
-      <p:sp>
-        <p:nvSpPr>
-          <p:cNvPr id="15" name="Shape 15">
-            <a:extLst>
-              <a:ext uri="{FF2B5EF4-FFF2-40B4-BE49-F238E27FC236}">
-                <a16:creationId xmlns:a16="http://schemas.microsoft.com/office/drawing/2014/main" id="{21516383-8DC5-4DB3-988B-2A5A2C70BC80}"/>
-              </a:ext>
-            </a:extLst>
-          </p:cNvPr>
-          <p:cNvSpPr/>
-          <p:nvPr/>
-        </p:nvSpPr>
-        <p:spPr>
-          <a:xfrm>
-            <a:off x="6591300" y="3714750"/>
-            <a:ext cx="1381125" cy="133350"/>
-          </a:xfrm>
-          <a:prstGeom prst="rect">
-            <a:avLst/>
-          </a:prstGeom>
-          <a:solidFill>
-            <a:srgbClr val="63E2B7"/>
-          </a:solidFill>
-        </p:spPr>
-        <p:txBody>
-          <a:bodyPr wrap="square" rtlCol="0"/>
-          <a:lstStyle/>
-          <a:p>
-            <a:r>
-              <a:rPr/>
-              <a:t/>
-            </a:r>
-          </a:p>
-        </p:txBody>
-      </p:sp>
-      <p:sp>
-        <p:nvSpPr>
-          <p:cNvPr id="16" name="TextBox 16">
-            <a:extLst>
-              <a:ext uri="{FF2B5EF4-FFF2-40B4-BE49-F238E27FC236}">
-                <a16:creationId xmlns:a16="http://schemas.microsoft.com/office/drawing/2014/main" id="{C3E66CBD-18D3-4F8C-81CC-79BB8A4EB42D}"/>
-              </a:ext>
-            </a:extLst>
-          </p:cNvPr>
-          <p:cNvSpPr txBox="1"/>
-          <p:nvPr/>
-        </p:nvSpPr>
-        <p:spPr>
-          <a:xfrm>
-            <a:off x="6591300" y="3943350"/>
-            <a:ext cx="2857500" cy="209550"/>
-          </a:xfrm>
-        </p:spPr>
-        <p:txBody>
-          <a:bodyPr wrap="square" rtlCol="0" lIns="0" tIns="0" rIns="0" bIns="0" anchor="t"/>
-          <a:lstStyle/>
-          <a:p>
-            <a:pPr algn="l">
-              <a:lnSpc>
-                <a:spcPct val="110000"/>
-              </a:lnSpc>
-            </a:pPr>
-            <a:r>
-              <a:rPr sz="1150">
-                <a:solidFill>
-                  <a:srgbClr val="9AA1AB"/>
-                </a:solidFill>
-                <a:latin typeface="Microsoft YaHei"/>
-                <a:ea typeface="Microsoft YaHei"/>
-              </a:rPr>
-              <a:t>安全与合规 15%</a:t>
-            </a:r>
-          </a:p>
-        </p:txBody>
-      </p:sp>
-      <p:sp>
-        <p:nvSpPr>
-          <p:cNvPr id="17" name="Shape 17">
-            <a:extLst>
-              <a:ext uri="{FF2B5EF4-FFF2-40B4-BE49-F238E27FC236}">
-                <a16:creationId xmlns:a16="http://schemas.microsoft.com/office/drawing/2014/main" id="{DF906009-2860-4FDF-82B4-49419D16F8D2}"/>
-              </a:ext>
-            </a:extLst>
-          </p:cNvPr>
-          <p:cNvSpPr/>
-          <p:nvPr/>
-        </p:nvSpPr>
-        <p:spPr>
-          <a:xfrm>
-            <a:off x="6591300" y="4152900"/>
-            <a:ext cx="695325" cy="133350"/>
-          </a:xfrm>
-          <a:prstGeom prst="rect">
-            <a:avLst/>
-          </a:prstGeom>
-          <a:solidFill>
-            <a:srgbClr val="63E2B7"/>
-          </a:solidFill>
-        </p:spPr>
-        <p:txBody>
-          <a:bodyPr wrap="square" rtlCol="0"/>
-          <a:lstStyle/>
-          <a:p>
-            <a:r>
-              <a:rPr/>
-              <a:t/>
-            </a:r>
-          </a:p>
-        </p:txBody>
-      </p:sp>
-      <p:sp>
-        <p:nvSpPr>
-          <p:cNvPr id="18" name="TextBox 18">
-            <a:extLst>
-              <a:ext uri="{FF2B5EF4-FFF2-40B4-BE49-F238E27FC236}">
-                <a16:creationId xmlns:a16="http://schemas.microsoft.com/office/drawing/2014/main" id="{8B9808F4-B898-4F88-9328-7CD7A1F64839}"/>
-              </a:ext>
-            </a:extLst>
-          </p:cNvPr>
-          <p:cNvSpPr txBox="1"/>
-          <p:nvPr/>
-        </p:nvSpPr>
-        <p:spPr>
-          <a:xfrm>
-            <a:off x="6591300" y="4381500"/>
-            <a:ext cx="2857500" cy="209550"/>
-          </a:xfrm>
-        </p:spPr>
-        <p:txBody>
-          <a:bodyPr wrap="square" rtlCol="0" lIns="0" tIns="0" rIns="0" bIns="0" anchor="t"/>
-          <a:lstStyle/>
-          <a:p>
-            <a:pPr algn="l">
-              <a:lnSpc>
-                <a:spcPct val="110000"/>
-              </a:lnSpc>
-            </a:pPr>
-            <a:r>
-              <a:rPr sz="1150">
-                <a:solidFill>
-                  <a:srgbClr val="9AA1AB"/>
-                </a:solidFill>
-                <a:latin typeface="Microsoft YaHei"/>
-                <a:ea typeface="Microsoft YaHei"/>
-              </a:rPr>
-              <a:t>储备 10%</a:t>
-            </a:r>
-          </a:p>
-        </p:txBody>
-      </p:sp>
-      <p:sp>
-        <p:nvSpPr>
-          <p:cNvPr id="19" name="Shape 19">
-            <a:extLst>
-              <a:ext uri="{FF2B5EF4-FFF2-40B4-BE49-F238E27FC236}">
-                <a16:creationId xmlns:a16="http://schemas.microsoft.com/office/drawing/2014/main" id="{C173C453-89A6-4677-9C2D-68D4FA40CE23}"/>
-              </a:ext>
-            </a:extLst>
-          </p:cNvPr>
-          <p:cNvSpPr/>
-          <p:nvPr/>
-        </p:nvSpPr>
-        <p:spPr>
-          <a:xfrm>
-            <a:off x="6591300" y="4591050"/>
-            <a:ext cx="457200" cy="133350"/>
-          </a:xfrm>
-          <a:prstGeom prst="rect">
-            <a:avLst/>
-          </a:prstGeom>
-          <a:solidFill>
-            <a:srgbClr val="63E2B7"/>
-          </a:solidFill>
-        </p:spPr>
-        <p:txBody>
-          <a:bodyPr wrap="square" rtlCol="0"/>
-          <a:lstStyle/>
-          <a:p>
-            <a:r>
-              <a:rPr/>
-              <a:t/>
-            </a:r>
-          </a:p>
-        </p:txBody>
-      </p:sp>
-      <p:sp>
-        <p:nvSpPr>
-          <p:cNvPr id="20" name="TextBox 20">
-            <a:extLst>
-              <a:ext uri="{FF2B5EF4-FFF2-40B4-BE49-F238E27FC236}">
-                <a16:creationId xmlns:a16="http://schemas.microsoft.com/office/drawing/2014/main" id="{44D029F4-6167-4779-AF7D-9F8901E9D729}"/>
-              </a:ext>
-            </a:extLst>
-          </p:cNvPr>
-          <p:cNvSpPr txBox="1"/>
-          <p:nvPr/>
-        </p:nvSpPr>
-        <p:spPr>
-          <a:xfrm>
-            <a:off x="6591300" y="4933950"/>
-            <a:ext cx="4610100" cy="285750"/>
-          </a:xfrm>
-        </p:spPr>
-        <p:txBody>
-          <a:bodyPr wrap="square" rtlCol="0" lIns="0" tIns="0" rIns="0" bIns="0" anchor="t"/>
-          <a:lstStyle/>
-          <a:p>
-            <a:pPr algn="l">
-              <a:lnSpc>
-                <a:spcPct val="130000"/>
-              </a:lnSpc>
-            </a:pPr>
-            <a:r>
-              <a:rPr sz="1400" b="1">
-                <a:solidFill>
-                  <a:srgbClr val="E8EAED"/>
-                </a:solidFill>
-                <a:latin typeface="Microsoft YaHei"/>
-                <a:ea typeface="Microsoft YaHei"/>
-              </a:rPr>
-              <a:t>12 个月里程碑：</a:t>
-            </a:r>
-            <a:r>
-              <a:rPr sz="1300" i="1">
-                <a:solidFill>
-                  <a:srgbClr val="8FB8FF"/>
-                </a:solidFill>
-                <a:latin typeface="Microsoft YaHei"/>
-                <a:ea typeface="Microsoft YaHei"/>
-              </a:rPr>
-              <a:t>【待填：付费用户 / MRR 目标】</a:t>
-            </a:r>
-          </a:p>
-        </p:txBody>
-      </p:sp>
-      <p:sp>
-        <p:nvSpPr>
-          <p:cNvPr id="21" name="TextBox 21">
-            <a:extLst>
-              <a:ext uri="{FF2B5EF4-FFF2-40B4-BE49-F238E27FC236}">
-                <a16:creationId xmlns:a16="http://schemas.microsoft.com/office/drawing/2014/main" id="{2E63E4C2-72D0-497A-9752-903181BC808E}"/>
-              </a:ext>
-            </a:extLst>
-          </p:cNvPr>
-          <p:cNvSpPr txBox="1"/>
-          <p:nvPr/>
-        </p:nvSpPr>
-        <p:spPr>
-          <a:xfrm>
-            <a:off x="685800" y="5772150"/>
-            <a:ext cx="10820400" cy="247650"/>
-          </a:xfrm>
-        </p:spPr>
-        <p:txBody>
-          <a:bodyPr wrap="square" rtlCol="0" lIns="0" tIns="0" rIns="0" bIns="0" anchor="t"/>
-          <a:lstStyle/>
-          <a:p>
-            <a:pPr algn="l">
-              <a:lnSpc>
-                <a:spcPct val="110000"/>
-              </a:lnSpc>
-            </a:pPr>
-            <a:r>
-              <a:rPr sz="1300">
-                <a:solidFill>
-                  <a:srgbClr val="6B7280"/>
-                </a:solidFill>
-                <a:latin typeface="Microsoft YaHei"/>
-                <a:ea typeface="Microsoft YaHei"/>
-              </a:rPr>
-              <a:t>单位经济（转化 / 留存 / ARPU / LTV / CAC）与完整财务模型在尽调资料包中提供</a:t>
-            </a:r>
-          </a:p>
-        </p:txBody>
-      </p:sp>
-    </p:spTree>
-  </p:cSld>
-  <p:clrMapOvr>
-    <a:masterClrMapping/>
-  </p:clrMapOvr>
-</p:sld>
-</file>
-
-<file path=ppt/slides/slide17.xml><?xml version="1.0" encoding="utf-8"?>
-<p:sld xmlns:a="http://schemas.openxmlformats.org/drawingml/2006/main" xmlns:r="http://schemas.openxmlformats.org/officeDocument/2006/relationships" xmlns:p="http://schemas.openxmlformats.org/presentationml/2006/main">
-  <p:cSld>
-    <p:bg>
-      <p:bgPr>
-        <a:solidFill>
-          <a:srgbClr val="0B0E13"/>
-        </a:solidFill>
-        <a:effectLst/>
-      </p:bgPr>
-    </p:bg>
-    <p:spTree>
-      <p:nvGrpSpPr>
-        <p:cNvPr id="1" name=""/>
-        <p:cNvGrpSpPr/>
-        <p:nvPr/>
-      </p:nvGrpSpPr>
-      <p:grpSpPr>
-        <a:xfrm>
-          <a:off x="0" y="0"/>
-          <a:ext cx="0" cy="0"/>
-          <a:chOff x="0" y="0"/>
-          <a:chExt cx="0" cy="0"/>
-        </a:xfrm>
-      </p:grpSpPr>
-      <p:sp>
-        <p:nvSpPr>
-          <p:cNvPr id="3" name="TextBox 3">
-            <a:extLst>
-              <a:ext uri="{FF2B5EF4-FFF2-40B4-BE49-F238E27FC236}">
-                <a16:creationId xmlns:a16="http://schemas.microsoft.com/office/drawing/2014/main" id="{5491BB9D-4999-49A0-A231-C63668DC4B51}"/>
-              </a:ext>
-            </a:extLst>
-          </p:cNvPr>
-          <p:cNvSpPr txBox="1"/>
-          <p:nvPr/>
-        </p:nvSpPr>
-        <p:spPr>
-          <a:xfrm>
-            <a:off x="685800" y="457200"/>
-            <a:ext cx="10820400" cy="603504"/>
-          </a:xfrm>
-        </p:spPr>
-        <p:txBody>
-          <a:bodyPr wrap="square" rtlCol="0" lIns="0" tIns="0" rIns="0" bIns="0" anchor="t"/>
-          <a:lstStyle/>
-          <a:p>
-            <a:pPr algn="l">
-              <a:lnSpc>
-                <a:spcPct val="110000"/>
-              </a:lnSpc>
-            </a:pPr>
-            <a:r>
-              <a:rPr sz="3600" b="1">
-                <a:solidFill>
-                  <a:srgbClr val="E8EAED"/>
-                </a:solidFill>
-                <a:latin typeface="Microsoft YaHei"/>
-                <a:ea typeface="Microsoft YaHei"/>
-              </a:rPr>
-              <a:t>可治理的 AI 控制面</a:t>
-            </a:r>
-          </a:p>
-        </p:txBody>
-      </p:sp>
-      <p:sp>
-        <p:nvSpPr>
-          <p:cNvPr id="4" name="TextBox 4">
-            <a:extLst>
-              <a:ext uri="{FF2B5EF4-FFF2-40B4-BE49-F238E27FC236}">
-                <a16:creationId xmlns:a16="http://schemas.microsoft.com/office/drawing/2014/main" id="{BF8C7AC7-D810-4E8E-B025-511FBAE61F17}"/>
-              </a:ext>
-            </a:extLst>
-          </p:cNvPr>
-          <p:cNvSpPr txBox="1"/>
-          <p:nvPr/>
-        </p:nvSpPr>
-        <p:spPr>
-          <a:xfrm>
-            <a:off x="685800" y="1047750"/>
-            <a:ext cx="10820400" cy="266700"/>
-          </a:xfrm>
-        </p:spPr>
-        <p:txBody>
-          <a:bodyPr wrap="square" rtlCol="0" lIns="0" tIns="0" rIns="0" bIns="0" anchor="t"/>
-          <a:lstStyle/>
-          <a:p>
-            <a:pPr algn="l">
-              <a:lnSpc>
-                <a:spcPct val="110000"/>
-              </a:lnSpc>
-            </a:pPr>
-            <a:r>
-              <a:rPr sz="1500">
-                <a:solidFill>
-                  <a:srgbClr val="9AA1AB"/>
-                </a:solidFill>
-                <a:latin typeface="Microsoft YaHei"/>
-                <a:ea typeface="Microsoft YaHei"/>
-              </a:rPr>
-              <a:t>面向管理员：AI 能力可见、可控、可审计（生产环境真实界面）</a:t>
-            </a:r>
-          </a:p>
-        </p:txBody>
-      </p:sp>
-      <p:pic>
-        <p:nvPicPr>
-          <p:cNvPr id="5" name="Picture 5">
-            <a:extLst>
-              <a:ext uri="{FF2B5EF4-FFF2-40B4-BE49-F238E27FC236}">
-                <a16:creationId xmlns:a16="http://schemas.microsoft.com/office/drawing/2014/main" id="{8BD36C9E-80B1-4A0A-8085-D02D73AFB48E}"/>
-              </a:ext>
-            </a:extLst>
-          </p:cNvPr>
-          <p:cNvPicPr/>
-          <p:nvPr/>
-        </p:nvPicPr>
-        <p:blipFill>
-          <a:blip r:embed="rId2"/>
-          <a:stretch>
-            <a:fillRect/>
-          </a:stretch>
-        </p:blipFill>
-        <p:spPr>
-          <a:xfrm>
-            <a:off x="609600" y="1524000"/>
-            <a:ext cx="6096000" cy="3810000"/>
-          </a:xfrm>
-          <a:prstGeom prst="rect">
-            <a:avLst/>
-          </a:prstGeom>
-        </p:spPr>
-      </p:pic>
-      <p:sp>
-        <p:nvSpPr>
-          <p:cNvPr id="6" name="TextBox 6">
-            <a:extLst>
-              <a:ext uri="{FF2B5EF4-FFF2-40B4-BE49-F238E27FC236}">
-                <a16:creationId xmlns:a16="http://schemas.microsoft.com/office/drawing/2014/main" id="{EFAC0AAE-7B18-44C5-8CD2-C2A342CD60FC}"/>
-              </a:ext>
-            </a:extLst>
-          </p:cNvPr>
-          <p:cNvSpPr txBox="1"/>
-          <p:nvPr/>
-        </p:nvSpPr>
-        <p:spPr>
-          <a:xfrm>
-            <a:off x="609600" y="5410200"/>
-            <a:ext cx="6286500" cy="228600"/>
-          </a:xfrm>
-        </p:spPr>
-        <p:txBody>
-          <a:bodyPr wrap="square" rtlCol="0" lIns="0" tIns="0" rIns="0" bIns="0" anchor="t"/>
-          <a:lstStyle/>
-          <a:p>
-            <a:pPr algn="l">
-              <a:lnSpc>
-                <a:spcPct val="110000"/>
-              </a:lnSpc>
-            </a:pPr>
-            <a:r>
-              <a:rPr sz="1200">
-                <a:solidFill>
-                  <a:srgbClr val="6B7280"/>
-                </a:solidFill>
-                <a:latin typeface="Microsoft YaHei"/>
-                <a:ea typeface="Microsoft YaHei"/>
-              </a:rPr>
-              <a:t>管理员视图：66 个工具全表（含风险级别 / 只读标记 / 启停状态）</a:t>
-            </a:r>
-          </a:p>
-        </p:txBody>
-      </p:sp>
-      <p:sp>
-        <p:nvSpPr>
-          <p:cNvPr id="7" name="TextBox 7">
-            <a:extLst>
-              <a:ext uri="{FF2B5EF4-FFF2-40B4-BE49-F238E27FC236}">
-                <a16:creationId xmlns:a16="http://schemas.microsoft.com/office/drawing/2014/main" id="{429E9BF4-B96F-46C5-AA8F-7F98438268A6}"/>
-              </a:ext>
-            </a:extLst>
-          </p:cNvPr>
-          <p:cNvSpPr txBox="1"/>
-          <p:nvPr/>
-        </p:nvSpPr>
-        <p:spPr>
-          <a:xfrm>
-            <a:off x="7086600" y="1619250"/>
-            <a:ext cx="4724400" cy="3810000"/>
-          </a:xfrm>
-        </p:spPr>
-        <p:txBody>
-          <a:bodyPr wrap="square" rtlCol="0" lIns="0" tIns="0" rIns="0" bIns="0" anchor="t"/>
-          <a:lstStyle/>
-          <a:p>
-            <a:pPr algn="l">
-              <a:lnSpc>
-                <a:spcPct val="135000"/>
-              </a:lnSpc>
-              <a:spcAft>
-                <a:spcPts val="1600"/>
-              </a:spcAft>
-            </a:pPr>
-            <a:r>
-              <a:rPr sz="1450" b="1">
-                <a:solidFill>
-                  <a:srgbClr val="E8EAED"/>
-                </a:solidFill>
-                <a:latin typeface="Microsoft YaHei"/>
-                <a:ea typeface="Microsoft YaHei"/>
-              </a:rPr>
-              <a:t>31 项技能 · 66 个工具</a:t>
-            </a:r>
-            <a:r>
-              <a:rPr sz="1300">
-                <a:solidFill>
-                  <a:srgbClr val="9AA1AB"/>
-                </a:solidFill>
-                <a:latin typeface="Microsoft YaHei"/>
-                <a:ea typeface="Microsoft YaHei"/>
-              </a:rPr>
-              <a:t> —— 全部可视化；其中 58 个经 MCP 对外开放</a:t>
-            </a:r>
-          </a:p>
-          <a:p>
-            <a:pPr algn="l">
-              <a:lnSpc>
-                <a:spcPct val="135000"/>
-              </a:lnSpc>
-              <a:spcAft>
-                <a:spcPts val="1600"/>
-              </a:spcAft>
-            </a:pPr>
-            <a:r>
-              <a:rPr sz="1450" b="1">
-                <a:solidFill>
-                  <a:srgbClr val="E8EAED"/>
-                </a:solidFill>
-                <a:latin typeface="Microsoft YaHei"/>
-                <a:ea typeface="Microsoft YaHei"/>
-              </a:rPr>
-              <a:t>逐项启停</a:t>
-            </a:r>
-            <a:r>
-              <a:rPr sz="1300">
-                <a:solidFill>
-                  <a:srgbClr val="9AA1AB"/>
-                </a:solidFill>
-                <a:latin typeface="Microsoft YaHei"/>
-                <a:ea typeface="Microsoft YaHei"/>
-              </a:rPr>
-              <a:t> —— 停用即从 AI 上下文移除，全员即时生效</a:t>
-            </a:r>
-          </a:p>
-          <a:p>
-            <a:pPr algn="l">
-              <a:lnSpc>
-                <a:spcPct val="135000"/>
-              </a:lnSpc>
-              <a:spcAft>
-                <a:spcPts val="1600"/>
-              </a:spcAft>
-            </a:pPr>
-            <a:r>
-              <a:rPr sz="1450" b="1">
-                <a:solidFill>
-                  <a:srgbClr val="E8EAED"/>
-                </a:solidFill>
-                <a:latin typeface="Microsoft YaHei"/>
-                <a:ea typeface="Microsoft YaHei"/>
-              </a:rPr>
-              <a:t>风险分级</a:t>
-            </a:r>
-            <a:r>
-              <a:rPr sz="1300">
-                <a:solidFill>
-                  <a:srgbClr val="9AA1AB"/>
-                </a:solidFill>
-                <a:latin typeface="Microsoft YaHei"/>
-                <a:ea typeface="Microsoft YaHei"/>
-              </a:rPr>
-              <a:t> —— read / write_draft / trading + 只读标记</a:t>
-            </a:r>
-          </a:p>
-          <a:p>
-            <a:pPr algn="l">
-              <a:lnSpc>
-                <a:spcPct val="135000"/>
-              </a:lnSpc>
-              <a:spcAft>
-                <a:spcPts val="1600"/>
-              </a:spcAft>
-            </a:pPr>
-            <a:r>
-              <a:rPr sz="1450" b="1">
-                <a:solidFill>
-                  <a:srgbClr val="E8EAED"/>
-                </a:solidFill>
-                <a:latin typeface="Microsoft YaHei"/>
-                <a:ea typeface="Microsoft YaHei"/>
-              </a:rPr>
-              <a:t>提示词可渲染、可审计</a:t>
-            </a:r>
-            <a:r>
-              <a:rPr sz="1300">
-                <a:solidFill>
-                  <a:srgbClr val="9AA1AB"/>
-                </a:solidFill>
-                <a:latin typeface="Microsoft YaHei"/>
-                <a:ea typeface="Microsoft YaHei"/>
-              </a:rPr>
-              <a:t> —— 技能支持安装 / 删除，prompt 一键复制</a:t>
-            </a:r>
-          </a:p>
-          <a:p>
-            <a:pPr algn="l">
-              <a:lnSpc>
-                <a:spcPct val="135000"/>
-              </a:lnSpc>
-              <a:spcAft>
-                <a:spcPts val="0"/>
-              </a:spcAft>
-            </a:pPr>
-            <a:r>
-              <a:rPr sz="1450" b="1">
-                <a:solidFill>
-                  <a:srgbClr val="E8EAED"/>
-                </a:solidFill>
-                <a:latin typeface="Microsoft YaHei"/>
-                <a:ea typeface="Microsoft YaHei"/>
-              </a:rPr>
-              <a:t>preflight 一键体检</a:t>
-            </a:r>
-            <a:r>
-              <a:rPr sz="1300">
-                <a:solidFill>
-                  <a:srgbClr val="9AA1AB"/>
-                </a:solidFill>
-                <a:latin typeface="Microsoft YaHei"/>
-                <a:ea typeface="Microsoft YaHei"/>
-              </a:rPr>
-              <a:t> —— LLM · 数据源 · 搜索 · 券商 · 积分</a:t>
-            </a:r>
-          </a:p>
-        </p:txBody>
-      </p:sp>
-      <p:sp>
-        <p:nvSpPr>
-          <p:cNvPr id="8" name="TextBox 8">
-            <a:extLst>
-              <a:ext uri="{FF2B5EF4-FFF2-40B4-BE49-F238E27FC236}">
-                <a16:creationId xmlns:a16="http://schemas.microsoft.com/office/drawing/2014/main" id="{5AF82D39-4D20-4F7B-BD93-E82F8925BE0F}"/>
-              </a:ext>
-            </a:extLst>
-          </p:cNvPr>
-          <p:cNvSpPr txBox="1"/>
-          <p:nvPr/>
-        </p:nvSpPr>
-        <p:spPr>
-          <a:xfrm>
-            <a:off x="685800" y="5772150"/>
-            <a:ext cx="10820400" cy="266700"/>
-          </a:xfrm>
-        </p:spPr>
-        <p:txBody>
-          <a:bodyPr wrap="square" rtlCol="0" lIns="0" tIns="0" rIns="0" bIns="0" anchor="t"/>
-          <a:lstStyle/>
-          <a:p>
-            <a:pPr algn="l">
-              <a:lnSpc>
-                <a:spcPct val="110000"/>
-              </a:lnSpc>
-            </a:pPr>
-            <a:r>
-              <a:rPr sz="1500">
-                <a:solidFill>
-                  <a:srgbClr val="9AA1AB"/>
-                </a:solidFill>
-                <a:latin typeface="Microsoft YaHei"/>
-                <a:ea typeface="Microsoft YaHei"/>
-              </a:rPr>
-              <a:t>对团队与企业客户：</a:t>
-            </a:r>
-            <a:r>
-              <a:rPr sz="1500" b="1">
-                <a:solidFill>
-                  <a:srgbClr val="63E2B7"/>
-                </a:solidFill>
-                <a:latin typeface="Microsoft YaHei"/>
-                <a:ea typeface="Microsoft YaHei"/>
-              </a:rPr>
-              <a:t>AI 能力是可见、可控、可审计的资产——不是黑盒</a:t>
-            </a:r>
-          </a:p>
-        </p:txBody>
-      </p:sp>
-    </p:spTree>
-  </p:cSld>
-  <p:clrMapOvr>
-    <a:masterClrMapping/>
-  </p:clrMapOvr>
-</p:sld>
-</file>
-
-<file path=ppt/slides/slide18.xml><?xml version="1.0" encoding="utf-8"?>
 <p:sld xmlns:a="http://schemas.openxmlformats.org/drawingml/2006/main" xmlns:r="http://schemas.openxmlformats.org/officeDocument/2006/relationships" xmlns:p="http://schemas.openxmlformats.org/presentationml/2006/main">
   <p:cSld>
     <p:bg>
@@ -5941,7 +4998,7 @@
                 <a:latin typeface="Microsoft YaHei"/>
                 <a:ea typeface="Microsoft YaHei"/>
               </a:rPr>
-              <a:t>AI 生成 + 222 因子库与在线 IDE</a:t>
+              <a:t>AI 生成 + 264 因子库与在线 IDE</a:t>
             </a:r>
           </a:p>
         </p:txBody>
@@ -7203,7 +6260,7 @@
                 <a:latin typeface="Arial"/>
                 <a:ea typeface="Arial"/>
               </a:rPr>
-              <a:t>222</a:t>
+              <a:t>264</a:t>
             </a:r>
           </a:p>
         </p:txBody>
@@ -8481,6 +7538,712 @@
 </p:sld>
 </file>
 
+<file path=ppt/slides/slide8.xml><?xml version="1.0" encoding="utf-8"?>
+<p:sld xmlns:a="http://schemas.openxmlformats.org/drawingml/2006/main" xmlns:r="http://schemas.openxmlformats.org/officeDocument/2006/relationships" xmlns:p="http://schemas.openxmlformats.org/presentationml/2006/main">
+  <p:cSld>
+    <p:bg>
+      <p:bgPr>
+        <a:solidFill>
+          <a:srgbClr val="0B0E13"/>
+        </a:solidFill>
+        <a:effectLst/>
+      </p:bgPr>
+    </p:bg>
+    <p:spTree>
+      <p:nvGrpSpPr>
+        <p:cNvPr id="1" name=""/>
+        <p:cNvGrpSpPr/>
+        <p:nvPr/>
+      </p:nvGrpSpPr>
+      <p:grpSpPr>
+        <a:xfrm>
+          <a:off x="0" y="0"/>
+          <a:ext cx="0" cy="0"/>
+          <a:chOff x="0" y="0"/>
+          <a:chExt cx="0" cy="0"/>
+        </a:xfrm>
+      </p:grpSpPr>
+      <p:sp>
+        <p:nvSpPr>
+          <p:cNvPr id="3" name="TextBox 3">
+            <a:extLst>
+              <a:ext uri="{FF2B5EF4-FFF2-40B4-BE49-F238E27FC236}">
+                <a16:creationId xmlns:a16="http://schemas.microsoft.com/office/drawing/2014/main" id="{5925F1E0-3FE1-404E-8C66-47246E614A2B}"/>
+              </a:ext>
+            </a:extLst>
+          </p:cNvPr>
+          <p:cNvSpPr txBox="1"/>
+          <p:nvPr/>
+        </p:nvSpPr>
+        <p:spPr>
+          <a:xfrm>
+            <a:off x="685800" y="457200"/>
+            <a:ext cx="10820400" cy="603504"/>
+          </a:xfrm>
+        </p:spPr>
+        <p:txBody>
+          <a:bodyPr wrap="square" rtlCol="0" lIns="0" tIns="0" rIns="0" bIns="0" anchor="t"/>
+          <a:lstStyle/>
+          <a:p>
+            <a:pPr algn="l">
+              <a:lnSpc>
+                <a:spcPct val="110000"/>
+              </a:lnSpc>
+            </a:pPr>
+            <a:r>
+              <a:rPr sz="3600" b="1">
+                <a:solidFill>
+                  <a:srgbClr val="E8EAED"/>
+                </a:solidFill>
+                <a:latin typeface="Microsoft YaHei"/>
+                <a:ea typeface="Microsoft YaHei"/>
+              </a:rPr>
+              <a:t>让 AI Agent 安全地交易——行业还没有答案</a:t>
+            </a:r>
+          </a:p>
+        </p:txBody>
+      </p:sp>
+      <p:sp>
+        <p:nvSpPr>
+          <p:cNvPr id="4" name="TextBox 4">
+            <a:extLst>
+              <a:ext uri="{FF2B5EF4-FFF2-40B4-BE49-F238E27FC236}">
+                <a16:creationId xmlns:a16="http://schemas.microsoft.com/office/drawing/2014/main" id="{A6E63D30-E5D1-4CB2-89D1-A2CF1A23E824}"/>
+              </a:ext>
+            </a:extLst>
+          </p:cNvPr>
+          <p:cNvSpPr txBox="1"/>
+          <p:nvPr/>
+        </p:nvSpPr>
+        <p:spPr>
+          <a:xfrm>
+            <a:off x="685800" y="1047750"/>
+            <a:ext cx="10820400" cy="266700"/>
+          </a:xfrm>
+        </p:spPr>
+        <p:txBody>
+          <a:bodyPr wrap="square" rtlCol="0" lIns="0" tIns="0" rIns="0" bIns="0" anchor="t"/>
+          <a:lstStyle/>
+          <a:p>
+            <a:pPr algn="l">
+              <a:lnSpc>
+                <a:spcPct val="110000"/>
+              </a:lnSpc>
+            </a:pPr>
+            <a:r>
+              <a:rPr sz="1500">
+                <a:solidFill>
+                  <a:srgbClr val="9AA1AB"/>
+                </a:solidFill>
+                <a:latin typeface="Microsoft YaHei"/>
+                <a:ea typeface="Microsoft YaHei"/>
+              </a:rPr>
+              <a:t>MCP 服务器两年从 ~50 个增长到 8,000–12,000 个；Agent 进入金融只是时间问题</a:t>
+            </a:r>
+          </a:p>
+        </p:txBody>
+      </p:sp>
+      <p:sp>
+        <p:nvSpPr>
+          <p:cNvPr id="5" name="Shape 5">
+            <a:extLst>
+              <a:ext uri="{FF2B5EF4-FFF2-40B4-BE49-F238E27FC236}">
+                <a16:creationId xmlns:a16="http://schemas.microsoft.com/office/drawing/2014/main" id="{2A572006-371F-41D8-9C3E-C397C4967742}"/>
+              </a:ext>
+            </a:extLst>
+          </p:cNvPr>
+          <p:cNvSpPr/>
+          <p:nvPr/>
+        </p:nvSpPr>
+        <p:spPr>
+          <a:xfrm>
+            <a:off x="685800" y="1619250"/>
+            <a:ext cx="5219700" cy="3810000"/>
+          </a:xfrm>
+          <a:prstGeom prst="roundRect">
+            <a:avLst/>
+          </a:prstGeom>
+          <a:solidFill>
+            <a:srgbClr val="14181F"/>
+          </a:solidFill>
+          <a:ln w="12700">
+            <a:solidFill>
+              <a:srgbClr val="232A33"/>
+            </a:solidFill>
+          </a:ln>
+        </p:spPr>
+        <p:txBody>
+          <a:bodyPr wrap="square" rtlCol="0"/>
+          <a:lstStyle/>
+          <a:p>
+            <a:r>
+              <a:rPr/>
+              <a:t/>
+            </a:r>
+          </a:p>
+        </p:txBody>
+      </p:sp>
+      <p:sp>
+        <p:nvSpPr>
+          <p:cNvPr id="6" name="Shape 6">
+            <a:extLst>
+              <a:ext uri="{FF2B5EF4-FFF2-40B4-BE49-F238E27FC236}">
+                <a16:creationId xmlns:a16="http://schemas.microsoft.com/office/drawing/2014/main" id="{4FD90847-373E-4798-B9FD-78D7B40FD102}"/>
+              </a:ext>
+            </a:extLst>
+          </p:cNvPr>
+          <p:cNvSpPr/>
+          <p:nvPr/>
+        </p:nvSpPr>
+        <p:spPr>
+          <a:xfrm>
+            <a:off x="6286500" y="1619250"/>
+            <a:ext cx="5219700" cy="3810000"/>
+          </a:xfrm>
+          <a:prstGeom prst="roundRect">
+            <a:avLst/>
+          </a:prstGeom>
+          <a:solidFill>
+            <a:srgbClr val="14181F"/>
+          </a:solidFill>
+          <a:ln w="12700">
+            <a:solidFill>
+              <a:srgbClr val="63E2B7"/>
+            </a:solidFill>
+          </a:ln>
+        </p:spPr>
+        <p:txBody>
+          <a:bodyPr wrap="square" rtlCol="0"/>
+          <a:lstStyle/>
+          <a:p>
+            <a:r>
+              <a:rPr/>
+              <a:t/>
+            </a:r>
+          </a:p>
+        </p:txBody>
+      </p:sp>
+      <p:sp>
+        <p:nvSpPr>
+          <p:cNvPr id="7" name="TextBox 7">
+            <a:extLst>
+              <a:ext uri="{FF2B5EF4-FFF2-40B4-BE49-F238E27FC236}">
+                <a16:creationId xmlns:a16="http://schemas.microsoft.com/office/drawing/2014/main" id="{1F24E284-7AC6-455B-A994-2FA3C21E716B}"/>
+              </a:ext>
+            </a:extLst>
+          </p:cNvPr>
+          <p:cNvSpPr txBox="1"/>
+          <p:nvPr/>
+        </p:nvSpPr>
+        <p:spPr>
+          <a:xfrm>
+            <a:off x="990600" y="1866900"/>
+            <a:ext cx="4572000" cy="342900"/>
+          </a:xfrm>
+        </p:spPr>
+        <p:txBody>
+          <a:bodyPr wrap="square" rtlCol="0" lIns="0" tIns="0" rIns="0" bIns="0" anchor="t"/>
+          <a:lstStyle/>
+          <a:p>
+            <a:pPr algn="l">
+              <a:lnSpc>
+                <a:spcPct val="110000"/>
+              </a:lnSpc>
+            </a:pPr>
+            <a:r>
+              <a:rPr sz="2000" b="1">
+                <a:solidFill>
+                  <a:srgbClr val="8FB8FF"/>
+                </a:solidFill>
+                <a:latin typeface="Microsoft YaHei"/>
+                <a:ea typeface="Microsoft YaHei"/>
+              </a:rPr>
+              <a:t>行业现状</a:t>
+            </a:r>
+          </a:p>
+        </p:txBody>
+      </p:sp>
+      <p:sp>
+        <p:nvSpPr>
+          <p:cNvPr id="8" name="TextBox 8">
+            <a:extLst>
+              <a:ext uri="{FF2B5EF4-FFF2-40B4-BE49-F238E27FC236}">
+                <a16:creationId xmlns:a16="http://schemas.microsoft.com/office/drawing/2014/main" id="{9A346E20-A090-40D2-81BF-E8BC2820B69F}"/>
+              </a:ext>
+            </a:extLst>
+          </p:cNvPr>
+          <p:cNvSpPr txBox="1"/>
+          <p:nvPr/>
+        </p:nvSpPr>
+        <p:spPr>
+          <a:xfrm>
+            <a:off x="990600" y="2343150"/>
+            <a:ext cx="4572000" cy="569976"/>
+          </a:xfrm>
+        </p:spPr>
+        <p:txBody>
+          <a:bodyPr wrap="square" rtlCol="0" lIns="0" tIns="0" rIns="0" bIns="0" anchor="t"/>
+          <a:lstStyle/>
+          <a:p>
+            <a:pPr algn="l">
+              <a:lnSpc>
+                <a:spcPct val="110000"/>
+              </a:lnSpc>
+            </a:pPr>
+            <a:r>
+              <a:rPr sz="3400" b="1">
+                <a:solidFill>
+                  <a:srgbClr val="E8EAED"/>
+                </a:solidFill>
+                <a:latin typeface="Arial"/>
+                <a:ea typeface="Arial"/>
+              </a:rPr>
+              <a:t>47–53%</a:t>
+            </a:r>
+          </a:p>
+        </p:txBody>
+      </p:sp>
+      <p:sp>
+        <p:nvSpPr>
+          <p:cNvPr id="9" name="TextBox 9">
+            <a:extLst>
+              <a:ext uri="{FF2B5EF4-FFF2-40B4-BE49-F238E27FC236}">
+                <a16:creationId xmlns:a16="http://schemas.microsoft.com/office/drawing/2014/main" id="{967670CD-7756-43AF-8933-A0A8FE934F1B}"/>
+              </a:ext>
+            </a:extLst>
+          </p:cNvPr>
+          <p:cNvSpPr txBox="1"/>
+          <p:nvPr/>
+        </p:nvSpPr>
+        <p:spPr>
+          <a:xfrm>
+            <a:off x="990600" y="2914650"/>
+            <a:ext cx="4572000" cy="419100"/>
+          </a:xfrm>
+        </p:spPr>
+        <p:txBody>
+          <a:bodyPr wrap="square" rtlCol="0" lIns="0" tIns="0" rIns="0" bIns="0" anchor="t"/>
+          <a:lstStyle/>
+          <a:p>
+            <a:pPr algn="l">
+              <a:lnSpc>
+                <a:spcPct val="130000"/>
+              </a:lnSpc>
+            </a:pPr>
+            <a:r>
+              <a:rPr sz="1250">
+                <a:solidFill>
+                  <a:srgbClr val="9AA1AB"/>
+                </a:solidFill>
+                <a:latin typeface="Microsoft YaHei"/>
+                <a:ea typeface="Microsoft YaHei"/>
+              </a:rPr>
+              <a:t>的组织遭遇过 AI Agent 越权或安全事故（DevSecOps 2026）</a:t>
+            </a:r>
+          </a:p>
+        </p:txBody>
+      </p:sp>
+      <p:sp>
+        <p:nvSpPr>
+          <p:cNvPr id="10" name="TextBox 10">
+            <a:extLst>
+              <a:ext uri="{FF2B5EF4-FFF2-40B4-BE49-F238E27FC236}">
+                <a16:creationId xmlns:a16="http://schemas.microsoft.com/office/drawing/2014/main" id="{E791701B-15D3-4DE9-B28B-D2554230357A}"/>
+              </a:ext>
+            </a:extLst>
+          </p:cNvPr>
+          <p:cNvSpPr txBox="1"/>
+          <p:nvPr/>
+        </p:nvSpPr>
+        <p:spPr>
+          <a:xfrm>
+            <a:off x="990600" y="3429000"/>
+            <a:ext cx="4572000" cy="569976"/>
+          </a:xfrm>
+        </p:spPr>
+        <p:txBody>
+          <a:bodyPr wrap="square" rtlCol="0" lIns="0" tIns="0" rIns="0" bIns="0" anchor="t"/>
+          <a:lstStyle/>
+          <a:p>
+            <a:pPr algn="l">
+              <a:lnSpc>
+                <a:spcPct val="110000"/>
+              </a:lnSpc>
+            </a:pPr>
+            <a:r>
+              <a:rPr sz="3400" b="1">
+                <a:solidFill>
+                  <a:srgbClr val="E8EAED"/>
+                </a:solidFill>
+                <a:latin typeface="Arial"/>
+                <a:ea typeface="Arial"/>
+              </a:rPr>
+              <a:t>~23%</a:t>
+            </a:r>
+          </a:p>
+        </p:txBody>
+      </p:sp>
+      <p:sp>
+        <p:nvSpPr>
+          <p:cNvPr id="11" name="TextBox 11">
+            <a:extLst>
+              <a:ext uri="{FF2B5EF4-FFF2-40B4-BE49-F238E27FC236}">
+                <a16:creationId xmlns:a16="http://schemas.microsoft.com/office/drawing/2014/main" id="{51DDC25F-469E-4EE1-A1BE-A04FE4867EAD}"/>
+              </a:ext>
+            </a:extLst>
+          </p:cNvPr>
+          <p:cNvSpPr txBox="1"/>
+          <p:nvPr/>
+        </p:nvSpPr>
+        <p:spPr>
+          <a:xfrm>
+            <a:off x="990600" y="4000500"/>
+            <a:ext cx="4572000" cy="419100"/>
+          </a:xfrm>
+        </p:spPr>
+        <p:txBody>
+          <a:bodyPr wrap="square" rtlCol="0" lIns="0" tIns="0" rIns="0" bIns="0" anchor="t"/>
+          <a:lstStyle/>
+          <a:p>
+            <a:pPr algn="l">
+              <a:lnSpc>
+                <a:spcPct val="130000"/>
+              </a:lnSpc>
+            </a:pPr>
+            <a:r>
+              <a:rPr sz="1250">
+                <a:solidFill>
+                  <a:srgbClr val="9AA1AB"/>
+                </a:solidFill>
+                <a:latin typeface="Microsoft YaHei"/>
+                <a:ea typeface="Microsoft YaHei"/>
+              </a:rPr>
+              <a:t>的组织建立了正式的 AI Agent 身份体系</a:t>
+            </a:r>
+          </a:p>
+        </p:txBody>
+      </p:sp>
+      <p:sp>
+        <p:nvSpPr>
+          <p:cNvPr id="12" name="TextBox 12">
+            <a:extLst>
+              <a:ext uri="{FF2B5EF4-FFF2-40B4-BE49-F238E27FC236}">
+                <a16:creationId xmlns:a16="http://schemas.microsoft.com/office/drawing/2014/main" id="{7E8239C7-1A94-411B-8F9A-2ADC415B71C1}"/>
+              </a:ext>
+            </a:extLst>
+          </p:cNvPr>
+          <p:cNvSpPr txBox="1"/>
+          <p:nvPr/>
+        </p:nvSpPr>
+        <p:spPr>
+          <a:xfrm>
+            <a:off x="990600" y="4514850"/>
+            <a:ext cx="4572000" cy="569976"/>
+          </a:xfrm>
+        </p:spPr>
+        <p:txBody>
+          <a:bodyPr wrap="square" rtlCol="0" lIns="0" tIns="0" rIns="0" bIns="0" anchor="t"/>
+          <a:lstStyle/>
+          <a:p>
+            <a:pPr algn="l">
+              <a:lnSpc>
+                <a:spcPct val="110000"/>
+              </a:lnSpc>
+            </a:pPr>
+            <a:r>
+              <a:rPr sz="3400" b="1">
+                <a:solidFill>
+                  <a:srgbClr val="E8EAED"/>
+                </a:solidFill>
+                <a:latin typeface="Arial"/>
+                <a:ea typeface="Arial"/>
+              </a:rPr>
+              <a:t>0</a:t>
+            </a:r>
+          </a:p>
+        </p:txBody>
+      </p:sp>
+      <p:sp>
+        <p:nvSpPr>
+          <p:cNvPr id="13" name="TextBox 13">
+            <a:extLst>
+              <a:ext uri="{FF2B5EF4-FFF2-40B4-BE49-F238E27FC236}">
+                <a16:creationId xmlns:a16="http://schemas.microsoft.com/office/drawing/2014/main" id="{159AE6E9-4B85-4AB4-A30E-218077900611}"/>
+              </a:ext>
+            </a:extLst>
+          </p:cNvPr>
+          <p:cNvSpPr txBox="1"/>
+          <p:nvPr/>
+        </p:nvSpPr>
+        <p:spPr>
+          <a:xfrm>
+            <a:off x="990600" y="5086350"/>
+            <a:ext cx="4572000" cy="419100"/>
+          </a:xfrm>
+        </p:spPr>
+        <p:txBody>
+          <a:bodyPr wrap="square" rtlCol="0" lIns="0" tIns="0" rIns="0" bIns="0" anchor="t"/>
+          <a:lstStyle/>
+          <a:p>
+            <a:pPr algn="l">
+              <a:lnSpc>
+                <a:spcPct val="130000"/>
+              </a:lnSpc>
+            </a:pPr>
+            <a:r>
+              <a:rPr sz="1250">
+                <a:solidFill>
+                  <a:srgbClr val="9AA1AB"/>
+                </a:solidFill>
+                <a:latin typeface="Microsoft YaHei"/>
+                <a:ea typeface="Microsoft YaHei"/>
+              </a:rPr>
+              <a:t>现成的「交易级」Agent 安全方案</a:t>
+            </a:r>
+          </a:p>
+        </p:txBody>
+      </p:sp>
+      <p:sp>
+        <p:nvSpPr>
+          <p:cNvPr id="14" name="TextBox 14">
+            <a:extLst>
+              <a:ext uri="{FF2B5EF4-FFF2-40B4-BE49-F238E27FC236}">
+                <a16:creationId xmlns:a16="http://schemas.microsoft.com/office/drawing/2014/main" id="{8C0FDB38-037B-4ABB-9828-E06DC5E291FB}"/>
+              </a:ext>
+            </a:extLst>
+          </p:cNvPr>
+          <p:cNvSpPr txBox="1"/>
+          <p:nvPr/>
+        </p:nvSpPr>
+        <p:spPr>
+          <a:xfrm>
+            <a:off x="6591300" y="1866900"/>
+            <a:ext cx="4572000" cy="342900"/>
+          </a:xfrm>
+        </p:spPr>
+        <p:txBody>
+          <a:bodyPr wrap="square" rtlCol="0" lIns="0" tIns="0" rIns="0" bIns="0" anchor="t"/>
+          <a:lstStyle/>
+          <a:p>
+            <a:pPr algn="l">
+              <a:lnSpc>
+                <a:spcPct val="110000"/>
+              </a:lnSpc>
+            </a:pPr>
+            <a:r>
+              <a:rPr sz="2000" b="1">
+                <a:solidFill>
+                  <a:srgbClr val="63E2B7"/>
+                </a:solidFill>
+                <a:latin typeface="Microsoft YaHei"/>
+                <a:ea typeface="Microsoft YaHei"/>
+              </a:rPr>
+              <a:t>SharkQuant Agent Gateway（已上线）</a:t>
+            </a:r>
+          </a:p>
+        </p:txBody>
+      </p:sp>
+      <p:sp>
+        <p:nvSpPr>
+          <p:cNvPr id="15" name="TextBox 15">
+            <a:extLst>
+              <a:ext uri="{FF2B5EF4-FFF2-40B4-BE49-F238E27FC236}">
+                <a16:creationId xmlns:a16="http://schemas.microsoft.com/office/drawing/2014/main" id="{DA591504-9936-4227-88C1-D4978C72678C}"/>
+              </a:ext>
+            </a:extLst>
+          </p:cNvPr>
+          <p:cNvSpPr txBox="1"/>
+          <p:nvPr/>
+        </p:nvSpPr>
+        <p:spPr>
+          <a:xfrm>
+            <a:off x="6591300" y="2457450"/>
+            <a:ext cx="4610100" cy="2913888"/>
+          </a:xfrm>
+        </p:spPr>
+        <p:txBody>
+          <a:bodyPr wrap="square" rtlCol="0" lIns="0" tIns="0" rIns="0" bIns="0" anchor="t"/>
+          <a:lstStyle/>
+          <a:p>
+            <a:pPr algn="l">
+              <a:lnSpc>
+                <a:spcPct val="140000"/>
+              </a:lnSpc>
+              <a:spcAft>
+                <a:spcPts val="1600"/>
+              </a:spcAft>
+            </a:pPr>
+            <a:r>
+              <a:rPr sz="1400" b="1">
+                <a:solidFill>
+                  <a:srgbClr val="E8EAED"/>
+                </a:solidFill>
+                <a:latin typeface="Microsoft YaHei"/>
+                <a:ea typeface="Microsoft YaHei"/>
+              </a:rPr>
+              <a:t>58 个 MCP 工具</a:t>
+            </a:r>
+            <a:r>
+              <a:rPr sz="1300">
+                <a:solidFill>
+                  <a:srgbClr val="9AA1AB"/>
+                </a:solidFill>
+                <a:latin typeface="Microsoft YaHei"/>
+                <a:ea typeface="Microsoft YaHei"/>
+              </a:rPr>
+              <a:t>——把行情、回测、模拟交易全部开放给 Cursor / Claude Code / Codex</a:t>
+            </a:r>
+          </a:p>
+          <a:p>
+            <a:pPr algn="l">
+              <a:lnSpc>
+                <a:spcPct val="140000"/>
+              </a:lnSpc>
+              <a:spcAft>
+                <a:spcPts val="1600"/>
+              </a:spcAft>
+            </a:pPr>
+            <a:r>
+              <a:rPr sz="1400" b="1">
+                <a:solidFill>
+                  <a:srgbClr val="E8EAED"/>
+                </a:solidFill>
+                <a:latin typeface="Microsoft YaHei"/>
+                <a:ea typeface="Microsoft YaHei"/>
+              </a:rPr>
+              <a:t>默认仅模拟盘</a:t>
+            </a:r>
+            <a:r>
+              <a:rPr sz="1300">
+                <a:solidFill>
+                  <a:srgbClr val="9AA1AB"/>
+                </a:solidFill>
+                <a:latin typeface="Microsoft YaHei"/>
+                <a:ea typeface="Microsoft YaHei"/>
+              </a:rPr>
+              <a:t>——实盘需权限、授权、风险确认、非默认模式 4 个条件同时满足</a:t>
+            </a:r>
+          </a:p>
+          <a:p>
+            <a:pPr algn="l">
+              <a:lnSpc>
+                <a:spcPct val="140000"/>
+              </a:lnSpc>
+              <a:spcAft>
+                <a:spcPts val="1600"/>
+              </a:spcAft>
+            </a:pPr>
+            <a:r>
+              <a:rPr sz="1400" b="1">
+                <a:solidFill>
+                  <a:srgbClr val="E8EAED"/>
+                </a:solidFill>
+                <a:latin typeface="Microsoft YaHei"/>
+                <a:ea typeface="Microsoft YaHei"/>
+              </a:rPr>
+              <a:t>五类权限范围</a:t>
+            </a:r>
+            <a:r>
+              <a:rPr sz="1300">
+                <a:solidFill>
+                  <a:srgbClr val="9AA1AB"/>
+                </a:solidFill>
+                <a:latin typeface="Microsoft YaHei"/>
+                <a:ea typeface="Microsoft YaHei"/>
+              </a:rPr>
+              <a:t>——读写/交易/通知/额度/实盘分级，默认限流 60 次/分钟</a:t>
+            </a:r>
+          </a:p>
+          <a:p>
+            <a:pPr algn="l">
+              <a:lnSpc>
+                <a:spcPct val="140000"/>
+              </a:lnSpc>
+              <a:spcAft>
+                <a:spcPts val="0"/>
+              </a:spcAft>
+            </a:pPr>
+            <a:r>
+              <a:rPr sz="1400" b="1">
+                <a:solidFill>
+                  <a:srgbClr val="E8EAED"/>
+                </a:solidFill>
+                <a:latin typeface="Microsoft YaHei"/>
+                <a:ea typeface="Microsoft YaHei"/>
+              </a:rPr>
+              <a:t>全量操作审计</a:t>
+            </a:r>
+            <a:r>
+              <a:rPr sz="1300">
+                <a:solidFill>
+                  <a:srgbClr val="9AA1AB"/>
+                </a:solidFill>
+                <a:latin typeface="Microsoft YaHei"/>
+                <a:ea typeface="Microsoft YaHei"/>
+              </a:rPr>
+              <a:t>——每一笔 Agent 动作可回溯，资金安全优先于便利</a:t>
+            </a:r>
+          </a:p>
+        </p:txBody>
+      </p:sp>
+      <p:sp>
+        <p:nvSpPr>
+          <p:cNvPr id="16" name="TextBox 16">
+            <a:extLst>
+              <a:ext uri="{FF2B5EF4-FFF2-40B4-BE49-F238E27FC236}">
+                <a16:creationId xmlns:a16="http://schemas.microsoft.com/office/drawing/2014/main" id="{FF195489-D503-45F5-8F6F-520B48F50F95}"/>
+              </a:ext>
+            </a:extLst>
+          </p:cNvPr>
+          <p:cNvSpPr txBox="1"/>
+          <p:nvPr/>
+        </p:nvSpPr>
+        <p:spPr>
+          <a:xfrm>
+            <a:off x="685800" y="5772150"/>
+            <a:ext cx="10820400" cy="266700"/>
+          </a:xfrm>
+        </p:spPr>
+        <p:txBody>
+          <a:bodyPr wrap="square" rtlCol="0" lIns="0" tIns="0" rIns="0" bIns="0" anchor="t"/>
+          <a:lstStyle/>
+          <a:p>
+            <a:pPr algn="l">
+              <a:lnSpc>
+                <a:spcPct val="110000"/>
+              </a:lnSpc>
+            </a:pPr>
+            <a:r>
+              <a:rPr sz="1500">
+                <a:solidFill>
+                  <a:srgbClr val="9AA1AB"/>
+                </a:solidFill>
+                <a:latin typeface="Microsoft YaHei"/>
+                <a:ea typeface="Microsoft YaHei"/>
+              </a:rPr>
+              <a:t>Agent 生态 = 新的分发渠道：</a:t>
+            </a:r>
+            <a:r>
+              <a:rPr sz="1500" b="1">
+                <a:solidFill>
+                  <a:srgbClr val="63E2B7"/>
+                </a:solidFill>
+                <a:latin typeface="Microsoft YaHei"/>
+                <a:ea typeface="Microsoft YaHei"/>
+              </a:rPr>
+              <a:t>AI 用户的第一笔交易，可能从一次对话开始</a:t>
+            </a:r>
+          </a:p>
+        </p:txBody>
+      </p:sp>
+    </p:spTree>
+  </p:cSld>
+  <p:clrMapOvr>
+    <a:masterClrMapping/>
+  </p:clrMapOvr>
+</p:sld>
+</file>
+
 <file path=ppt/slides/slide9.xml><?xml version="1.0" encoding="utf-8"?>
 <p:sld xmlns:a="http://schemas.openxmlformats.org/drawingml/2006/main" xmlns:r="http://schemas.openxmlformats.org/officeDocument/2006/relationships" xmlns:p="http://schemas.openxmlformats.org/presentationml/2006/main">
   <p:cSld>
@@ -8511,7 +8274,7 @@
           <p:cNvPr id="3" name="TextBox 3">
             <a:extLst>
               <a:ext uri="{FF2B5EF4-FFF2-40B4-BE49-F238E27FC236}">
-                <a16:creationId xmlns:a16="http://schemas.microsoft.com/office/drawing/2014/main" id="{5925F1E0-3FE1-404E-8C66-47246E614A2B}"/>
+                <a16:creationId xmlns:a16="http://schemas.microsoft.com/office/drawing/2014/main" id="{2E68D41B-F74A-4520-A1F9-E61845570E7A}"/>
               </a:ext>
             </a:extLst>
           </p:cNvPr>
@@ -8541,7 +8304,7 @@
                 <a:latin typeface="Microsoft YaHei"/>
                 <a:ea typeface="Microsoft YaHei"/>
               </a:rPr>
-              <a:t>让 AI Agent 安全地交易——行业还没有答案</a:t>
+              <a:t>竞争定位：整合度 × AI 原生度</a:t>
             </a:r>
           </a:p>
         </p:txBody>
@@ -8551,7 +8314,7 @@
           <p:cNvPr id="4" name="TextBox 4">
             <a:extLst>
               <a:ext uri="{FF2B5EF4-FFF2-40B4-BE49-F238E27FC236}">
-                <a16:creationId xmlns:a16="http://schemas.microsoft.com/office/drawing/2014/main" id="{A6E63D30-E5D1-4CB2-89D1-A2CF1A23E824}"/>
+                <a16:creationId xmlns:a16="http://schemas.microsoft.com/office/drawing/2014/main" id="{031F0D94-6724-48A9-BCC4-3ADABD5CD365}"/>
               </a:ext>
             </a:extLst>
           </p:cNvPr>
@@ -8581,7 +8344,7 @@
                 <a:latin typeface="Microsoft YaHei"/>
                 <a:ea typeface="Microsoft YaHei"/>
               </a:rPr>
-              <a:t>MCP 服务器两年从 ~50 个增长到 8,000–12,000 个；Agent 进入金融只是时间问题</a:t>
+              <a:t>横轴：全链路整合度（分析 → 执行）｜纵轴：AI 原生度</a:t>
             </a:r>
           </a:p>
         </p:txBody>
@@ -8591,7 +8354,7 @@
           <p:cNvPr id="5" name="Shape 5">
             <a:extLst>
               <a:ext uri="{FF2B5EF4-FFF2-40B4-BE49-F238E27FC236}">
-                <a16:creationId xmlns:a16="http://schemas.microsoft.com/office/drawing/2014/main" id="{2A572006-371F-41D8-9C3E-C397C4967742}"/>
+                <a16:creationId xmlns:a16="http://schemas.microsoft.com/office/drawing/2014/main" id="{4BFFC4B3-89E2-4C0D-9A1D-0E478CCC5C5E}"/>
               </a:ext>
             </a:extLst>
           </p:cNvPr>
@@ -8600,8 +8363,318 @@
         </p:nvSpPr>
         <p:spPr>
           <a:xfrm>
-            <a:off x="685800" y="1619250"/>
-            <a:ext cx="5219700" cy="3810000"/>
+            <a:off x="1333500" y="3810000"/>
+            <a:ext cx="9525000" cy="19050"/>
+          </a:xfrm>
+          <a:prstGeom prst="rect">
+            <a:avLst/>
+          </a:prstGeom>
+          <a:solidFill>
+            <a:srgbClr val="232A33"/>
+          </a:solidFill>
+        </p:spPr>
+        <p:txBody>
+          <a:bodyPr wrap="square" rtlCol="0"/>
+          <a:lstStyle/>
+          <a:p>
+            <a:r>
+              <a:rPr/>
+              <a:t/>
+            </a:r>
+          </a:p>
+        </p:txBody>
+      </p:sp>
+      <p:sp>
+        <p:nvSpPr>
+          <p:cNvPr id="6" name="Shape 6">
+            <a:extLst>
+              <a:ext uri="{FF2B5EF4-FFF2-40B4-BE49-F238E27FC236}">
+                <a16:creationId xmlns:a16="http://schemas.microsoft.com/office/drawing/2014/main" id="{B328A199-3FA0-43FE-ADFD-1E2217678ABD}"/>
+              </a:ext>
+            </a:extLst>
+          </p:cNvPr>
+          <p:cNvSpPr/>
+          <p:nvPr/>
+        </p:nvSpPr>
+        <p:spPr>
+          <a:xfrm>
+            <a:off x="6096000" y="1619250"/>
+            <a:ext cx="19050" cy="4191000"/>
+          </a:xfrm>
+          <a:prstGeom prst="rect">
+            <a:avLst/>
+          </a:prstGeom>
+          <a:solidFill>
+            <a:srgbClr val="232A33"/>
+          </a:solidFill>
+        </p:spPr>
+        <p:txBody>
+          <a:bodyPr wrap="square" rtlCol="0"/>
+          <a:lstStyle/>
+          <a:p>
+            <a:r>
+              <a:rPr/>
+              <a:t/>
+            </a:r>
+          </a:p>
+        </p:txBody>
+      </p:sp>
+      <p:sp>
+        <p:nvSpPr>
+          <p:cNvPr id="7" name="TextBox 7">
+            <a:extLst>
+              <a:ext uri="{FF2B5EF4-FFF2-40B4-BE49-F238E27FC236}">
+                <a16:creationId xmlns:a16="http://schemas.microsoft.com/office/drawing/2014/main" id="{B0CF9E07-23C4-4094-8FF2-27EE01D7730E}"/>
+              </a:ext>
+            </a:extLst>
+          </p:cNvPr>
+          <p:cNvSpPr txBox="1"/>
+          <p:nvPr/>
+        </p:nvSpPr>
+        <p:spPr>
+          <a:xfrm>
+            <a:off x="8096250" y="3924300"/>
+            <a:ext cx="2857500" cy="228600"/>
+          </a:xfrm>
+        </p:spPr>
+        <p:txBody>
+          <a:bodyPr wrap="square" rtlCol="0" lIns="0" tIns="0" rIns="0" bIns="0" anchor="t"/>
+          <a:lstStyle/>
+          <a:p>
+            <a:pPr algn="l">
+              <a:lnSpc>
+                <a:spcPct val="110000"/>
+              </a:lnSpc>
+            </a:pPr>
+            <a:r>
+              <a:rPr sz="1200">
+                <a:solidFill>
+                  <a:srgbClr val="6B7280"/>
+                </a:solidFill>
+                <a:latin typeface="Microsoft YaHei"/>
+                <a:ea typeface="Microsoft YaHei"/>
+              </a:rPr>
+              <a:t>全链路整合（分析 → 执行） →</a:t>
+            </a:r>
+          </a:p>
+        </p:txBody>
+      </p:sp>
+      <p:sp>
+        <p:nvSpPr>
+          <p:cNvPr id="8" name="TextBox 8">
+            <a:extLst>
+              <a:ext uri="{FF2B5EF4-FFF2-40B4-BE49-F238E27FC236}">
+                <a16:creationId xmlns:a16="http://schemas.microsoft.com/office/drawing/2014/main" id="{7371159C-C0D0-4D42-99B1-1801C3023651}"/>
+              </a:ext>
+            </a:extLst>
+          </p:cNvPr>
+          <p:cNvSpPr txBox="1"/>
+          <p:nvPr/>
+        </p:nvSpPr>
+        <p:spPr>
+          <a:xfrm>
+            <a:off x="1123950" y="1600200"/>
+            <a:ext cx="1905000" cy="228600"/>
+          </a:xfrm>
+        </p:spPr>
+        <p:txBody>
+          <a:bodyPr wrap="square" rtlCol="0" lIns="0" tIns="0" rIns="0" bIns="0" anchor="t"/>
+          <a:lstStyle/>
+          <a:p>
+            <a:pPr algn="l">
+              <a:lnSpc>
+                <a:spcPct val="110000"/>
+              </a:lnSpc>
+            </a:pPr>
+            <a:r>
+              <a:rPr sz="1200">
+                <a:solidFill>
+                  <a:srgbClr val="6B7280"/>
+                </a:solidFill>
+                <a:latin typeface="Microsoft YaHei"/>
+                <a:ea typeface="Microsoft YaHei"/>
+              </a:rPr>
+              <a:t>AI 原生度 ↑</a:t>
+            </a:r>
+          </a:p>
+        </p:txBody>
+      </p:sp>
+      <p:sp>
+        <p:nvSpPr>
+          <p:cNvPr id="9" name="TextBox 9">
+            <a:extLst>
+              <a:ext uri="{FF2B5EF4-FFF2-40B4-BE49-F238E27FC236}">
+                <a16:creationId xmlns:a16="http://schemas.microsoft.com/office/drawing/2014/main" id="{F92FD14F-6118-4AD6-99A4-8705BFC96474}"/>
+              </a:ext>
+            </a:extLst>
+          </p:cNvPr>
+          <p:cNvSpPr txBox="1"/>
+          <p:nvPr/>
+        </p:nvSpPr>
+        <p:spPr>
+          <a:xfrm>
+            <a:off x="1619250" y="1866900"/>
+            <a:ext cx="2286000" cy="228600"/>
+          </a:xfrm>
+        </p:spPr>
+        <p:txBody>
+          <a:bodyPr wrap="square" rtlCol="0" lIns="0" tIns="0" rIns="0" bIns="0" anchor="t"/>
+          <a:lstStyle/>
+          <a:p>
+            <a:pPr algn="l">
+              <a:lnSpc>
+                <a:spcPct val="110000"/>
+              </a:lnSpc>
+            </a:pPr>
+            <a:r>
+              <a:rPr sz="1200">
+                <a:solidFill>
+                  <a:srgbClr val="4B5563"/>
+                </a:solidFill>
+                <a:latin typeface="Microsoft YaHei"/>
+                <a:ea typeface="Microsoft YaHei"/>
+              </a:rPr>
+              <a:t>分析工具 × AI 增强</a:t>
+            </a:r>
+          </a:p>
+        </p:txBody>
+      </p:sp>
+      <p:sp>
+        <p:nvSpPr>
+          <p:cNvPr id="10" name="TextBox 10">
+            <a:extLst>
+              <a:ext uri="{FF2B5EF4-FFF2-40B4-BE49-F238E27FC236}">
+                <a16:creationId xmlns:a16="http://schemas.microsoft.com/office/drawing/2014/main" id="{1E1E7317-D801-41E4-8D33-DBFF70D73F1B}"/>
+              </a:ext>
+            </a:extLst>
+          </p:cNvPr>
+          <p:cNvSpPr txBox="1"/>
+          <p:nvPr/>
+        </p:nvSpPr>
+        <p:spPr>
+          <a:xfrm>
+            <a:off x="6324600" y="1866900"/>
+            <a:ext cx="2286000" cy="228600"/>
+          </a:xfrm>
+        </p:spPr>
+        <p:txBody>
+          <a:bodyPr wrap="square" rtlCol="0" lIns="0" tIns="0" rIns="0" bIns="0" anchor="t"/>
+          <a:lstStyle/>
+          <a:p>
+            <a:pPr algn="l">
+              <a:lnSpc>
+                <a:spcPct val="110000"/>
+              </a:lnSpc>
+            </a:pPr>
+            <a:r>
+              <a:rPr sz="1200">
+                <a:solidFill>
+                  <a:srgbClr val="4B5563"/>
+                </a:solidFill>
+                <a:latin typeface="Microsoft YaHei"/>
+                <a:ea typeface="Microsoft YaHei"/>
+              </a:rPr>
+              <a:t>全链路 × AI 原生</a:t>
+            </a:r>
+          </a:p>
+        </p:txBody>
+      </p:sp>
+      <p:sp>
+        <p:nvSpPr>
+          <p:cNvPr id="11" name="TextBox 11">
+            <a:extLst>
+              <a:ext uri="{FF2B5EF4-FFF2-40B4-BE49-F238E27FC236}">
+                <a16:creationId xmlns:a16="http://schemas.microsoft.com/office/drawing/2014/main" id="{67EC50CF-EC20-4347-9424-951E9DB47968}"/>
+              </a:ext>
+            </a:extLst>
+          </p:cNvPr>
+          <p:cNvSpPr txBox="1"/>
+          <p:nvPr/>
+        </p:nvSpPr>
+        <p:spPr>
+          <a:xfrm>
+            <a:off x="1619250" y="5467350"/>
+            <a:ext cx="2286000" cy="228600"/>
+          </a:xfrm>
+        </p:spPr>
+        <p:txBody>
+          <a:bodyPr wrap="square" rtlCol="0" lIns="0" tIns="0" rIns="0" bIns="0" anchor="t"/>
+          <a:lstStyle/>
+          <a:p>
+            <a:pPr algn="l">
+              <a:lnSpc>
+                <a:spcPct val="110000"/>
+              </a:lnSpc>
+            </a:pPr>
+            <a:r>
+              <a:rPr sz="1200">
+                <a:solidFill>
+                  <a:srgbClr val="4B5563"/>
+                </a:solidFill>
+                <a:latin typeface="Microsoft YaHei"/>
+                <a:ea typeface="Microsoft YaHei"/>
+              </a:rPr>
+              <a:t>单点工具 × 传统</a:t>
+            </a:r>
+          </a:p>
+        </p:txBody>
+      </p:sp>
+      <p:sp>
+        <p:nvSpPr>
+          <p:cNvPr id="12" name="TextBox 12">
+            <a:extLst>
+              <a:ext uri="{FF2B5EF4-FFF2-40B4-BE49-F238E27FC236}">
+                <a16:creationId xmlns:a16="http://schemas.microsoft.com/office/drawing/2014/main" id="{D078BCF4-B076-42CA-AB2C-5B07AD3B4D27}"/>
+              </a:ext>
+            </a:extLst>
+          </p:cNvPr>
+          <p:cNvSpPr txBox="1"/>
+          <p:nvPr/>
+        </p:nvSpPr>
+        <p:spPr>
+          <a:xfrm>
+            <a:off x="6324600" y="5467350"/>
+            <a:ext cx="2286000" cy="228600"/>
+          </a:xfrm>
+        </p:spPr>
+        <p:txBody>
+          <a:bodyPr wrap="square" rtlCol="0" lIns="0" tIns="0" rIns="0" bIns="0" anchor="t"/>
+          <a:lstStyle/>
+          <a:p>
+            <a:pPr algn="l">
+              <a:lnSpc>
+                <a:spcPct val="110000"/>
+              </a:lnSpc>
+            </a:pPr>
+            <a:r>
+              <a:rPr sz="1200">
+                <a:solidFill>
+                  <a:srgbClr val="4B5563"/>
+                </a:solidFill>
+                <a:latin typeface="Microsoft YaHei"/>
+                <a:ea typeface="Microsoft YaHei"/>
+              </a:rPr>
+              <a:t>自动执行 × AI 弱</a:t>
+            </a:r>
+          </a:p>
+        </p:txBody>
+      </p:sp>
+      <p:sp>
+        <p:nvSpPr>
+          <p:cNvPr id="13" name="Shape 13">
+            <a:extLst>
+              <a:ext uri="{FF2B5EF4-FFF2-40B4-BE49-F238E27FC236}">
+                <a16:creationId xmlns:a16="http://schemas.microsoft.com/office/drawing/2014/main" id="{216FD771-0754-4301-A5DF-43038D11295B}"/>
+              </a:ext>
+            </a:extLst>
+          </p:cNvPr>
+          <p:cNvSpPr/>
+          <p:nvPr/>
+        </p:nvSpPr>
+        <p:spPr>
+          <a:xfrm>
+            <a:off x="2381250" y="2343150"/>
+            <a:ext cx="2190750" cy="742950"/>
           </a:xfrm>
           <a:prstGeom prst="roundRect">
             <a:avLst/>
@@ -8628,10 +8701,10 @@
       </p:sp>
       <p:sp>
         <p:nvSpPr>
-          <p:cNvPr id="6" name="Shape 6">
-            <a:extLst>
-              <a:ext uri="{FF2B5EF4-FFF2-40B4-BE49-F238E27FC236}">
-                <a16:creationId xmlns:a16="http://schemas.microsoft.com/office/drawing/2014/main" id="{4FD90847-373E-4798-B9FD-78D7B40FD102}"/>
+          <p:cNvPr id="14" name="Shape 14">
+            <a:extLst>
+              <a:ext uri="{FF2B5EF4-FFF2-40B4-BE49-F238E27FC236}">
+                <a16:creationId xmlns:a16="http://schemas.microsoft.com/office/drawing/2014/main" id="{17375B0E-0998-40BF-A16A-FC578E879953}"/>
               </a:ext>
             </a:extLst>
           </p:cNvPr>
@@ -8640,8 +8713,8 @@
         </p:nvSpPr>
         <p:spPr>
           <a:xfrm>
-            <a:off x="6286500" y="1619250"/>
-            <a:ext cx="5219700" cy="3810000"/>
+            <a:off x="2381250" y="4476750"/>
+            <a:ext cx="2190750" cy="742950"/>
           </a:xfrm>
           <a:prstGeom prst="roundRect">
             <a:avLst/>
@@ -8651,6 +8724,86 @@
           </a:solidFill>
           <a:ln w="12700">
             <a:solidFill>
+              <a:srgbClr val="232A33"/>
+            </a:solidFill>
+          </a:ln>
+        </p:spPr>
+        <p:txBody>
+          <a:bodyPr wrap="square" rtlCol="0"/>
+          <a:lstStyle/>
+          <a:p>
+            <a:r>
+              <a:rPr/>
+              <a:t/>
+            </a:r>
+          </a:p>
+        </p:txBody>
+      </p:sp>
+      <p:sp>
+        <p:nvSpPr>
+          <p:cNvPr id="15" name="Shape 15">
+            <a:extLst>
+              <a:ext uri="{FF2B5EF4-FFF2-40B4-BE49-F238E27FC236}">
+                <a16:creationId xmlns:a16="http://schemas.microsoft.com/office/drawing/2014/main" id="{6BF2A567-19E2-478A-9C60-30D3F7DF9040}"/>
+              </a:ext>
+            </a:extLst>
+          </p:cNvPr>
+          <p:cNvSpPr/>
+          <p:nvPr/>
+        </p:nvSpPr>
+        <p:spPr>
+          <a:xfrm>
+            <a:off x="7734300" y="2343150"/>
+            <a:ext cx="2190750" cy="742950"/>
+          </a:xfrm>
+          <a:prstGeom prst="roundRect">
+            <a:avLst/>
+          </a:prstGeom>
+          <a:solidFill>
+            <a:srgbClr val="14181F"/>
+          </a:solidFill>
+          <a:ln w="12700">
+            <a:solidFill>
+              <a:srgbClr val="232A33"/>
+            </a:solidFill>
+          </a:ln>
+        </p:spPr>
+        <p:txBody>
+          <a:bodyPr wrap="square" rtlCol="0"/>
+          <a:lstStyle/>
+          <a:p>
+            <a:r>
+              <a:rPr/>
+              <a:t/>
+            </a:r>
+          </a:p>
+        </p:txBody>
+      </p:sp>
+      <p:sp>
+        <p:nvSpPr>
+          <p:cNvPr id="16" name="Shape 16">
+            <a:extLst>
+              <a:ext uri="{FF2B5EF4-FFF2-40B4-BE49-F238E27FC236}">
+                <a16:creationId xmlns:a16="http://schemas.microsoft.com/office/drawing/2014/main" id="{06B6EF63-7562-4325-B22D-DDADE16B4D47}"/>
+              </a:ext>
+            </a:extLst>
+          </p:cNvPr>
+          <p:cNvSpPr/>
+          <p:nvPr/>
+        </p:nvSpPr>
+        <p:spPr>
+          <a:xfrm>
+            <a:off x="7734300" y="4476750"/>
+            <a:ext cx="2190750" cy="742950"/>
+          </a:xfrm>
+          <a:prstGeom prst="roundRect">
+            <a:avLst/>
+          </a:prstGeom>
+          <a:solidFill>
+            <a:srgbClr val="14181F"/>
+          </a:solidFill>
+          <a:ln w="19050">
+            <a:solidFill>
               <a:srgbClr val="63E2B7"/>
             </a:solidFill>
           </a:ln>
@@ -8668,100 +8821,60 @@
       </p:sp>
       <p:sp>
         <p:nvSpPr>
-          <p:cNvPr id="7" name="TextBox 7">
-            <a:extLst>
-              <a:ext uri="{FF2B5EF4-FFF2-40B4-BE49-F238E27FC236}">
-                <a16:creationId xmlns:a16="http://schemas.microsoft.com/office/drawing/2014/main" id="{1F24E284-7AC6-455B-A994-2FA3C21E716B}"/>
-              </a:ext>
-            </a:extLst>
-          </p:cNvPr>
-          <p:cNvSpPr txBox="1"/>
-          <p:nvPr/>
-        </p:nvSpPr>
-        <p:spPr>
-          <a:xfrm>
-            <a:off x="990600" y="1866900"/>
-            <a:ext cx="4572000" cy="342900"/>
-          </a:xfrm>
-        </p:spPr>
-        <p:txBody>
-          <a:bodyPr wrap="square" rtlCol="0" lIns="0" tIns="0" rIns="0" bIns="0" anchor="t"/>
-          <a:lstStyle/>
-          <a:p>
-            <a:pPr algn="l">
-              <a:lnSpc>
-                <a:spcPct val="110000"/>
-              </a:lnSpc>
-            </a:pPr>
-            <a:r>
-              <a:rPr sz="2000" b="1">
-                <a:solidFill>
-                  <a:srgbClr val="8FB8FF"/>
-                </a:solidFill>
-                <a:latin typeface="Microsoft YaHei"/>
-                <a:ea typeface="Microsoft YaHei"/>
-              </a:rPr>
-              <a:t>行业现状</a:t>
-            </a:r>
-          </a:p>
-        </p:txBody>
-      </p:sp>
-      <p:sp>
-        <p:nvSpPr>
-          <p:cNvPr id="8" name="TextBox 8">
-            <a:extLst>
-              <a:ext uri="{FF2B5EF4-FFF2-40B4-BE49-F238E27FC236}">
-                <a16:creationId xmlns:a16="http://schemas.microsoft.com/office/drawing/2014/main" id="{9A346E20-A090-40D2-81BF-E8BC2820B69F}"/>
-              </a:ext>
-            </a:extLst>
-          </p:cNvPr>
-          <p:cNvSpPr txBox="1"/>
-          <p:nvPr/>
-        </p:nvSpPr>
-        <p:spPr>
-          <a:xfrm>
-            <a:off x="990600" y="2343150"/>
-            <a:ext cx="4572000" cy="569976"/>
-          </a:xfrm>
-        </p:spPr>
-        <p:txBody>
-          <a:bodyPr wrap="square" rtlCol="0" lIns="0" tIns="0" rIns="0" bIns="0" anchor="t"/>
-          <a:lstStyle/>
-          <a:p>
-            <a:pPr algn="l">
-              <a:lnSpc>
-                <a:spcPct val="110000"/>
-              </a:lnSpc>
-            </a:pPr>
-            <a:r>
-              <a:rPr sz="3400" b="1">
+          <p:cNvPr id="17" name="TextBox 17">
+            <a:extLst>
+              <a:ext uri="{FF2B5EF4-FFF2-40B4-BE49-F238E27FC236}">
+                <a16:creationId xmlns:a16="http://schemas.microsoft.com/office/drawing/2014/main" id="{4CB846C1-98DB-4492-AF86-4129E861E4AA}"/>
+              </a:ext>
+            </a:extLst>
+          </p:cNvPr>
+          <p:cNvSpPr txBox="1"/>
+          <p:nvPr/>
+        </p:nvSpPr>
+        <p:spPr>
+          <a:xfrm>
+            <a:off x="2552700" y="2438400"/>
+            <a:ext cx="1905000" cy="266700"/>
+          </a:xfrm>
+        </p:spPr>
+        <p:txBody>
+          <a:bodyPr wrap="square" rtlCol="0" lIns="0" tIns="0" rIns="0" bIns="0" anchor="t"/>
+          <a:lstStyle/>
+          <a:p>
+            <a:pPr algn="l">
+              <a:lnSpc>
+                <a:spcPct val="110000"/>
+              </a:lnSpc>
+            </a:pPr>
+            <a:r>
+              <a:rPr sz="1500" b="1">
                 <a:solidFill>
                   <a:srgbClr val="E8EAED"/>
                 </a:solidFill>
                 <a:latin typeface="Arial"/>
                 <a:ea typeface="Arial"/>
               </a:rPr>
-              <a:t>47–53%</a:t>
-            </a:r>
-          </a:p>
-        </p:txBody>
-      </p:sp>
-      <p:sp>
-        <p:nvSpPr>
-          <p:cNvPr id="9" name="TextBox 9">
-            <a:extLst>
-              <a:ext uri="{FF2B5EF4-FFF2-40B4-BE49-F238E27FC236}">
-                <a16:creationId xmlns:a16="http://schemas.microsoft.com/office/drawing/2014/main" id="{967670CD-7756-43AF-8933-A0A8FE934F1B}"/>
-              </a:ext>
-            </a:extLst>
-          </p:cNvPr>
-          <p:cNvSpPr txBox="1"/>
-          <p:nvPr/>
-        </p:nvSpPr>
-        <p:spPr>
-          <a:xfrm>
-            <a:off x="990600" y="2914650"/>
-            <a:ext cx="4572000" cy="419100"/>
+              <a:t>TradingView</a:t>
+            </a:r>
+          </a:p>
+        </p:txBody>
+      </p:sp>
+      <p:sp>
+        <p:nvSpPr>
+          <p:cNvPr id="18" name="TextBox 18">
+            <a:extLst>
+              <a:ext uri="{FF2B5EF4-FFF2-40B4-BE49-F238E27FC236}">
+                <a16:creationId xmlns:a16="http://schemas.microsoft.com/office/drawing/2014/main" id="{7D1D0C4D-2048-4592-AA16-26E421C74854}"/>
+              </a:ext>
+            </a:extLst>
+          </p:cNvPr>
+          <p:cNvSpPr txBox="1"/>
+          <p:nvPr/>
+        </p:nvSpPr>
+        <p:spPr>
+          <a:xfrm>
+            <a:off x="2552700" y="2705100"/>
+            <a:ext cx="1905000" cy="455676"/>
           </a:xfrm>
         </p:spPr>
         <p:txBody>
@@ -8774,74 +8887,74 @@
               </a:lnSpc>
             </a:pPr>
             <a:r>
-              <a:rPr sz="1250">
+              <a:rPr sz="1150">
                 <a:solidFill>
                   <a:srgbClr val="9AA1AB"/>
                 </a:solidFill>
                 <a:latin typeface="Microsoft YaHei"/>
                 <a:ea typeface="Microsoft YaHei"/>
               </a:rPr>
-              <a:t>的组织遭遇过 AI Agent 越权或安全事故（DevSecOps 2026）</a:t>
-            </a:r>
-          </a:p>
-        </p:txBody>
-      </p:sp>
-      <p:sp>
-        <p:nvSpPr>
-          <p:cNvPr id="10" name="TextBox 10">
-            <a:extLst>
-              <a:ext uri="{FF2B5EF4-FFF2-40B4-BE49-F238E27FC236}">
-                <a16:creationId xmlns:a16="http://schemas.microsoft.com/office/drawing/2014/main" id="{E791701B-15D3-4DE9-B28B-D2554230357A}"/>
-              </a:ext>
-            </a:extLst>
-          </p:cNvPr>
-          <p:cNvSpPr txBox="1"/>
-          <p:nvPr/>
-        </p:nvSpPr>
-        <p:spPr>
-          <a:xfrm>
-            <a:off x="990600" y="3429000"/>
-            <a:ext cx="4572000" cy="569976"/>
-          </a:xfrm>
-        </p:spPr>
-        <p:txBody>
-          <a:bodyPr wrap="square" rtlCol="0" lIns="0" tIns="0" rIns="0" bIns="0" anchor="t"/>
-          <a:lstStyle/>
-          <a:p>
-            <a:pPr algn="l">
-              <a:lnSpc>
-                <a:spcPct val="110000"/>
-              </a:lnSpc>
-            </a:pPr>
-            <a:r>
-              <a:rPr sz="3400" b="1">
+              <a:t>图表分析霸主 · 不执行 · AI 局部</a:t>
+            </a:r>
+          </a:p>
+        </p:txBody>
+      </p:sp>
+      <p:sp>
+        <p:nvSpPr>
+          <p:cNvPr id="19" name="TextBox 19">
+            <a:extLst>
+              <a:ext uri="{FF2B5EF4-FFF2-40B4-BE49-F238E27FC236}">
+                <a16:creationId xmlns:a16="http://schemas.microsoft.com/office/drawing/2014/main" id="{0C37C7DF-5E21-43FB-AB83-7C02E7E05794}"/>
+              </a:ext>
+            </a:extLst>
+          </p:cNvPr>
+          <p:cNvSpPr txBox="1"/>
+          <p:nvPr/>
+        </p:nvSpPr>
+        <p:spPr>
+          <a:xfrm>
+            <a:off x="2552700" y="4572000"/>
+            <a:ext cx="1905000" cy="266700"/>
+          </a:xfrm>
+        </p:spPr>
+        <p:txBody>
+          <a:bodyPr wrap="square" rtlCol="0" lIns="0" tIns="0" rIns="0" bIns="0" anchor="t"/>
+          <a:lstStyle/>
+          <a:p>
+            <a:pPr algn="l">
+              <a:lnSpc>
+                <a:spcPct val="110000"/>
+              </a:lnSpc>
+            </a:pPr>
+            <a:r>
+              <a:rPr sz="1500" b="1">
                 <a:solidFill>
                   <a:srgbClr val="E8EAED"/>
                 </a:solidFill>
                 <a:latin typeface="Arial"/>
                 <a:ea typeface="Arial"/>
               </a:rPr>
-              <a:t>~23%</a:t>
-            </a:r>
-          </a:p>
-        </p:txBody>
-      </p:sp>
-      <p:sp>
-        <p:nvSpPr>
-          <p:cNvPr id="11" name="TextBox 11">
-            <a:extLst>
-              <a:ext uri="{FF2B5EF4-FFF2-40B4-BE49-F238E27FC236}">
-                <a16:creationId xmlns:a16="http://schemas.microsoft.com/office/drawing/2014/main" id="{51DDC25F-469E-4EE1-A1BE-A04FE4867EAD}"/>
-              </a:ext>
-            </a:extLst>
-          </p:cNvPr>
-          <p:cNvSpPr txBox="1"/>
-          <p:nvPr/>
-        </p:nvSpPr>
-        <p:spPr>
-          <a:xfrm>
-            <a:off x="990600" y="4000500"/>
-            <a:ext cx="4572000" cy="419100"/>
+              <a:t>QuantConnect</a:t>
+            </a:r>
+          </a:p>
+        </p:txBody>
+      </p:sp>
+      <p:sp>
+        <p:nvSpPr>
+          <p:cNvPr id="20" name="TextBox 20">
+            <a:extLst>
+              <a:ext uri="{FF2B5EF4-FFF2-40B4-BE49-F238E27FC236}">
+                <a16:creationId xmlns:a16="http://schemas.microsoft.com/office/drawing/2014/main" id="{461C76B2-6E2D-42C1-8196-0A975EBC2A12}"/>
+              </a:ext>
+            </a:extLst>
+          </p:cNvPr>
+          <p:cNvSpPr txBox="1"/>
+          <p:nvPr/>
+        </p:nvSpPr>
+        <p:spPr>
+          <a:xfrm>
+            <a:off x="2552700" y="4838700"/>
+            <a:ext cx="1905000" cy="455676"/>
           </a:xfrm>
         </p:spPr>
         <p:txBody>
@@ -8854,74 +8967,74 @@
               </a:lnSpc>
             </a:pPr>
             <a:r>
-              <a:rPr sz="1250">
+              <a:rPr sz="1150">
                 <a:solidFill>
                   <a:srgbClr val="9AA1AB"/>
                 </a:solidFill>
                 <a:latin typeface="Microsoft YaHei"/>
                 <a:ea typeface="Microsoft YaHei"/>
               </a:rPr>
-              <a:t>的组织建立了正式的 AI Agent 身份体系</a:t>
-            </a:r>
-          </a:p>
-        </p:txBody>
-      </p:sp>
-      <p:sp>
-        <p:nvSpPr>
-          <p:cNvPr id="12" name="TextBox 12">
-            <a:extLst>
-              <a:ext uri="{FF2B5EF4-FFF2-40B4-BE49-F238E27FC236}">
-                <a16:creationId xmlns:a16="http://schemas.microsoft.com/office/drawing/2014/main" id="{7E8239C7-1A94-411B-8F9A-2ADC415B71C1}"/>
-              </a:ext>
-            </a:extLst>
-          </p:cNvPr>
-          <p:cNvSpPr txBox="1"/>
-          <p:nvPr/>
-        </p:nvSpPr>
-        <p:spPr>
-          <a:xfrm>
-            <a:off x="990600" y="4514850"/>
-            <a:ext cx="4572000" cy="569976"/>
-          </a:xfrm>
-        </p:spPr>
-        <p:txBody>
-          <a:bodyPr wrap="square" rtlCol="0" lIns="0" tIns="0" rIns="0" bIns="0" anchor="t"/>
-          <a:lstStyle/>
-          <a:p>
-            <a:pPr algn="l">
-              <a:lnSpc>
-                <a:spcPct val="110000"/>
-              </a:lnSpc>
-            </a:pPr>
-            <a:r>
-              <a:rPr sz="3400" b="1">
+              <a:t>机构级引擎 · 工程师门槛 · AI 局部</a:t>
+            </a:r>
+          </a:p>
+        </p:txBody>
+      </p:sp>
+      <p:sp>
+        <p:nvSpPr>
+          <p:cNvPr id="21" name="TextBox 21">
+            <a:extLst>
+              <a:ext uri="{FF2B5EF4-FFF2-40B4-BE49-F238E27FC236}">
+                <a16:creationId xmlns:a16="http://schemas.microsoft.com/office/drawing/2014/main" id="{D35566BB-0020-408E-9526-FAD098B3176A}"/>
+              </a:ext>
+            </a:extLst>
+          </p:cNvPr>
+          <p:cNvSpPr txBox="1"/>
+          <p:nvPr/>
+        </p:nvSpPr>
+        <p:spPr>
+          <a:xfrm>
+            <a:off x="7905750" y="2457450"/>
+            <a:ext cx="1962150" cy="247650"/>
+          </a:xfrm>
+        </p:spPr>
+        <p:txBody>
+          <a:bodyPr wrap="square" rtlCol="0" lIns="0" tIns="0" rIns="0" bIns="0" anchor="t"/>
+          <a:lstStyle/>
+          <a:p>
+            <a:pPr algn="l">
+              <a:lnSpc>
+                <a:spcPct val="110000"/>
+              </a:lnSpc>
+            </a:pPr>
+            <a:r>
+              <a:rPr sz="1350" b="1">
                 <a:solidFill>
                   <a:srgbClr val="E8EAED"/>
                 </a:solidFill>
                 <a:latin typeface="Arial"/>
                 <a:ea typeface="Arial"/>
               </a:rPr>
-              <a:t>0</a:t>
-            </a:r>
-          </a:p>
-        </p:txBody>
-      </p:sp>
-      <p:sp>
-        <p:nvSpPr>
-          <p:cNvPr id="13" name="TextBox 13">
-            <a:extLst>
-              <a:ext uri="{FF2B5EF4-FFF2-40B4-BE49-F238E27FC236}">
-                <a16:creationId xmlns:a16="http://schemas.microsoft.com/office/drawing/2014/main" id="{159AE6E9-4B85-4AB4-A30E-218077900611}"/>
-              </a:ext>
-            </a:extLst>
-          </p:cNvPr>
-          <p:cNvSpPr txBox="1"/>
-          <p:nvPr/>
-        </p:nvSpPr>
-        <p:spPr>
-          <a:xfrm>
-            <a:off x="990600" y="5086350"/>
-            <a:ext cx="4572000" cy="419100"/>
+              <a:t>3Commas / Composer</a:t>
+            </a:r>
+          </a:p>
+        </p:txBody>
+      </p:sp>
+      <p:sp>
+        <p:nvSpPr>
+          <p:cNvPr id="22" name="TextBox 22">
+            <a:extLst>
+              <a:ext uri="{FF2B5EF4-FFF2-40B4-BE49-F238E27FC236}">
+                <a16:creationId xmlns:a16="http://schemas.microsoft.com/office/drawing/2014/main" id="{69A90CEC-DC82-451C-B74F-581C9B4F29E6}"/>
+              </a:ext>
+            </a:extLst>
+          </p:cNvPr>
+          <p:cNvSpPr txBox="1"/>
+          <p:nvPr/>
+        </p:nvSpPr>
+        <p:spPr>
+          <a:xfrm>
+            <a:off x="7905750" y="2705100"/>
+            <a:ext cx="1962150" cy="381000"/>
           </a:xfrm>
         </p:spPr>
         <p:txBody>
@@ -8934,98 +9047,125 @@
               </a:lnSpc>
             </a:pPr>
             <a:r>
-              <a:rPr sz="1250">
+              <a:rPr sz="1150">
                 <a:solidFill>
                   <a:srgbClr val="9AA1AB"/>
                 </a:solidFill>
                 <a:latin typeface="Microsoft YaHei"/>
                 <a:ea typeface="Microsoft YaHei"/>
               </a:rPr>
-              <a:t>现成的「交易级」Agent 安全方案</a:t>
-            </a:r>
-          </a:p>
-        </p:txBody>
-      </p:sp>
-      <p:sp>
-        <p:nvSpPr>
-          <p:cNvPr id="14" name="TextBox 14">
-            <a:extLst>
-              <a:ext uri="{FF2B5EF4-FFF2-40B4-BE49-F238E27FC236}">
-                <a16:creationId xmlns:a16="http://schemas.microsoft.com/office/drawing/2014/main" id="{8C0FDB38-037B-4ABB-9828-E06DC5E291FB}"/>
-              </a:ext>
-            </a:extLst>
-          </p:cNvPr>
-          <p:cNvSpPr txBox="1"/>
-          <p:nvPr/>
-        </p:nvSpPr>
-        <p:spPr>
-          <a:xfrm>
-            <a:off x="6591300" y="1866900"/>
-            <a:ext cx="4572000" cy="342900"/>
-          </a:xfrm>
-        </p:spPr>
-        <p:txBody>
-          <a:bodyPr wrap="square" rtlCol="0" lIns="0" tIns="0" rIns="0" bIns="0" anchor="t"/>
-          <a:lstStyle/>
-          <a:p>
-            <a:pPr algn="l">
-              <a:lnSpc>
-                <a:spcPct val="110000"/>
-              </a:lnSpc>
-            </a:pPr>
-            <a:r>
-              <a:rPr sz="2000" b="1">
+              <a:t>单市场自动化 · AI 弱</a:t>
+            </a:r>
+          </a:p>
+        </p:txBody>
+      </p:sp>
+      <p:sp>
+        <p:nvSpPr>
+          <p:cNvPr id="23" name="TextBox 23">
+            <a:extLst>
+              <a:ext uri="{FF2B5EF4-FFF2-40B4-BE49-F238E27FC236}">
+                <a16:creationId xmlns:a16="http://schemas.microsoft.com/office/drawing/2014/main" id="{B4AED810-1CB6-4443-B7F4-B41BCABC4D02}"/>
+              </a:ext>
+            </a:extLst>
+          </p:cNvPr>
+          <p:cNvSpPr txBox="1"/>
+          <p:nvPr/>
+        </p:nvSpPr>
+        <p:spPr>
+          <a:xfrm>
+            <a:off x="7905750" y="4572000"/>
+            <a:ext cx="1905000" cy="266700"/>
+          </a:xfrm>
+        </p:spPr>
+        <p:txBody>
+          <a:bodyPr wrap="square" rtlCol="0" lIns="0" tIns="0" rIns="0" bIns="0" anchor="t"/>
+          <a:lstStyle/>
+          <a:p>
+            <a:pPr algn="l">
+              <a:lnSpc>
+                <a:spcPct val="110000"/>
+              </a:lnSpc>
+            </a:pPr>
+            <a:r>
+              <a:rPr sz="1500" b="1">
                 <a:solidFill>
                   <a:srgbClr val="63E2B7"/>
                 </a:solidFill>
-                <a:latin typeface="Microsoft YaHei"/>
-                <a:ea typeface="Microsoft YaHei"/>
-              </a:rPr>
-              <a:t>SharkQuant Agent Gateway（已上线）</a:t>
-            </a:r>
-          </a:p>
-        </p:txBody>
-      </p:sp>
-      <p:sp>
-        <p:nvSpPr>
-          <p:cNvPr id="15" name="TextBox 15">
-            <a:extLst>
-              <a:ext uri="{FF2B5EF4-FFF2-40B4-BE49-F238E27FC236}">
-                <a16:creationId xmlns:a16="http://schemas.microsoft.com/office/drawing/2014/main" id="{DA591504-9936-4227-88C1-D4978C72678C}"/>
-              </a:ext>
-            </a:extLst>
-          </p:cNvPr>
-          <p:cNvSpPr txBox="1"/>
-          <p:nvPr/>
-        </p:nvSpPr>
-        <p:spPr>
-          <a:xfrm>
-            <a:off x="6591300" y="2457450"/>
-            <a:ext cx="4610100" cy="2913888"/>
-          </a:xfrm>
-        </p:spPr>
-        <p:txBody>
-          <a:bodyPr wrap="square" rtlCol="0" lIns="0" tIns="0" rIns="0" bIns="0" anchor="t"/>
-          <a:lstStyle/>
-          <a:p>
-            <a:pPr algn="l">
-              <a:lnSpc>
-                <a:spcPct val="140000"/>
-              </a:lnSpc>
-              <a:spcAft>
-                <a:spcPts val="1600"/>
-              </a:spcAft>
-            </a:pPr>
-            <a:r>
-              <a:rPr sz="1400" b="1">
-                <a:solidFill>
-                  <a:srgbClr val="E8EAED"/>
-                </a:solidFill>
-                <a:latin typeface="Microsoft YaHei"/>
-                <a:ea typeface="Microsoft YaHei"/>
-              </a:rPr>
-              <a:t>58 个 MCP 工具</a:t>
-            </a:r>
+                <a:latin typeface="Arial"/>
+                <a:ea typeface="Arial"/>
+              </a:rPr>
+              <a:t>SharkQuant</a:t>
+            </a:r>
+          </a:p>
+        </p:txBody>
+      </p:sp>
+      <p:sp>
+        <p:nvSpPr>
+          <p:cNvPr id="24" name="TextBox 24">
+            <a:extLst>
+              <a:ext uri="{FF2B5EF4-FFF2-40B4-BE49-F238E27FC236}">
+                <a16:creationId xmlns:a16="http://schemas.microsoft.com/office/drawing/2014/main" id="{0A164A33-DA42-4274-B006-5E4C7E0B8EE7}"/>
+              </a:ext>
+            </a:extLst>
+          </p:cNvPr>
+          <p:cNvSpPr txBox="1"/>
+          <p:nvPr/>
+        </p:nvSpPr>
+        <p:spPr>
+          <a:xfrm>
+            <a:off x="7905750" y="4838700"/>
+            <a:ext cx="1905000" cy="381000"/>
+          </a:xfrm>
+        </p:spPr>
+        <p:txBody>
+          <a:bodyPr wrap="square" rtlCol="0" lIns="0" tIns="0" rIns="0" bIns="0" anchor="t"/>
+          <a:lstStyle/>
+          <a:p>
+            <a:pPr algn="l">
+              <a:lnSpc>
+                <a:spcPct val="130000"/>
+              </a:lnSpc>
+            </a:pPr>
+            <a:r>
+              <a:rPr sz="1150">
+                <a:solidFill>
+                  <a:srgbClr val="9AA1AB"/>
+                </a:solidFill>
+                <a:latin typeface="Microsoft YaHei"/>
+                <a:ea typeface="Microsoft YaHei"/>
+              </a:rPr>
+              <a:t>全链路 · AI 原生 · Agent 开放</a:t>
+            </a:r>
+          </a:p>
+        </p:txBody>
+      </p:sp>
+      <p:sp>
+        <p:nvSpPr>
+          <p:cNvPr id="25" name="TextBox 25">
+            <a:extLst>
+              <a:ext uri="{FF2B5EF4-FFF2-40B4-BE49-F238E27FC236}">
+                <a16:creationId xmlns:a16="http://schemas.microsoft.com/office/drawing/2014/main" id="{4E1E44BF-E7D2-4557-B68D-B18B35BE458A}"/>
+              </a:ext>
+            </a:extLst>
+          </p:cNvPr>
+          <p:cNvSpPr txBox="1"/>
+          <p:nvPr/>
+        </p:nvSpPr>
+        <p:spPr>
+          <a:xfrm>
+            <a:off x="685800" y="6286500"/>
+            <a:ext cx="10820400" cy="247650"/>
+          </a:xfrm>
+        </p:spPr>
+        <p:txBody>
+          <a:bodyPr wrap="square" rtlCol="0" lIns="0" tIns="0" rIns="0" bIns="0" anchor="t"/>
+          <a:lstStyle/>
+          <a:p>
+            <a:pPr algn="l">
+              <a:lnSpc>
+                <a:spcPct val="110000"/>
+              </a:lnSpc>
+            </a:pPr>
             <a:r>
               <a:rPr sz="1300">
                 <a:solidFill>
@@ -9034,147 +9174,7 @@
                 <a:latin typeface="Microsoft YaHei"/>
                 <a:ea typeface="Microsoft YaHei"/>
               </a:rPr>
-              <a:t>——把行情、回测、模拟交易全部开放给 Cursor / Claude Code / Codex</a:t>
-            </a:r>
-          </a:p>
-          <a:p>
-            <a:pPr algn="l">
-              <a:lnSpc>
-                <a:spcPct val="140000"/>
-              </a:lnSpc>
-              <a:spcAft>
-                <a:spcPts val="1600"/>
-              </a:spcAft>
-            </a:pPr>
-            <a:r>
-              <a:rPr sz="1400" b="1">
-                <a:solidFill>
-                  <a:srgbClr val="E8EAED"/>
-                </a:solidFill>
-                <a:latin typeface="Microsoft YaHei"/>
-                <a:ea typeface="Microsoft YaHei"/>
-              </a:rPr>
-              <a:t>默认仅模拟盘</a:t>
-            </a:r>
-            <a:r>
-              <a:rPr sz="1300">
-                <a:solidFill>
-                  <a:srgbClr val="9AA1AB"/>
-                </a:solidFill>
-                <a:latin typeface="Microsoft YaHei"/>
-                <a:ea typeface="Microsoft YaHei"/>
-              </a:rPr>
-              <a:t>——实盘需权限、授权、风险确认、非默认模式 4 个条件同时满足</a:t>
-            </a:r>
-          </a:p>
-          <a:p>
-            <a:pPr algn="l">
-              <a:lnSpc>
-                <a:spcPct val="140000"/>
-              </a:lnSpc>
-              <a:spcAft>
-                <a:spcPts val="1600"/>
-              </a:spcAft>
-            </a:pPr>
-            <a:r>
-              <a:rPr sz="1400" b="1">
-                <a:solidFill>
-                  <a:srgbClr val="E8EAED"/>
-                </a:solidFill>
-                <a:latin typeface="Microsoft YaHei"/>
-                <a:ea typeface="Microsoft YaHei"/>
-              </a:rPr>
-              <a:t>五类权限范围</a:t>
-            </a:r>
-            <a:r>
-              <a:rPr sz="1300">
-                <a:solidFill>
-                  <a:srgbClr val="9AA1AB"/>
-                </a:solidFill>
-                <a:latin typeface="Microsoft YaHei"/>
-                <a:ea typeface="Microsoft YaHei"/>
-              </a:rPr>
-              <a:t>——读写/交易/通知/额度/实盘分级，默认限流 60 次/分钟</a:t>
-            </a:r>
-          </a:p>
-          <a:p>
-            <a:pPr algn="l">
-              <a:lnSpc>
-                <a:spcPct val="140000"/>
-              </a:lnSpc>
-              <a:spcAft>
-                <a:spcPts val="0"/>
-              </a:spcAft>
-            </a:pPr>
-            <a:r>
-              <a:rPr sz="1400" b="1">
-                <a:solidFill>
-                  <a:srgbClr val="E8EAED"/>
-                </a:solidFill>
-                <a:latin typeface="Microsoft YaHei"/>
-                <a:ea typeface="Microsoft YaHei"/>
-              </a:rPr>
-              <a:t>全量操作审计</a:t>
-            </a:r>
-            <a:r>
-              <a:rPr sz="1300">
-                <a:solidFill>
-                  <a:srgbClr val="9AA1AB"/>
-                </a:solidFill>
-                <a:latin typeface="Microsoft YaHei"/>
-                <a:ea typeface="Microsoft YaHei"/>
-              </a:rPr>
-              <a:t>——每一笔 Agent 动作可回溯，资金安全优先于便利</a:t>
-            </a:r>
-          </a:p>
-        </p:txBody>
-      </p:sp>
-      <p:sp>
-        <p:nvSpPr>
-          <p:cNvPr id="16" name="TextBox 16">
-            <a:extLst>
-              <a:ext uri="{FF2B5EF4-FFF2-40B4-BE49-F238E27FC236}">
-                <a16:creationId xmlns:a16="http://schemas.microsoft.com/office/drawing/2014/main" id="{FF195489-D503-45F5-8F6F-520B48F50F95}"/>
-              </a:ext>
-            </a:extLst>
-          </p:cNvPr>
-          <p:cNvSpPr txBox="1"/>
-          <p:nvPr/>
-        </p:nvSpPr>
-        <p:spPr>
-          <a:xfrm>
-            <a:off x="685800" y="5772150"/>
-            <a:ext cx="10820400" cy="266700"/>
-          </a:xfrm>
-        </p:spPr>
-        <p:txBody>
-          <a:bodyPr wrap="square" rtlCol="0" lIns="0" tIns="0" rIns="0" bIns="0" anchor="t"/>
-          <a:lstStyle/>
-          <a:p>
-            <a:pPr algn="l">
-              <a:lnSpc>
-                <a:spcPct val="110000"/>
-              </a:lnSpc>
-            </a:pPr>
-            <a:r>
-              <a:rPr sz="1500">
-                <a:solidFill>
-                  <a:srgbClr val="9AA1AB"/>
-                </a:solidFill>
-                <a:latin typeface="Microsoft YaHei"/>
-                <a:ea typeface="Microsoft YaHei"/>
-              </a:rPr>
-              <a:t>Agent 生态 = 新的分发渠道：</a:t>
-            </a:r>
-            <a:r>
-              <a:rPr sz="1500" b="1">
-                <a:solidFill>
-                  <a:srgbClr val="63E2B7"/>
-                </a:solidFill>
-                <a:latin typeface="Microsoft YaHei"/>
-                <a:ea typeface="Microsoft YaHei"/>
-              </a:rPr>
-              <a:t>AI 用户的第一笔交易，可能从一次对话开始</a:t>
+              <a:t>同价位对标：TradingView $12.95–59.95/月 · 3Commas $15–60 · Composer $10–40 · SharkQuant $19.9 起</a:t>
             </a:r>
           </a:p>
         </p:txBody>
